--- a/Listas de Interfaces PALMA Software.pptx
+++ b/Listas de Interfaces PALMA Software.pptx
@@ -16,28 +16,40 @@
     <p:sldId id="261" r:id="rId10"/>
     <p:sldId id="262" r:id="rId11"/>
     <p:sldId id="263" r:id="rId12"/>
+    <p:sldId id="264" r:id="rId13"/>
+    <p:sldId id="265" r:id="rId14"/>
+    <p:sldId id="266" r:id="rId15"/>
+    <p:sldId id="267" r:id="rId16"/>
+    <p:sldId id="268" r:id="rId17"/>
+    <p:sldId id="269" r:id="rId18"/>
+    <p:sldId id="270" r:id="rId19"/>
   </p:sldIdLst>
   <p:sldSz cy="5143500" cx="9144000"/>
   <p:notesSz cx="6858000" cy="9144000"/>
   <p:embeddedFontLst>
     <p:embeddedFont>
       <p:font typeface="Montserrat Black"/>
-      <p:bold r:id="rId13"/>
-      <p:boldItalic r:id="rId14"/>
+      <p:bold r:id="rId20"/>
+      <p:boldItalic r:id="rId21"/>
     </p:embeddedFont>
     <p:embeddedFont>
       <p:font typeface="Montserrat"/>
-      <p:regular r:id="rId15"/>
-      <p:bold r:id="rId16"/>
-      <p:italic r:id="rId17"/>
-      <p:boldItalic r:id="rId18"/>
+      <p:regular r:id="rId22"/>
+      <p:bold r:id="rId23"/>
+      <p:italic r:id="rId24"/>
+      <p:boldItalic r:id="rId25"/>
     </p:embeddedFont>
     <p:embeddedFont>
       <p:font typeface="Montserrat Light"/>
-      <p:regular r:id="rId19"/>
-      <p:bold r:id="rId20"/>
-      <p:italic r:id="rId21"/>
-      <p:boldItalic r:id="rId22"/>
+      <p:regular r:id="rId26"/>
+      <p:bold r:id="rId27"/>
+      <p:italic r:id="rId28"/>
+      <p:boldItalic r:id="rId29"/>
+    </p:embeddedFont>
+    <p:embeddedFont>
+      <p:font typeface="Montserrat ExtraBold"/>
+      <p:bold r:id="rId30"/>
+      <p:boldItalic r:id="rId31"/>
     </p:embeddedFont>
   </p:embeddedFontLst>
   <p:defaultTextStyle>
@@ -797,6 +809,600 @@
 </p:notes>
 </file>
 
+<file path=ppt/notesSlides/notesSlide10.xml><?xml version="1.0" encoding="utf-8"?>
+<p:notes xmlns:a="http://schemas.openxmlformats.org/drawingml/2006/main" xmlns:r="http://schemas.openxmlformats.org/officeDocument/2006/relationships" xmlns:mc="http://schemas.openxmlformats.org/markup-compatibility/2006" xmlns:mv="urn:schemas-microsoft-com:mac:vml" xmlns:p="http://schemas.openxmlformats.org/presentationml/2006/main" xmlns:c="http://schemas.openxmlformats.org/drawingml/2006/chart" xmlns:dgm="http://schemas.openxmlformats.org/drawingml/2006/diagram" xmlns:o="urn:schemas-microsoft-com:office:office" xmlns:v="urn:schemas-microsoft-com:vml" xmlns:pvml="urn:schemas-microsoft-com:office:powerpoint" xmlns:com="http://schemas.openxmlformats.org/drawingml/2006/compatibility" xmlns:p14="http://schemas.microsoft.com/office/powerpoint/2010/main" xmlns:p15="http://schemas.microsoft.com/office/powerpoint/2012/main" xmlns:ahyp="http://schemas.microsoft.com/office/drawing/2018/hyperlinkcolor" showMasterPhAnim="0" showMasterSp="0">
+  <p:cSld>
+    <p:spTree>
+      <p:nvGrpSpPr>
+        <p:cNvPr id="162" name="Shape 162"/>
+        <p:cNvGrpSpPr/>
+        <p:nvPr/>
+      </p:nvGrpSpPr>
+      <p:grpSpPr>
+        <a:xfrm>
+          <a:off x="0" y="0"/>
+          <a:ext cx="0" cy="0"/>
+          <a:chOff x="0" y="0"/>
+          <a:chExt cx="0" cy="0"/>
+        </a:xfrm>
+      </p:grpSpPr>
+      <p:sp>
+        <p:nvSpPr>
+          <p:cNvPr id="163" name="Google Shape;163;g39686ff208d_0_69:notes"/>
+          <p:cNvSpPr/>
+          <p:nvPr>
+            <p:ph idx="2" type="sldImg"/>
+          </p:nvPr>
+        </p:nvSpPr>
+        <p:spPr>
+          <a:xfrm>
+            <a:off x="381300" y="685800"/>
+            <a:ext cx="6096000" cy="3429000"/>
+          </a:xfrm>
+          <a:custGeom>
+            <a:rect b="b" l="l" r="r" t="t"/>
+            <a:pathLst>
+              <a:path extrusionOk="0" h="120000" w="120000">
+                <a:moveTo>
+                  <a:pt x="0" y="0"/>
+                </a:moveTo>
+                <a:lnTo>
+                  <a:pt x="120000" y="0"/>
+                </a:lnTo>
+                <a:lnTo>
+                  <a:pt x="120000" y="120000"/>
+                </a:lnTo>
+                <a:lnTo>
+                  <a:pt x="0" y="120000"/>
+                </a:lnTo>
+                <a:close/>
+              </a:path>
+            </a:pathLst>
+          </a:custGeom>
+        </p:spPr>
+      </p:sp>
+      <p:sp>
+        <p:nvSpPr>
+          <p:cNvPr id="164" name="Google Shape;164;g39686ff208d_0_69:notes"/>
+          <p:cNvSpPr txBox="1"/>
+          <p:nvPr>
+            <p:ph idx="1" type="body"/>
+          </p:nvPr>
+        </p:nvSpPr>
+        <p:spPr>
+          <a:xfrm>
+            <a:off x="685800" y="4343400"/>
+            <a:ext cx="5486400" cy="4114800"/>
+          </a:xfrm>
+          <a:prstGeom prst="rect">
+            <a:avLst/>
+          </a:prstGeom>
+        </p:spPr>
+        <p:txBody>
+          <a:bodyPr anchorCtr="0" anchor="t" bIns="91425" lIns="91425" spcFirstLastPara="1" rIns="91425" wrap="square" tIns="91425">
+            <a:noAutofit/>
+          </a:bodyPr>
+          <a:lstStyle/>
+          <a:p>
+            <a:pPr indent="0" lvl="0" marL="0" rtl="0" algn="l">
+              <a:spcBef>
+                <a:spcPts val="0"/>
+              </a:spcBef>
+              <a:spcAft>
+                <a:spcPts val="0"/>
+              </a:spcAft>
+              <a:buNone/>
+            </a:pPr>
+            <a:r>
+              <a:t/>
+            </a:r>
+            <a:endParaRPr/>
+          </a:p>
+        </p:txBody>
+      </p:sp>
+    </p:spTree>
+  </p:cSld>
+  <p:clrMapOvr>
+    <a:masterClrMapping/>
+  </p:clrMapOvr>
+</p:notes>
+</file>
+
+<file path=ppt/notesSlides/notesSlide11.xml><?xml version="1.0" encoding="utf-8"?>
+<p:notes xmlns:a="http://schemas.openxmlformats.org/drawingml/2006/main" xmlns:r="http://schemas.openxmlformats.org/officeDocument/2006/relationships" xmlns:mc="http://schemas.openxmlformats.org/markup-compatibility/2006" xmlns:mv="urn:schemas-microsoft-com:mac:vml" xmlns:p="http://schemas.openxmlformats.org/presentationml/2006/main" xmlns:c="http://schemas.openxmlformats.org/drawingml/2006/chart" xmlns:dgm="http://schemas.openxmlformats.org/drawingml/2006/diagram" xmlns:o="urn:schemas-microsoft-com:office:office" xmlns:v="urn:schemas-microsoft-com:vml" xmlns:pvml="urn:schemas-microsoft-com:office:powerpoint" xmlns:com="http://schemas.openxmlformats.org/drawingml/2006/compatibility" xmlns:p14="http://schemas.microsoft.com/office/powerpoint/2010/main" xmlns:p15="http://schemas.microsoft.com/office/powerpoint/2012/main" xmlns:ahyp="http://schemas.microsoft.com/office/drawing/2018/hyperlinkcolor" showMasterPhAnim="0" showMasterSp="0">
+  <p:cSld>
+    <p:spTree>
+      <p:nvGrpSpPr>
+        <p:cNvPr id="166" name="Shape 166"/>
+        <p:cNvGrpSpPr/>
+        <p:nvPr/>
+      </p:nvGrpSpPr>
+      <p:grpSpPr>
+        <a:xfrm>
+          <a:off x="0" y="0"/>
+          <a:ext cx="0" cy="0"/>
+          <a:chOff x="0" y="0"/>
+          <a:chExt cx="0" cy="0"/>
+        </a:xfrm>
+      </p:grpSpPr>
+      <p:sp>
+        <p:nvSpPr>
+          <p:cNvPr id="167" name="Google Shape;167;g3941c867da9_0_0:notes"/>
+          <p:cNvSpPr/>
+          <p:nvPr>
+            <p:ph idx="2" type="sldImg"/>
+          </p:nvPr>
+        </p:nvSpPr>
+        <p:spPr>
+          <a:xfrm>
+            <a:off x="381300" y="685800"/>
+            <a:ext cx="6096000" cy="3429000"/>
+          </a:xfrm>
+          <a:custGeom>
+            <a:rect b="b" l="l" r="r" t="t"/>
+            <a:pathLst>
+              <a:path extrusionOk="0" h="120000" w="120000">
+                <a:moveTo>
+                  <a:pt x="0" y="0"/>
+                </a:moveTo>
+                <a:lnTo>
+                  <a:pt x="120000" y="0"/>
+                </a:lnTo>
+                <a:lnTo>
+                  <a:pt x="120000" y="120000"/>
+                </a:lnTo>
+                <a:lnTo>
+                  <a:pt x="0" y="120000"/>
+                </a:lnTo>
+                <a:close/>
+              </a:path>
+            </a:pathLst>
+          </a:custGeom>
+        </p:spPr>
+      </p:sp>
+      <p:sp>
+        <p:nvSpPr>
+          <p:cNvPr id="168" name="Google Shape;168;g3941c867da9_0_0:notes"/>
+          <p:cNvSpPr txBox="1"/>
+          <p:nvPr>
+            <p:ph idx="1" type="body"/>
+          </p:nvPr>
+        </p:nvSpPr>
+        <p:spPr>
+          <a:xfrm>
+            <a:off x="685800" y="4343400"/>
+            <a:ext cx="5486400" cy="4114800"/>
+          </a:xfrm>
+          <a:prstGeom prst="rect">
+            <a:avLst/>
+          </a:prstGeom>
+        </p:spPr>
+        <p:txBody>
+          <a:bodyPr anchorCtr="0" anchor="t" bIns="91425" lIns="91425" spcFirstLastPara="1" rIns="91425" wrap="square" tIns="91425">
+            <a:noAutofit/>
+          </a:bodyPr>
+          <a:lstStyle/>
+          <a:p>
+            <a:pPr indent="0" lvl="0" marL="0" rtl="0" algn="l">
+              <a:spcBef>
+                <a:spcPts val="0"/>
+              </a:spcBef>
+              <a:spcAft>
+                <a:spcPts val="0"/>
+              </a:spcAft>
+              <a:buNone/>
+            </a:pPr>
+            <a:r>
+              <a:t/>
+            </a:r>
+            <a:endParaRPr/>
+          </a:p>
+        </p:txBody>
+      </p:sp>
+    </p:spTree>
+  </p:cSld>
+  <p:clrMapOvr>
+    <a:masterClrMapping/>
+  </p:clrMapOvr>
+</p:notes>
+</file>
+
+<file path=ppt/notesSlides/notesSlide12.xml><?xml version="1.0" encoding="utf-8"?>
+<p:notes xmlns:a="http://schemas.openxmlformats.org/drawingml/2006/main" xmlns:r="http://schemas.openxmlformats.org/officeDocument/2006/relationships" xmlns:mc="http://schemas.openxmlformats.org/markup-compatibility/2006" xmlns:mv="urn:schemas-microsoft-com:mac:vml" xmlns:p="http://schemas.openxmlformats.org/presentationml/2006/main" xmlns:c="http://schemas.openxmlformats.org/drawingml/2006/chart" xmlns:dgm="http://schemas.openxmlformats.org/drawingml/2006/diagram" xmlns:o="urn:schemas-microsoft-com:office:office" xmlns:v="urn:schemas-microsoft-com:vml" xmlns:pvml="urn:schemas-microsoft-com:office:powerpoint" xmlns:com="http://schemas.openxmlformats.org/drawingml/2006/compatibility" xmlns:p14="http://schemas.microsoft.com/office/powerpoint/2010/main" xmlns:p15="http://schemas.microsoft.com/office/powerpoint/2012/main" xmlns:ahyp="http://schemas.microsoft.com/office/drawing/2018/hyperlinkcolor" showMasterPhAnim="0" showMasterSp="0">
+  <p:cSld>
+    <p:spTree>
+      <p:nvGrpSpPr>
+        <p:cNvPr id="179" name="Shape 179"/>
+        <p:cNvGrpSpPr/>
+        <p:nvPr/>
+      </p:nvGrpSpPr>
+      <p:grpSpPr>
+        <a:xfrm>
+          <a:off x="0" y="0"/>
+          <a:ext cx="0" cy="0"/>
+          <a:chOff x="0" y="0"/>
+          <a:chExt cx="0" cy="0"/>
+        </a:xfrm>
+      </p:grpSpPr>
+      <p:sp>
+        <p:nvSpPr>
+          <p:cNvPr id="180" name="Google Shape;180;g39686ff208d_0_102:notes"/>
+          <p:cNvSpPr/>
+          <p:nvPr>
+            <p:ph idx="2" type="sldImg"/>
+          </p:nvPr>
+        </p:nvSpPr>
+        <p:spPr>
+          <a:xfrm>
+            <a:off x="381300" y="685800"/>
+            <a:ext cx="6096000" cy="3429000"/>
+          </a:xfrm>
+          <a:custGeom>
+            <a:rect b="b" l="l" r="r" t="t"/>
+            <a:pathLst>
+              <a:path extrusionOk="0" h="120000" w="120000">
+                <a:moveTo>
+                  <a:pt x="0" y="0"/>
+                </a:moveTo>
+                <a:lnTo>
+                  <a:pt x="120000" y="0"/>
+                </a:lnTo>
+                <a:lnTo>
+                  <a:pt x="120000" y="120000"/>
+                </a:lnTo>
+                <a:lnTo>
+                  <a:pt x="0" y="120000"/>
+                </a:lnTo>
+                <a:close/>
+              </a:path>
+            </a:pathLst>
+          </a:custGeom>
+        </p:spPr>
+      </p:sp>
+      <p:sp>
+        <p:nvSpPr>
+          <p:cNvPr id="181" name="Google Shape;181;g39686ff208d_0_102:notes"/>
+          <p:cNvSpPr txBox="1"/>
+          <p:nvPr>
+            <p:ph idx="1" type="body"/>
+          </p:nvPr>
+        </p:nvSpPr>
+        <p:spPr>
+          <a:xfrm>
+            <a:off x="685800" y="4343400"/>
+            <a:ext cx="5486400" cy="4114800"/>
+          </a:xfrm>
+          <a:prstGeom prst="rect">
+            <a:avLst/>
+          </a:prstGeom>
+        </p:spPr>
+        <p:txBody>
+          <a:bodyPr anchorCtr="0" anchor="t" bIns="91425" lIns="91425" spcFirstLastPara="1" rIns="91425" wrap="square" tIns="91425">
+            <a:noAutofit/>
+          </a:bodyPr>
+          <a:lstStyle/>
+          <a:p>
+            <a:pPr indent="0" lvl="0" marL="0" rtl="0" algn="l">
+              <a:spcBef>
+                <a:spcPts val="0"/>
+              </a:spcBef>
+              <a:spcAft>
+                <a:spcPts val="0"/>
+              </a:spcAft>
+              <a:buNone/>
+            </a:pPr>
+            <a:r>
+              <a:t/>
+            </a:r>
+            <a:endParaRPr/>
+          </a:p>
+        </p:txBody>
+      </p:sp>
+    </p:spTree>
+  </p:cSld>
+  <p:clrMapOvr>
+    <a:masterClrMapping/>
+  </p:clrMapOvr>
+</p:notes>
+</file>
+
+<file path=ppt/notesSlides/notesSlide13.xml><?xml version="1.0" encoding="utf-8"?>
+<p:notes xmlns:a="http://schemas.openxmlformats.org/drawingml/2006/main" xmlns:r="http://schemas.openxmlformats.org/officeDocument/2006/relationships" xmlns:mc="http://schemas.openxmlformats.org/markup-compatibility/2006" xmlns:mv="urn:schemas-microsoft-com:mac:vml" xmlns:p="http://schemas.openxmlformats.org/presentationml/2006/main" xmlns:c="http://schemas.openxmlformats.org/drawingml/2006/chart" xmlns:dgm="http://schemas.openxmlformats.org/drawingml/2006/diagram" xmlns:o="urn:schemas-microsoft-com:office:office" xmlns:v="urn:schemas-microsoft-com:vml" xmlns:pvml="urn:schemas-microsoft-com:office:powerpoint" xmlns:com="http://schemas.openxmlformats.org/drawingml/2006/compatibility" xmlns:p14="http://schemas.microsoft.com/office/powerpoint/2010/main" xmlns:p15="http://schemas.microsoft.com/office/powerpoint/2012/main" xmlns:ahyp="http://schemas.microsoft.com/office/drawing/2018/hyperlinkcolor" showMasterPhAnim="0" showMasterSp="0">
+  <p:cSld>
+    <p:spTree>
+      <p:nvGrpSpPr>
+        <p:cNvPr id="192" name="Shape 192"/>
+        <p:cNvGrpSpPr/>
+        <p:nvPr/>
+      </p:nvGrpSpPr>
+      <p:grpSpPr>
+        <a:xfrm>
+          <a:off x="0" y="0"/>
+          <a:ext cx="0" cy="0"/>
+          <a:chOff x="0" y="0"/>
+          <a:chExt cx="0" cy="0"/>
+        </a:xfrm>
+      </p:grpSpPr>
+      <p:sp>
+        <p:nvSpPr>
+          <p:cNvPr id="193" name="Google Shape;193;g39686ff208d_0_184:notes"/>
+          <p:cNvSpPr/>
+          <p:nvPr>
+            <p:ph idx="2" type="sldImg"/>
+          </p:nvPr>
+        </p:nvSpPr>
+        <p:spPr>
+          <a:xfrm>
+            <a:off x="381300" y="685800"/>
+            <a:ext cx="6096000" cy="3429000"/>
+          </a:xfrm>
+          <a:custGeom>
+            <a:rect b="b" l="l" r="r" t="t"/>
+            <a:pathLst>
+              <a:path extrusionOk="0" h="120000" w="120000">
+                <a:moveTo>
+                  <a:pt x="0" y="0"/>
+                </a:moveTo>
+                <a:lnTo>
+                  <a:pt x="120000" y="0"/>
+                </a:lnTo>
+                <a:lnTo>
+                  <a:pt x="120000" y="120000"/>
+                </a:lnTo>
+                <a:lnTo>
+                  <a:pt x="0" y="120000"/>
+                </a:lnTo>
+                <a:close/>
+              </a:path>
+            </a:pathLst>
+          </a:custGeom>
+        </p:spPr>
+      </p:sp>
+      <p:sp>
+        <p:nvSpPr>
+          <p:cNvPr id="194" name="Google Shape;194;g39686ff208d_0_184:notes"/>
+          <p:cNvSpPr txBox="1"/>
+          <p:nvPr>
+            <p:ph idx="1" type="body"/>
+          </p:nvPr>
+        </p:nvSpPr>
+        <p:spPr>
+          <a:xfrm>
+            <a:off x="685800" y="4343400"/>
+            <a:ext cx="5486400" cy="4114800"/>
+          </a:xfrm>
+          <a:prstGeom prst="rect">
+            <a:avLst/>
+          </a:prstGeom>
+        </p:spPr>
+        <p:txBody>
+          <a:bodyPr anchorCtr="0" anchor="t" bIns="91425" lIns="91425" spcFirstLastPara="1" rIns="91425" wrap="square" tIns="91425">
+            <a:noAutofit/>
+          </a:bodyPr>
+          <a:lstStyle/>
+          <a:p>
+            <a:pPr indent="0" lvl="0" marL="0" rtl="0" algn="l">
+              <a:spcBef>
+                <a:spcPts val="0"/>
+              </a:spcBef>
+              <a:spcAft>
+                <a:spcPts val="0"/>
+              </a:spcAft>
+              <a:buNone/>
+            </a:pPr>
+            <a:r>
+              <a:t/>
+            </a:r>
+            <a:endParaRPr/>
+          </a:p>
+        </p:txBody>
+      </p:sp>
+    </p:spTree>
+  </p:cSld>
+  <p:clrMapOvr>
+    <a:masterClrMapping/>
+  </p:clrMapOvr>
+</p:notes>
+</file>
+
+<file path=ppt/notesSlides/notesSlide14.xml><?xml version="1.0" encoding="utf-8"?>
+<p:notes xmlns:a="http://schemas.openxmlformats.org/drawingml/2006/main" xmlns:r="http://schemas.openxmlformats.org/officeDocument/2006/relationships" xmlns:mc="http://schemas.openxmlformats.org/markup-compatibility/2006" xmlns:mv="urn:schemas-microsoft-com:mac:vml" xmlns:p="http://schemas.openxmlformats.org/presentationml/2006/main" xmlns:c="http://schemas.openxmlformats.org/drawingml/2006/chart" xmlns:dgm="http://schemas.openxmlformats.org/drawingml/2006/diagram" xmlns:o="urn:schemas-microsoft-com:office:office" xmlns:v="urn:schemas-microsoft-com:vml" xmlns:pvml="urn:schemas-microsoft-com:office:powerpoint" xmlns:com="http://schemas.openxmlformats.org/drawingml/2006/compatibility" xmlns:p14="http://schemas.microsoft.com/office/powerpoint/2010/main" xmlns:p15="http://schemas.microsoft.com/office/powerpoint/2012/main" xmlns:ahyp="http://schemas.microsoft.com/office/drawing/2018/hyperlinkcolor" showMasterPhAnim="0" showMasterSp="0">
+  <p:cSld>
+    <p:spTree>
+      <p:nvGrpSpPr>
+        <p:cNvPr id="205" name="Shape 205"/>
+        <p:cNvGrpSpPr/>
+        <p:nvPr/>
+      </p:nvGrpSpPr>
+      <p:grpSpPr>
+        <a:xfrm>
+          <a:off x="0" y="0"/>
+          <a:ext cx="0" cy="0"/>
+          <a:chOff x="0" y="0"/>
+          <a:chExt cx="0" cy="0"/>
+        </a:xfrm>
+      </p:grpSpPr>
+      <p:sp>
+        <p:nvSpPr>
+          <p:cNvPr id="206" name="Google Shape;206;g39686ff208d_0_196:notes"/>
+          <p:cNvSpPr/>
+          <p:nvPr>
+            <p:ph idx="2" type="sldImg"/>
+          </p:nvPr>
+        </p:nvSpPr>
+        <p:spPr>
+          <a:xfrm>
+            <a:off x="381300" y="685800"/>
+            <a:ext cx="6096000" cy="3429000"/>
+          </a:xfrm>
+          <a:custGeom>
+            <a:rect b="b" l="l" r="r" t="t"/>
+            <a:pathLst>
+              <a:path extrusionOk="0" h="120000" w="120000">
+                <a:moveTo>
+                  <a:pt x="0" y="0"/>
+                </a:moveTo>
+                <a:lnTo>
+                  <a:pt x="120000" y="0"/>
+                </a:lnTo>
+                <a:lnTo>
+                  <a:pt x="120000" y="120000"/>
+                </a:lnTo>
+                <a:lnTo>
+                  <a:pt x="0" y="120000"/>
+                </a:lnTo>
+                <a:close/>
+              </a:path>
+            </a:pathLst>
+          </a:custGeom>
+        </p:spPr>
+      </p:sp>
+      <p:sp>
+        <p:nvSpPr>
+          <p:cNvPr id="207" name="Google Shape;207;g39686ff208d_0_196:notes"/>
+          <p:cNvSpPr txBox="1"/>
+          <p:nvPr>
+            <p:ph idx="1" type="body"/>
+          </p:nvPr>
+        </p:nvSpPr>
+        <p:spPr>
+          <a:xfrm>
+            <a:off x="685800" y="4343400"/>
+            <a:ext cx="5486400" cy="4114800"/>
+          </a:xfrm>
+          <a:prstGeom prst="rect">
+            <a:avLst/>
+          </a:prstGeom>
+        </p:spPr>
+        <p:txBody>
+          <a:bodyPr anchorCtr="0" anchor="t" bIns="91425" lIns="91425" spcFirstLastPara="1" rIns="91425" wrap="square" tIns="91425">
+            <a:noAutofit/>
+          </a:bodyPr>
+          <a:lstStyle/>
+          <a:p>
+            <a:pPr indent="0" lvl="0" marL="0" rtl="0" algn="l">
+              <a:spcBef>
+                <a:spcPts val="0"/>
+              </a:spcBef>
+              <a:spcAft>
+                <a:spcPts val="0"/>
+              </a:spcAft>
+              <a:buNone/>
+            </a:pPr>
+            <a:r>
+              <a:t/>
+            </a:r>
+            <a:endParaRPr/>
+          </a:p>
+        </p:txBody>
+      </p:sp>
+    </p:spTree>
+  </p:cSld>
+  <p:clrMapOvr>
+    <a:masterClrMapping/>
+  </p:clrMapOvr>
+</p:notes>
+</file>
+
+<file path=ppt/notesSlides/notesSlide15.xml><?xml version="1.0" encoding="utf-8"?>
+<p:notes xmlns:a="http://schemas.openxmlformats.org/drawingml/2006/main" xmlns:r="http://schemas.openxmlformats.org/officeDocument/2006/relationships" xmlns:mc="http://schemas.openxmlformats.org/markup-compatibility/2006" xmlns:mv="urn:schemas-microsoft-com:mac:vml" xmlns:p="http://schemas.openxmlformats.org/presentationml/2006/main" xmlns:c="http://schemas.openxmlformats.org/drawingml/2006/chart" xmlns:dgm="http://schemas.openxmlformats.org/drawingml/2006/diagram" xmlns:o="urn:schemas-microsoft-com:office:office" xmlns:v="urn:schemas-microsoft-com:vml" xmlns:pvml="urn:schemas-microsoft-com:office:powerpoint" xmlns:com="http://schemas.openxmlformats.org/drawingml/2006/compatibility" xmlns:p14="http://schemas.microsoft.com/office/powerpoint/2010/main" xmlns:p15="http://schemas.microsoft.com/office/powerpoint/2012/main" xmlns:ahyp="http://schemas.microsoft.com/office/drawing/2018/hyperlinkcolor" showMasterPhAnim="0" showMasterSp="0">
+  <p:cSld>
+    <p:spTree>
+      <p:nvGrpSpPr>
+        <p:cNvPr id="210" name="Shape 210"/>
+        <p:cNvGrpSpPr/>
+        <p:nvPr/>
+      </p:nvGrpSpPr>
+      <p:grpSpPr>
+        <a:xfrm>
+          <a:off x="0" y="0"/>
+          <a:ext cx="0" cy="0"/>
+          <a:chOff x="0" y="0"/>
+          <a:chExt cx="0" cy="0"/>
+        </a:xfrm>
+      </p:grpSpPr>
+      <p:sp>
+        <p:nvSpPr>
+          <p:cNvPr id="211" name="Google Shape;211;g39686ff208d_0_84:notes"/>
+          <p:cNvSpPr/>
+          <p:nvPr>
+            <p:ph idx="2" type="sldImg"/>
+          </p:nvPr>
+        </p:nvSpPr>
+        <p:spPr>
+          <a:xfrm>
+            <a:off x="381300" y="685800"/>
+            <a:ext cx="6096000" cy="3429000"/>
+          </a:xfrm>
+          <a:custGeom>
+            <a:rect b="b" l="l" r="r" t="t"/>
+            <a:pathLst>
+              <a:path extrusionOk="0" h="120000" w="120000">
+                <a:moveTo>
+                  <a:pt x="0" y="0"/>
+                </a:moveTo>
+                <a:lnTo>
+                  <a:pt x="120000" y="0"/>
+                </a:lnTo>
+                <a:lnTo>
+                  <a:pt x="120000" y="120000"/>
+                </a:lnTo>
+                <a:lnTo>
+                  <a:pt x="0" y="120000"/>
+                </a:lnTo>
+                <a:close/>
+              </a:path>
+            </a:pathLst>
+          </a:custGeom>
+        </p:spPr>
+      </p:sp>
+      <p:sp>
+        <p:nvSpPr>
+          <p:cNvPr id="212" name="Google Shape;212;g39686ff208d_0_84:notes"/>
+          <p:cNvSpPr txBox="1"/>
+          <p:nvPr>
+            <p:ph idx="1" type="body"/>
+          </p:nvPr>
+        </p:nvSpPr>
+        <p:spPr>
+          <a:xfrm>
+            <a:off x="685800" y="4343400"/>
+            <a:ext cx="5486400" cy="4114800"/>
+          </a:xfrm>
+          <a:prstGeom prst="rect">
+            <a:avLst/>
+          </a:prstGeom>
+        </p:spPr>
+        <p:txBody>
+          <a:bodyPr anchorCtr="0" anchor="t" bIns="91425" lIns="91425" spcFirstLastPara="1" rIns="91425" wrap="square" tIns="91425">
+            <a:noAutofit/>
+          </a:bodyPr>
+          <a:lstStyle/>
+          <a:p>
+            <a:pPr indent="0" lvl="0" marL="0" rtl="0" algn="l">
+              <a:spcBef>
+                <a:spcPts val="0"/>
+              </a:spcBef>
+              <a:spcAft>
+                <a:spcPts val="0"/>
+              </a:spcAft>
+              <a:buNone/>
+            </a:pPr>
+            <a:r>
+              <a:t/>
+            </a:r>
+            <a:endParaRPr/>
+          </a:p>
+        </p:txBody>
+      </p:sp>
+    </p:spTree>
+  </p:cSld>
+  <p:clrMapOvr>
+    <a:masterClrMapping/>
+  </p:clrMapOvr>
+</p:notes>
+</file>
+
 <file path=ppt/notesSlides/notesSlide2.xml><?xml version="1.0" encoding="utf-8"?>
 <p:notes xmlns:a="http://schemas.openxmlformats.org/drawingml/2006/main" xmlns:r="http://schemas.openxmlformats.org/officeDocument/2006/relationships" xmlns:mc="http://schemas.openxmlformats.org/markup-compatibility/2006" xmlns:mv="urn:schemas-microsoft-com:mac:vml" xmlns:p="http://schemas.openxmlformats.org/presentationml/2006/main" xmlns:c="http://schemas.openxmlformats.org/drawingml/2006/chart" xmlns:dgm="http://schemas.openxmlformats.org/drawingml/2006/diagram" xmlns:o="urn:schemas-microsoft-com:office:office" xmlns:v="urn:schemas-microsoft-com:vml" xmlns:pvml="urn:schemas-microsoft-com:office:powerpoint" xmlns:com="http://schemas.openxmlformats.org/drawingml/2006/compatibility" xmlns:p14="http://schemas.microsoft.com/office/powerpoint/2010/main" xmlns:p15="http://schemas.microsoft.com/office/powerpoint/2012/main" xmlns:ahyp="http://schemas.microsoft.com/office/drawing/2018/hyperlinkcolor" showMasterPhAnim="0" showMasterSp="0">
   <p:cSld>
@@ -1000,7 +1606,7 @@
   <p:cSld>
     <p:spTree>
       <p:nvGrpSpPr>
-        <p:cNvPr id="72" name="Shape 72"/>
+        <p:cNvPr id="73" name="Shape 73"/>
         <p:cNvGrpSpPr/>
         <p:nvPr/>
       </p:nvGrpSpPr>
@@ -1014,7 +1620,7 @@
       </p:grpSpPr>
       <p:sp>
         <p:nvSpPr>
-          <p:cNvPr id="73" name="Google Shape;73;g39686ff208d_0_36:notes"/>
+          <p:cNvPr id="74" name="Google Shape;74;g39686ff208d_0_36:notes"/>
           <p:cNvSpPr/>
           <p:nvPr>
             <p:ph idx="2" type="sldImg"/>
@@ -1049,7 +1655,7 @@
       </p:sp>
       <p:sp>
         <p:nvSpPr>
-          <p:cNvPr id="74" name="Google Shape;74;g39686ff208d_0_36:notes"/>
+          <p:cNvPr id="75" name="Google Shape;75;g39686ff208d_0_36:notes"/>
           <p:cNvSpPr txBox="1"/>
           <p:nvPr>
             <p:ph idx="1" type="body"/>
@@ -1099,7 +1705,7 @@
   <p:cSld>
     <p:spTree>
       <p:nvGrpSpPr>
-        <p:cNvPr id="81" name="Shape 81"/>
+        <p:cNvPr id="82" name="Shape 82"/>
         <p:cNvGrpSpPr/>
         <p:nvPr/>
       </p:nvGrpSpPr>
@@ -1113,7 +1719,7 @@
       </p:grpSpPr>
       <p:sp>
         <p:nvSpPr>
-          <p:cNvPr id="82" name="Google Shape;82;g39686ff208d_0_55:notes"/>
+          <p:cNvPr id="83" name="Google Shape;83;g39686ff208d_0_55:notes"/>
           <p:cNvSpPr/>
           <p:nvPr>
             <p:ph idx="2" type="sldImg"/>
@@ -1148,7 +1754,7 @@
       </p:sp>
       <p:sp>
         <p:nvSpPr>
-          <p:cNvPr id="83" name="Google Shape;83;g39686ff208d_0_55:notes"/>
+          <p:cNvPr id="84" name="Google Shape;84;g39686ff208d_0_55:notes"/>
           <p:cNvSpPr txBox="1"/>
           <p:nvPr>
             <p:ph idx="1" type="body"/>
@@ -1198,7 +1804,7 @@
   <p:cSld>
     <p:spTree>
       <p:nvGrpSpPr>
-        <p:cNvPr id="89" name="Shape 89"/>
+        <p:cNvPr id="90" name="Shape 90"/>
         <p:cNvGrpSpPr/>
         <p:nvPr/>
       </p:nvGrpSpPr>
@@ -1212,7 +1818,7 @@
       </p:grpSpPr>
       <p:sp>
         <p:nvSpPr>
-          <p:cNvPr id="90" name="Google Shape;90;g3c9743b3de7_0_0:notes"/>
+          <p:cNvPr id="91" name="Google Shape;91;g3c9743b3de7_0_0:notes"/>
           <p:cNvSpPr/>
           <p:nvPr>
             <p:ph idx="2" type="sldImg"/>
@@ -1247,7 +1853,7 @@
       </p:sp>
       <p:sp>
         <p:nvSpPr>
-          <p:cNvPr id="91" name="Google Shape;91;g3c9743b3de7_0_0:notes"/>
+          <p:cNvPr id="92" name="Google Shape;92;g3c9743b3de7_0_0:notes"/>
           <p:cNvSpPr txBox="1"/>
           <p:nvPr>
             <p:ph idx="1" type="body"/>
@@ -1297,7 +1903,7 @@
   <p:cSld>
     <p:spTree>
       <p:nvGrpSpPr>
-        <p:cNvPr id="115" name="Shape 115"/>
+        <p:cNvPr id="116" name="Shape 116"/>
         <p:cNvGrpSpPr/>
         <p:nvPr/>
       </p:nvGrpSpPr>
@@ -1311,7 +1917,7 @@
       </p:grpSpPr>
       <p:sp>
         <p:nvSpPr>
-          <p:cNvPr id="116" name="Google Shape;116;g3941c867da9_0_0:notes"/>
+          <p:cNvPr id="117" name="Google Shape;117;g39686ff208d_0_123:notes"/>
           <p:cNvSpPr/>
           <p:nvPr>
             <p:ph idx="2" type="sldImg"/>
@@ -1346,7 +1952,7 @@
       </p:sp>
       <p:sp>
         <p:nvSpPr>
-          <p:cNvPr id="117" name="Google Shape;117;g3941c867da9_0_0:notes"/>
+          <p:cNvPr id="118" name="Google Shape;118;g39686ff208d_0_123:notes"/>
           <p:cNvSpPr txBox="1"/>
           <p:nvPr>
             <p:ph idx="1" type="body"/>
@@ -1396,7 +2002,7 @@
   <p:cSld>
     <p:spTree>
       <p:nvGrpSpPr>
-        <p:cNvPr id="128" name="Shape 128"/>
+        <p:cNvPr id="145" name="Shape 145"/>
         <p:cNvGrpSpPr/>
         <p:nvPr/>
       </p:nvGrpSpPr>
@@ -1410,7 +2016,7 @@
       </p:grpSpPr>
       <p:sp>
         <p:nvSpPr>
-          <p:cNvPr id="129" name="Google Shape;129;g3966e64169d_0_0:notes"/>
+          <p:cNvPr id="146" name="Google Shape;146;g39686ff208d_0_154:notes"/>
           <p:cNvSpPr/>
           <p:nvPr>
             <p:ph idx="2" type="sldImg"/>
@@ -1445,7 +2051,106 @@
       </p:sp>
       <p:sp>
         <p:nvSpPr>
-          <p:cNvPr id="130" name="Google Shape;130;g3966e64169d_0_0:notes"/>
+          <p:cNvPr id="147" name="Google Shape;147;g39686ff208d_0_154:notes"/>
+          <p:cNvSpPr txBox="1"/>
+          <p:nvPr>
+            <p:ph idx="1" type="body"/>
+          </p:nvPr>
+        </p:nvSpPr>
+        <p:spPr>
+          <a:xfrm>
+            <a:off x="685800" y="4343400"/>
+            <a:ext cx="5486400" cy="4114800"/>
+          </a:xfrm>
+          <a:prstGeom prst="rect">
+            <a:avLst/>
+          </a:prstGeom>
+        </p:spPr>
+        <p:txBody>
+          <a:bodyPr anchorCtr="0" anchor="t" bIns="91425" lIns="91425" spcFirstLastPara="1" rIns="91425" wrap="square" tIns="91425">
+            <a:noAutofit/>
+          </a:bodyPr>
+          <a:lstStyle/>
+          <a:p>
+            <a:pPr indent="0" lvl="0" marL="0" rtl="0" algn="l">
+              <a:spcBef>
+                <a:spcPts val="0"/>
+              </a:spcBef>
+              <a:spcAft>
+                <a:spcPts val="0"/>
+              </a:spcAft>
+              <a:buNone/>
+            </a:pPr>
+            <a:r>
+              <a:t/>
+            </a:r>
+            <a:endParaRPr/>
+          </a:p>
+        </p:txBody>
+      </p:sp>
+    </p:spTree>
+  </p:cSld>
+  <p:clrMapOvr>
+    <a:masterClrMapping/>
+  </p:clrMapOvr>
+</p:notes>
+</file>
+
+<file path=ppt/notesSlides/notesSlide9.xml><?xml version="1.0" encoding="utf-8"?>
+<p:notes xmlns:a="http://schemas.openxmlformats.org/drawingml/2006/main" xmlns:r="http://schemas.openxmlformats.org/officeDocument/2006/relationships" xmlns:mc="http://schemas.openxmlformats.org/markup-compatibility/2006" xmlns:mv="urn:schemas-microsoft-com:mac:vml" xmlns:p="http://schemas.openxmlformats.org/presentationml/2006/main" xmlns:c="http://schemas.openxmlformats.org/drawingml/2006/chart" xmlns:dgm="http://schemas.openxmlformats.org/drawingml/2006/diagram" xmlns:o="urn:schemas-microsoft-com:office:office" xmlns:v="urn:schemas-microsoft-com:vml" xmlns:pvml="urn:schemas-microsoft-com:office:powerpoint" xmlns:com="http://schemas.openxmlformats.org/drawingml/2006/compatibility" xmlns:p14="http://schemas.microsoft.com/office/powerpoint/2010/main" xmlns:p15="http://schemas.microsoft.com/office/powerpoint/2012/main" xmlns:ahyp="http://schemas.microsoft.com/office/drawing/2018/hyperlinkcolor" showMasterPhAnim="0" showMasterSp="0">
+  <p:cSld>
+    <p:spTree>
+      <p:nvGrpSpPr>
+        <p:cNvPr id="158" name="Shape 158"/>
+        <p:cNvGrpSpPr/>
+        <p:nvPr/>
+      </p:nvGrpSpPr>
+      <p:grpSpPr>
+        <a:xfrm>
+          <a:off x="0" y="0"/>
+          <a:ext cx="0" cy="0"/>
+          <a:chOff x="0" y="0"/>
+          <a:chExt cx="0" cy="0"/>
+        </a:xfrm>
+      </p:grpSpPr>
+      <p:sp>
+        <p:nvSpPr>
+          <p:cNvPr id="159" name="Google Shape;159;g39686ff208d_0_64:notes"/>
+          <p:cNvSpPr/>
+          <p:nvPr>
+            <p:ph idx="2" type="sldImg"/>
+          </p:nvPr>
+        </p:nvSpPr>
+        <p:spPr>
+          <a:xfrm>
+            <a:off x="381300" y="685800"/>
+            <a:ext cx="6096000" cy="3429000"/>
+          </a:xfrm>
+          <a:custGeom>
+            <a:rect b="b" l="l" r="r" t="t"/>
+            <a:pathLst>
+              <a:path extrusionOk="0" h="120000" w="120000">
+                <a:moveTo>
+                  <a:pt x="0" y="0"/>
+                </a:moveTo>
+                <a:lnTo>
+                  <a:pt x="120000" y="0"/>
+                </a:lnTo>
+                <a:lnTo>
+                  <a:pt x="120000" y="120000"/>
+                </a:lnTo>
+                <a:lnTo>
+                  <a:pt x="0" y="120000"/>
+                </a:lnTo>
+                <a:close/>
+              </a:path>
+            </a:pathLst>
+          </a:custGeom>
+        </p:spPr>
+      </p:sp>
+      <p:sp>
+        <p:nvSpPr>
+          <p:cNvPr id="160" name="Google Shape;160;g39686ff208d_0_64:notes"/>
           <p:cNvSpPr txBox="1"/>
           <p:nvPr>
             <p:ph idx="1" type="body"/>
@@ -6345,6 +7050,2025 @@
 </p:sld>
 </file>
 
+<file path=ppt/slides/slide10.xml><?xml version="1.0" encoding="utf-8"?>
+<p:sld xmlns:a="http://schemas.openxmlformats.org/drawingml/2006/main" xmlns:r="http://schemas.openxmlformats.org/officeDocument/2006/relationships" xmlns:mc="http://schemas.openxmlformats.org/markup-compatibility/2006" xmlns:mv="urn:schemas-microsoft-com:mac:vml" xmlns:p="http://schemas.openxmlformats.org/presentationml/2006/main" xmlns:c="http://schemas.openxmlformats.org/drawingml/2006/chart" xmlns:dgm="http://schemas.openxmlformats.org/drawingml/2006/diagram" xmlns:o="urn:schemas-microsoft-com:office:office" xmlns:v="urn:schemas-microsoft-com:vml" xmlns:pvml="urn:schemas-microsoft-com:office:powerpoint" xmlns:com="http://schemas.openxmlformats.org/drawingml/2006/compatibility" xmlns:p14="http://schemas.microsoft.com/office/powerpoint/2010/main" xmlns:p15="http://schemas.microsoft.com/office/powerpoint/2012/main" xmlns:ahyp="http://schemas.microsoft.com/office/drawing/2018/hyperlinkcolor">
+  <p:cSld>
+    <p:spTree>
+      <p:nvGrpSpPr>
+        <p:cNvPr id="165" name="Shape 165"/>
+        <p:cNvGrpSpPr/>
+        <p:nvPr/>
+      </p:nvGrpSpPr>
+      <p:grpSpPr>
+        <a:xfrm>
+          <a:off x="0" y="0"/>
+          <a:ext cx="0" cy="0"/>
+          <a:chOff x="0" y="0"/>
+          <a:chExt cx="0" cy="0"/>
+        </a:xfrm>
+      </p:grpSpPr>
+    </p:spTree>
+  </p:cSld>
+  <p:clrMapOvr>
+    <a:masterClrMapping/>
+  </p:clrMapOvr>
+</p:sld>
+</file>
+
+<file path=ppt/slides/slide11.xml><?xml version="1.0" encoding="utf-8"?>
+<p:sld xmlns:a="http://schemas.openxmlformats.org/drawingml/2006/main" xmlns:r="http://schemas.openxmlformats.org/officeDocument/2006/relationships" xmlns:mc="http://schemas.openxmlformats.org/markup-compatibility/2006" xmlns:mv="urn:schemas-microsoft-com:mac:vml" xmlns:p="http://schemas.openxmlformats.org/presentationml/2006/main" xmlns:c="http://schemas.openxmlformats.org/drawingml/2006/chart" xmlns:dgm="http://schemas.openxmlformats.org/drawingml/2006/diagram" xmlns:o="urn:schemas-microsoft-com:office:office" xmlns:v="urn:schemas-microsoft-com:vml" xmlns:pvml="urn:schemas-microsoft-com:office:powerpoint" xmlns:com="http://schemas.openxmlformats.org/drawingml/2006/compatibility" xmlns:p14="http://schemas.microsoft.com/office/powerpoint/2010/main" xmlns:p15="http://schemas.microsoft.com/office/powerpoint/2012/main" xmlns:ahyp="http://schemas.microsoft.com/office/drawing/2018/hyperlinkcolor">
+  <p:cSld>
+    <p:bg>
+      <p:bgPr>
+        <a:solidFill>
+          <a:srgbClr val="EFEFEF"/>
+        </a:solidFill>
+      </p:bgPr>
+    </p:bg>
+    <p:spTree>
+      <p:nvGrpSpPr>
+        <p:cNvPr id="169" name="Shape 169"/>
+        <p:cNvGrpSpPr/>
+        <p:nvPr/>
+      </p:nvGrpSpPr>
+      <p:grpSpPr>
+        <a:xfrm>
+          <a:off x="0" y="0"/>
+          <a:ext cx="0" cy="0"/>
+          <a:chOff x="0" y="0"/>
+          <a:chExt cx="0" cy="0"/>
+        </a:xfrm>
+      </p:grpSpPr>
+      <p:sp>
+        <p:nvSpPr>
+          <p:cNvPr id="170" name="Google Shape;170;p23"/>
+          <p:cNvSpPr/>
+          <p:nvPr/>
+        </p:nvSpPr>
+        <p:spPr>
+          <a:xfrm>
+            <a:off x="129500" y="987950"/>
+            <a:ext cx="8903700" cy="4062600"/>
+          </a:xfrm>
+          <a:prstGeom prst="roundRect">
+            <a:avLst>
+              <a:gd fmla="val 2154" name="adj"/>
+            </a:avLst>
+          </a:prstGeom>
+          <a:solidFill>
+            <a:schemeClr val="lt1"/>
+          </a:solidFill>
+          <a:ln cap="flat" cmpd="sng" w="9525">
+            <a:solidFill>
+              <a:schemeClr val="lt1"/>
+            </a:solidFill>
+            <a:prstDash val="solid"/>
+            <a:round/>
+            <a:headEnd len="sm" w="sm" type="none"/>
+            <a:tailEnd len="sm" w="sm" type="none"/>
+          </a:ln>
+        </p:spPr>
+        <p:txBody>
+          <a:bodyPr anchorCtr="0" anchor="ctr" bIns="91425" lIns="91425" spcFirstLastPara="1" rIns="91425" wrap="square" tIns="91425">
+            <a:noAutofit/>
+          </a:bodyPr>
+          <a:lstStyle/>
+          <a:p>
+            <a:pPr indent="0" lvl="0" marL="0" rtl="0" algn="ctr">
+              <a:spcBef>
+                <a:spcPts val="0"/>
+              </a:spcBef>
+              <a:spcAft>
+                <a:spcPts val="0"/>
+              </a:spcAft>
+              <a:buNone/>
+            </a:pPr>
+            <a:r>
+              <a:t/>
+            </a:r>
+            <a:endParaRPr>
+              <a:solidFill>
+                <a:srgbClr val="274E13"/>
+              </a:solidFill>
+              <a:latin typeface="Montserrat"/>
+              <a:ea typeface="Montserrat"/>
+              <a:cs typeface="Montserrat"/>
+              <a:sym typeface="Montserrat"/>
+            </a:endParaRPr>
+          </a:p>
+        </p:txBody>
+      </p:sp>
+      <p:sp>
+        <p:nvSpPr>
+          <p:cNvPr id="171" name="Google Shape;171;p23"/>
+          <p:cNvSpPr txBox="1"/>
+          <p:nvPr/>
+        </p:nvSpPr>
+        <p:spPr>
+          <a:xfrm>
+            <a:off x="53125" y="1418759"/>
+            <a:ext cx="8986500" cy="229800"/>
+          </a:xfrm>
+          <a:prstGeom prst="rect">
+            <a:avLst/>
+          </a:prstGeom>
+          <a:noFill/>
+          <a:ln>
+            <a:noFill/>
+          </a:ln>
+        </p:spPr>
+        <p:txBody>
+          <a:bodyPr anchorCtr="0" anchor="ctr" bIns="91425" lIns="91425" spcFirstLastPara="1" rIns="91425" wrap="square" tIns="91425">
+            <a:noAutofit/>
+          </a:bodyPr>
+          <a:lstStyle/>
+          <a:p>
+            <a:pPr indent="0" lvl="0" marL="0" rtl="0" algn="ctr">
+              <a:spcBef>
+                <a:spcPts val="0"/>
+              </a:spcBef>
+              <a:spcAft>
+                <a:spcPts val="0"/>
+              </a:spcAft>
+              <a:buNone/>
+            </a:pPr>
+            <a:r>
+              <a:rPr lang="es-419" sz="800">
+                <a:solidFill>
+                  <a:srgbClr val="008629"/>
+                </a:solidFill>
+                <a:latin typeface="Montserrat"/>
+                <a:ea typeface="Montserrat"/>
+                <a:cs typeface="Montserrat"/>
+                <a:sym typeface="Montserrat"/>
+              </a:rPr>
+              <a:t>ID FACTURA			ID CLIENTE			FECHA			NOMBRE CLIENTE			TOTAL		PDF</a:t>
+            </a:r>
+            <a:endParaRPr sz="800">
+              <a:solidFill>
+                <a:srgbClr val="008629"/>
+              </a:solidFill>
+              <a:latin typeface="Montserrat"/>
+              <a:ea typeface="Montserrat"/>
+              <a:cs typeface="Montserrat"/>
+              <a:sym typeface="Montserrat"/>
+            </a:endParaRPr>
+          </a:p>
+        </p:txBody>
+      </p:sp>
+      <p:sp>
+        <p:nvSpPr>
+          <p:cNvPr id="172" name="Google Shape;172;p23"/>
+          <p:cNvSpPr/>
+          <p:nvPr/>
+        </p:nvSpPr>
+        <p:spPr>
+          <a:xfrm>
+            <a:off x="6915167" y="92825"/>
+            <a:ext cx="1662900" cy="364500"/>
+          </a:xfrm>
+          <a:prstGeom prst="roundRect">
+            <a:avLst>
+              <a:gd fmla="val 16667" name="adj"/>
+            </a:avLst>
+          </a:prstGeom>
+          <a:solidFill>
+            <a:srgbClr val="008629"/>
+          </a:solidFill>
+          <a:ln cap="flat" cmpd="sng" w="9525">
+            <a:solidFill>
+              <a:srgbClr val="008629"/>
+            </a:solidFill>
+            <a:prstDash val="solid"/>
+            <a:round/>
+            <a:headEnd len="sm" w="sm" type="none"/>
+            <a:tailEnd len="sm" w="sm" type="none"/>
+          </a:ln>
+        </p:spPr>
+        <p:txBody>
+          <a:bodyPr anchorCtr="0" anchor="ctr" bIns="91425" lIns="91425" spcFirstLastPara="1" rIns="91425" wrap="square" tIns="91425">
+            <a:noAutofit/>
+          </a:bodyPr>
+          <a:lstStyle/>
+          <a:p>
+            <a:pPr indent="0" lvl="0" marL="0" rtl="0" algn="ctr">
+              <a:spcBef>
+                <a:spcPts val="0"/>
+              </a:spcBef>
+              <a:spcAft>
+                <a:spcPts val="0"/>
+              </a:spcAft>
+              <a:buNone/>
+            </a:pPr>
+            <a:r>
+              <a:rPr lang="es-419" sz="800">
+                <a:solidFill>
+                  <a:schemeClr val="lt1"/>
+                </a:solidFill>
+                <a:latin typeface="Montserrat ExtraBold"/>
+                <a:ea typeface="Montserrat ExtraBold"/>
+                <a:cs typeface="Montserrat ExtraBold"/>
+                <a:sym typeface="Montserrat ExtraBold"/>
+              </a:rPr>
+              <a:t>BUSCAR</a:t>
+            </a:r>
+            <a:endParaRPr sz="800">
+              <a:solidFill>
+                <a:schemeClr val="lt1"/>
+              </a:solidFill>
+              <a:latin typeface="Montserrat ExtraBold"/>
+              <a:ea typeface="Montserrat ExtraBold"/>
+              <a:cs typeface="Montserrat ExtraBold"/>
+              <a:sym typeface="Montserrat ExtraBold"/>
+            </a:endParaRPr>
+          </a:p>
+        </p:txBody>
+      </p:sp>
+      <p:sp>
+        <p:nvSpPr>
+          <p:cNvPr id="173" name="Google Shape;173;p23"/>
+          <p:cNvSpPr/>
+          <p:nvPr/>
+        </p:nvSpPr>
+        <p:spPr>
+          <a:xfrm>
+            <a:off x="8649534" y="92825"/>
+            <a:ext cx="383700" cy="364500"/>
+          </a:xfrm>
+          <a:prstGeom prst="roundRect">
+            <a:avLst>
+              <a:gd fmla="val 23333" name="adj"/>
+            </a:avLst>
+          </a:prstGeom>
+          <a:solidFill>
+            <a:schemeClr val="lt1"/>
+          </a:solidFill>
+          <a:ln cap="flat" cmpd="sng" w="9525">
+            <a:solidFill>
+              <a:schemeClr val="lt1"/>
+            </a:solidFill>
+            <a:prstDash val="solid"/>
+            <a:round/>
+            <a:headEnd len="sm" w="sm" type="none"/>
+            <a:tailEnd len="sm" w="sm" type="none"/>
+          </a:ln>
+        </p:spPr>
+        <p:txBody>
+          <a:bodyPr anchorCtr="0" anchor="ctr" bIns="91425" lIns="91425" spcFirstLastPara="1" rIns="91425" wrap="square" tIns="91425">
+            <a:noAutofit/>
+          </a:bodyPr>
+          <a:lstStyle/>
+          <a:p>
+            <a:pPr indent="0" lvl="0" marL="0" rtl="0" algn="ctr">
+              <a:spcBef>
+                <a:spcPts val="0"/>
+              </a:spcBef>
+              <a:spcAft>
+                <a:spcPts val="0"/>
+              </a:spcAft>
+              <a:buNone/>
+            </a:pPr>
+            <a:r>
+              <a:rPr lang="es-419" sz="1000">
+                <a:solidFill>
+                  <a:srgbClr val="008629"/>
+                </a:solidFill>
+                <a:latin typeface="Montserrat"/>
+                <a:ea typeface="Montserrat"/>
+                <a:cs typeface="Montserrat"/>
+                <a:sym typeface="Montserrat"/>
+              </a:rPr>
+              <a:t>X</a:t>
+            </a:r>
+            <a:endParaRPr sz="1000">
+              <a:solidFill>
+                <a:srgbClr val="008629"/>
+              </a:solidFill>
+              <a:latin typeface="Montserrat"/>
+              <a:ea typeface="Montserrat"/>
+              <a:cs typeface="Montserrat"/>
+              <a:sym typeface="Montserrat"/>
+            </a:endParaRPr>
+          </a:p>
+        </p:txBody>
+      </p:sp>
+      <p:sp>
+        <p:nvSpPr>
+          <p:cNvPr id="174" name="Google Shape;174;p23"/>
+          <p:cNvSpPr/>
+          <p:nvPr/>
+        </p:nvSpPr>
+        <p:spPr>
+          <a:xfrm>
+            <a:off x="129492" y="92825"/>
+            <a:ext cx="6714300" cy="364500"/>
+          </a:xfrm>
+          <a:prstGeom prst="roundRect">
+            <a:avLst>
+              <a:gd fmla="val 16667" name="adj"/>
+            </a:avLst>
+          </a:prstGeom>
+          <a:solidFill>
+            <a:srgbClr val="FFFFFF"/>
+          </a:solidFill>
+          <a:ln cap="flat" cmpd="sng" w="9525">
+            <a:solidFill>
+              <a:srgbClr val="FFFFFF"/>
+            </a:solidFill>
+            <a:prstDash val="solid"/>
+            <a:round/>
+            <a:headEnd len="sm" w="sm" type="none"/>
+            <a:tailEnd len="sm" w="sm" type="none"/>
+          </a:ln>
+        </p:spPr>
+        <p:txBody>
+          <a:bodyPr anchorCtr="0" anchor="ctr" bIns="91425" lIns="91425" spcFirstLastPara="1" rIns="91425" wrap="square" tIns="91425">
+            <a:noAutofit/>
+          </a:bodyPr>
+          <a:lstStyle/>
+          <a:p>
+            <a:pPr indent="457200" lvl="0" marL="0" rtl="0" algn="l">
+              <a:spcBef>
+                <a:spcPts val="0"/>
+              </a:spcBef>
+              <a:spcAft>
+                <a:spcPts val="0"/>
+              </a:spcAft>
+              <a:buNone/>
+            </a:pPr>
+            <a:r>
+              <a:rPr lang="es-419" sz="800">
+                <a:solidFill>
+                  <a:srgbClr val="CCCCCC"/>
+                </a:solidFill>
+                <a:latin typeface="Montserrat"/>
+                <a:ea typeface="Montserrat"/>
+                <a:cs typeface="Montserrat"/>
+                <a:sym typeface="Montserrat"/>
+              </a:rPr>
+              <a:t>Buscar por </a:t>
+            </a:r>
+            <a:r>
+              <a:rPr lang="es-419" sz="800">
+                <a:solidFill>
+                  <a:srgbClr val="CCCCCC"/>
+                </a:solidFill>
+                <a:latin typeface="Montserrat"/>
+                <a:ea typeface="Montserrat"/>
+                <a:cs typeface="Montserrat"/>
+                <a:sym typeface="Montserrat"/>
+              </a:rPr>
+              <a:t>número</a:t>
+            </a:r>
+            <a:r>
+              <a:rPr lang="es-419" sz="800">
+                <a:solidFill>
+                  <a:srgbClr val="CCCCCC"/>
+                </a:solidFill>
+                <a:latin typeface="Montserrat"/>
+                <a:ea typeface="Montserrat"/>
+                <a:cs typeface="Montserrat"/>
+                <a:sym typeface="Montserrat"/>
+              </a:rPr>
+              <a:t> de factura. nombre de cliente, proveedor…</a:t>
+            </a:r>
+            <a:endParaRPr sz="800">
+              <a:solidFill>
+                <a:srgbClr val="CCCCCC"/>
+              </a:solidFill>
+              <a:latin typeface="Montserrat"/>
+              <a:ea typeface="Montserrat"/>
+              <a:cs typeface="Montserrat"/>
+              <a:sym typeface="Montserrat"/>
+            </a:endParaRPr>
+          </a:p>
+        </p:txBody>
+      </p:sp>
+      <p:sp>
+        <p:nvSpPr>
+          <p:cNvPr id="175" name="Google Shape;175;p23"/>
+          <p:cNvSpPr/>
+          <p:nvPr/>
+        </p:nvSpPr>
+        <p:spPr>
+          <a:xfrm>
+            <a:off x="2983749" y="540388"/>
+            <a:ext cx="1339500" cy="364500"/>
+          </a:xfrm>
+          <a:prstGeom prst="roundRect">
+            <a:avLst>
+              <a:gd fmla="val 16667" name="adj"/>
+            </a:avLst>
+          </a:prstGeom>
+          <a:solidFill>
+            <a:srgbClr val="FFFFFF"/>
+          </a:solidFill>
+          <a:ln cap="flat" cmpd="sng" w="9525">
+            <a:solidFill>
+              <a:srgbClr val="FFFFFF"/>
+            </a:solidFill>
+            <a:prstDash val="solid"/>
+            <a:round/>
+            <a:headEnd len="sm" w="sm" type="none"/>
+            <a:tailEnd len="sm" w="sm" type="none"/>
+          </a:ln>
+        </p:spPr>
+        <p:txBody>
+          <a:bodyPr anchorCtr="0" anchor="ctr" bIns="91425" lIns="91425" spcFirstLastPara="1" rIns="91425" wrap="square" tIns="91425">
+            <a:noAutofit/>
+          </a:bodyPr>
+          <a:lstStyle/>
+          <a:p>
+            <a:pPr indent="0" lvl="0" marL="0" rtl="0" algn="ctr">
+              <a:spcBef>
+                <a:spcPts val="0"/>
+              </a:spcBef>
+              <a:spcAft>
+                <a:spcPts val="0"/>
+              </a:spcAft>
+              <a:buNone/>
+            </a:pPr>
+            <a:r>
+              <a:rPr lang="es-419" sz="800">
+                <a:solidFill>
+                  <a:srgbClr val="CCCCCC"/>
+                </a:solidFill>
+                <a:latin typeface="Montserrat"/>
+                <a:ea typeface="Montserrat"/>
+                <a:cs typeface="Montserrat"/>
+                <a:sym typeface="Montserrat"/>
+              </a:rPr>
+              <a:t>Filtrar por fecha</a:t>
+            </a:r>
+            <a:endParaRPr sz="800">
+              <a:solidFill>
+                <a:srgbClr val="CCCCCC"/>
+              </a:solidFill>
+              <a:latin typeface="Montserrat"/>
+              <a:ea typeface="Montserrat"/>
+              <a:cs typeface="Montserrat"/>
+              <a:sym typeface="Montserrat"/>
+            </a:endParaRPr>
+          </a:p>
+        </p:txBody>
+      </p:sp>
+      <p:sp>
+        <p:nvSpPr>
+          <p:cNvPr id="176" name="Google Shape;176;p23"/>
+          <p:cNvSpPr/>
+          <p:nvPr/>
+        </p:nvSpPr>
+        <p:spPr>
+          <a:xfrm>
+            <a:off x="129499" y="540375"/>
+            <a:ext cx="1339500" cy="364500"/>
+          </a:xfrm>
+          <a:prstGeom prst="roundRect">
+            <a:avLst>
+              <a:gd fmla="val 16667" name="adj"/>
+            </a:avLst>
+          </a:prstGeom>
+          <a:solidFill>
+            <a:srgbClr val="FFFFFF"/>
+          </a:solidFill>
+          <a:ln cap="flat" cmpd="sng" w="9525">
+            <a:solidFill>
+              <a:srgbClr val="FFFFFF"/>
+            </a:solidFill>
+            <a:prstDash val="solid"/>
+            <a:round/>
+            <a:headEnd len="sm" w="sm" type="none"/>
+            <a:tailEnd len="sm" w="sm" type="none"/>
+          </a:ln>
+        </p:spPr>
+        <p:txBody>
+          <a:bodyPr anchorCtr="0" anchor="ctr" bIns="91425" lIns="91425" spcFirstLastPara="1" rIns="91425" wrap="square" tIns="91425">
+            <a:noAutofit/>
+          </a:bodyPr>
+          <a:lstStyle/>
+          <a:p>
+            <a:pPr indent="0" lvl="0" marL="0" rtl="0" algn="ctr">
+              <a:spcBef>
+                <a:spcPts val="0"/>
+              </a:spcBef>
+              <a:spcAft>
+                <a:spcPts val="0"/>
+              </a:spcAft>
+              <a:buNone/>
+            </a:pPr>
+            <a:r>
+              <a:rPr lang="es-419" sz="800">
+                <a:solidFill>
+                  <a:srgbClr val="CCCCCC"/>
+                </a:solidFill>
+                <a:latin typeface="Montserrat"/>
+                <a:ea typeface="Montserrat"/>
+                <a:cs typeface="Montserrat"/>
+                <a:sym typeface="Montserrat"/>
+              </a:rPr>
+              <a:t>Más recientes</a:t>
+            </a:r>
+            <a:endParaRPr sz="800">
+              <a:solidFill>
+                <a:srgbClr val="CCCCCC"/>
+              </a:solidFill>
+              <a:latin typeface="Montserrat"/>
+              <a:ea typeface="Montserrat"/>
+              <a:cs typeface="Montserrat"/>
+              <a:sym typeface="Montserrat"/>
+            </a:endParaRPr>
+          </a:p>
+        </p:txBody>
+      </p:sp>
+      <p:sp>
+        <p:nvSpPr>
+          <p:cNvPr id="177" name="Google Shape;177;p23"/>
+          <p:cNvSpPr/>
+          <p:nvPr/>
+        </p:nvSpPr>
+        <p:spPr>
+          <a:xfrm>
+            <a:off x="1556624" y="540375"/>
+            <a:ext cx="1339500" cy="364500"/>
+          </a:xfrm>
+          <a:prstGeom prst="roundRect">
+            <a:avLst>
+              <a:gd fmla="val 16667" name="adj"/>
+            </a:avLst>
+          </a:prstGeom>
+          <a:solidFill>
+            <a:srgbClr val="FFFFFF"/>
+          </a:solidFill>
+          <a:ln cap="flat" cmpd="sng" w="9525">
+            <a:solidFill>
+              <a:srgbClr val="FFFFFF"/>
+            </a:solidFill>
+            <a:prstDash val="solid"/>
+            <a:round/>
+            <a:headEnd len="sm" w="sm" type="none"/>
+            <a:tailEnd len="sm" w="sm" type="none"/>
+          </a:ln>
+        </p:spPr>
+        <p:txBody>
+          <a:bodyPr anchorCtr="0" anchor="ctr" bIns="91425" lIns="91425" spcFirstLastPara="1" rIns="91425" wrap="square" tIns="91425">
+            <a:noAutofit/>
+          </a:bodyPr>
+          <a:lstStyle/>
+          <a:p>
+            <a:pPr indent="0" lvl="0" marL="0" rtl="0" algn="ctr">
+              <a:spcBef>
+                <a:spcPts val="0"/>
+              </a:spcBef>
+              <a:spcAft>
+                <a:spcPts val="0"/>
+              </a:spcAft>
+              <a:buNone/>
+            </a:pPr>
+            <a:r>
+              <a:rPr lang="es-419" sz="800">
+                <a:solidFill>
+                  <a:srgbClr val="CCCCCC"/>
+                </a:solidFill>
+                <a:latin typeface="Montserrat"/>
+                <a:ea typeface="Montserrat"/>
+                <a:cs typeface="Montserrat"/>
+                <a:sym typeface="Montserrat"/>
+              </a:rPr>
+              <a:t>Más Antiguas</a:t>
+            </a:r>
+            <a:endParaRPr sz="800">
+              <a:solidFill>
+                <a:srgbClr val="CCCCCC"/>
+              </a:solidFill>
+              <a:latin typeface="Montserrat"/>
+              <a:ea typeface="Montserrat"/>
+              <a:cs typeface="Montserrat"/>
+              <a:sym typeface="Montserrat"/>
+            </a:endParaRPr>
+          </a:p>
+        </p:txBody>
+      </p:sp>
+      <p:sp>
+        <p:nvSpPr>
+          <p:cNvPr id="178" name="Google Shape;178;p23"/>
+          <p:cNvSpPr txBox="1"/>
+          <p:nvPr/>
+        </p:nvSpPr>
+        <p:spPr>
+          <a:xfrm>
+            <a:off x="4410875" y="607725"/>
+            <a:ext cx="4628700" cy="229800"/>
+          </a:xfrm>
+          <a:prstGeom prst="rect">
+            <a:avLst/>
+          </a:prstGeom>
+          <a:noFill/>
+          <a:ln>
+            <a:noFill/>
+          </a:ln>
+        </p:spPr>
+        <p:txBody>
+          <a:bodyPr anchorCtr="0" anchor="ctr" bIns="91425" lIns="91425" spcFirstLastPara="1" rIns="91425" wrap="square" tIns="91425">
+            <a:noAutofit/>
+          </a:bodyPr>
+          <a:lstStyle/>
+          <a:p>
+            <a:pPr indent="0" lvl="0" marL="0" rtl="0" algn="ctr">
+              <a:spcBef>
+                <a:spcPts val="0"/>
+              </a:spcBef>
+              <a:spcAft>
+                <a:spcPts val="0"/>
+              </a:spcAft>
+              <a:buNone/>
+            </a:pPr>
+            <a:r>
+              <a:rPr lang="es-419" sz="1800">
+                <a:solidFill>
+                  <a:srgbClr val="008629"/>
+                </a:solidFill>
+                <a:latin typeface="Montserrat Black"/>
+                <a:ea typeface="Montserrat Black"/>
+                <a:cs typeface="Montserrat Black"/>
+                <a:sym typeface="Montserrat Black"/>
+              </a:rPr>
+              <a:t>FACTURAS</a:t>
+            </a:r>
+            <a:endParaRPr sz="1800">
+              <a:solidFill>
+                <a:srgbClr val="008629"/>
+              </a:solidFill>
+              <a:latin typeface="Montserrat Black"/>
+              <a:ea typeface="Montserrat Black"/>
+              <a:cs typeface="Montserrat Black"/>
+              <a:sym typeface="Montserrat Black"/>
+            </a:endParaRPr>
+          </a:p>
+        </p:txBody>
+      </p:sp>
+    </p:spTree>
+  </p:cSld>
+  <p:clrMapOvr>
+    <a:masterClrMapping/>
+  </p:clrMapOvr>
+</p:sld>
+</file>
+
+<file path=ppt/slides/slide12.xml><?xml version="1.0" encoding="utf-8"?>
+<p:sld xmlns:a="http://schemas.openxmlformats.org/drawingml/2006/main" xmlns:r="http://schemas.openxmlformats.org/officeDocument/2006/relationships" xmlns:mc="http://schemas.openxmlformats.org/markup-compatibility/2006" xmlns:mv="urn:schemas-microsoft-com:mac:vml" xmlns:p="http://schemas.openxmlformats.org/presentationml/2006/main" xmlns:c="http://schemas.openxmlformats.org/drawingml/2006/chart" xmlns:dgm="http://schemas.openxmlformats.org/drawingml/2006/diagram" xmlns:o="urn:schemas-microsoft-com:office:office" xmlns:v="urn:schemas-microsoft-com:vml" xmlns:pvml="urn:schemas-microsoft-com:office:powerpoint" xmlns:com="http://schemas.openxmlformats.org/drawingml/2006/compatibility" xmlns:p14="http://schemas.microsoft.com/office/powerpoint/2010/main" xmlns:p15="http://schemas.microsoft.com/office/powerpoint/2012/main" xmlns:ahyp="http://schemas.microsoft.com/office/drawing/2018/hyperlinkcolor">
+  <p:cSld>
+    <p:bg>
+      <p:bgPr>
+        <a:solidFill>
+          <a:srgbClr val="EFEFEF"/>
+        </a:solidFill>
+      </p:bgPr>
+    </p:bg>
+    <p:spTree>
+      <p:nvGrpSpPr>
+        <p:cNvPr id="182" name="Shape 182"/>
+        <p:cNvGrpSpPr/>
+        <p:nvPr/>
+      </p:nvGrpSpPr>
+      <p:grpSpPr>
+        <a:xfrm>
+          <a:off x="0" y="0"/>
+          <a:ext cx="0" cy="0"/>
+          <a:chOff x="0" y="0"/>
+          <a:chExt cx="0" cy="0"/>
+        </a:xfrm>
+      </p:grpSpPr>
+      <p:sp>
+        <p:nvSpPr>
+          <p:cNvPr id="183" name="Google Shape;183;p24"/>
+          <p:cNvSpPr/>
+          <p:nvPr/>
+        </p:nvSpPr>
+        <p:spPr>
+          <a:xfrm>
+            <a:off x="129500" y="987950"/>
+            <a:ext cx="8903700" cy="4062600"/>
+          </a:xfrm>
+          <a:prstGeom prst="roundRect">
+            <a:avLst>
+              <a:gd fmla="val 2154" name="adj"/>
+            </a:avLst>
+          </a:prstGeom>
+          <a:solidFill>
+            <a:schemeClr val="lt1"/>
+          </a:solidFill>
+          <a:ln cap="flat" cmpd="sng" w="9525">
+            <a:solidFill>
+              <a:schemeClr val="lt1"/>
+            </a:solidFill>
+            <a:prstDash val="solid"/>
+            <a:round/>
+            <a:headEnd len="sm" w="sm" type="none"/>
+            <a:tailEnd len="sm" w="sm" type="none"/>
+          </a:ln>
+        </p:spPr>
+        <p:txBody>
+          <a:bodyPr anchorCtr="0" anchor="ctr" bIns="91425" lIns="91425" spcFirstLastPara="1" rIns="91425" wrap="square" tIns="91425">
+            <a:noAutofit/>
+          </a:bodyPr>
+          <a:lstStyle/>
+          <a:p>
+            <a:pPr indent="0" lvl="0" marL="0" rtl="0" algn="ctr">
+              <a:spcBef>
+                <a:spcPts val="0"/>
+              </a:spcBef>
+              <a:spcAft>
+                <a:spcPts val="0"/>
+              </a:spcAft>
+              <a:buNone/>
+            </a:pPr>
+            <a:r>
+              <a:t/>
+            </a:r>
+            <a:endParaRPr>
+              <a:solidFill>
+                <a:srgbClr val="274E13"/>
+              </a:solidFill>
+              <a:latin typeface="Montserrat"/>
+              <a:ea typeface="Montserrat"/>
+              <a:cs typeface="Montserrat"/>
+              <a:sym typeface="Montserrat"/>
+            </a:endParaRPr>
+          </a:p>
+        </p:txBody>
+      </p:sp>
+      <p:sp>
+        <p:nvSpPr>
+          <p:cNvPr id="184" name="Google Shape;184;p24"/>
+          <p:cNvSpPr txBox="1"/>
+          <p:nvPr/>
+        </p:nvSpPr>
+        <p:spPr>
+          <a:xfrm>
+            <a:off x="53125" y="1418759"/>
+            <a:ext cx="8986500" cy="229800"/>
+          </a:xfrm>
+          <a:prstGeom prst="rect">
+            <a:avLst/>
+          </a:prstGeom>
+          <a:noFill/>
+          <a:ln>
+            <a:noFill/>
+          </a:ln>
+        </p:spPr>
+        <p:txBody>
+          <a:bodyPr anchorCtr="0" anchor="ctr" bIns="91425" lIns="91425" spcFirstLastPara="1" rIns="91425" wrap="square" tIns="91425">
+            <a:noAutofit/>
+          </a:bodyPr>
+          <a:lstStyle/>
+          <a:p>
+            <a:pPr indent="0" lvl="0" marL="0" rtl="0" algn="ctr">
+              <a:spcBef>
+                <a:spcPts val="0"/>
+              </a:spcBef>
+              <a:spcAft>
+                <a:spcPts val="0"/>
+              </a:spcAft>
+              <a:buNone/>
+            </a:pPr>
+            <a:r>
+              <a:rPr lang="es-419" sz="800">
+                <a:solidFill>
+                  <a:srgbClr val="008629"/>
+                </a:solidFill>
+                <a:latin typeface="Montserrat"/>
+                <a:ea typeface="Montserrat"/>
+                <a:cs typeface="Montserrat"/>
+                <a:sym typeface="Montserrat"/>
+              </a:rPr>
+              <a:t>ID INVENTARIO			ID CLIENTE			FECHA			NOMBRE CLIENTE			TOTAL		PDF</a:t>
+            </a:r>
+            <a:endParaRPr sz="800">
+              <a:solidFill>
+                <a:srgbClr val="008629"/>
+              </a:solidFill>
+              <a:latin typeface="Montserrat"/>
+              <a:ea typeface="Montserrat"/>
+              <a:cs typeface="Montserrat"/>
+              <a:sym typeface="Montserrat"/>
+            </a:endParaRPr>
+          </a:p>
+        </p:txBody>
+      </p:sp>
+      <p:sp>
+        <p:nvSpPr>
+          <p:cNvPr id="185" name="Google Shape;185;p24"/>
+          <p:cNvSpPr/>
+          <p:nvPr/>
+        </p:nvSpPr>
+        <p:spPr>
+          <a:xfrm>
+            <a:off x="6915167" y="92825"/>
+            <a:ext cx="1662900" cy="364500"/>
+          </a:xfrm>
+          <a:prstGeom prst="roundRect">
+            <a:avLst>
+              <a:gd fmla="val 16667" name="adj"/>
+            </a:avLst>
+          </a:prstGeom>
+          <a:solidFill>
+            <a:srgbClr val="008629"/>
+          </a:solidFill>
+          <a:ln cap="flat" cmpd="sng" w="9525">
+            <a:solidFill>
+              <a:srgbClr val="008629"/>
+            </a:solidFill>
+            <a:prstDash val="solid"/>
+            <a:round/>
+            <a:headEnd len="sm" w="sm" type="none"/>
+            <a:tailEnd len="sm" w="sm" type="none"/>
+          </a:ln>
+        </p:spPr>
+        <p:txBody>
+          <a:bodyPr anchorCtr="0" anchor="ctr" bIns="91425" lIns="91425" spcFirstLastPara="1" rIns="91425" wrap="square" tIns="91425">
+            <a:noAutofit/>
+          </a:bodyPr>
+          <a:lstStyle/>
+          <a:p>
+            <a:pPr indent="0" lvl="0" marL="0" rtl="0" algn="ctr">
+              <a:spcBef>
+                <a:spcPts val="0"/>
+              </a:spcBef>
+              <a:spcAft>
+                <a:spcPts val="0"/>
+              </a:spcAft>
+              <a:buNone/>
+            </a:pPr>
+            <a:r>
+              <a:rPr lang="es-419" sz="800">
+                <a:solidFill>
+                  <a:schemeClr val="lt1"/>
+                </a:solidFill>
+                <a:latin typeface="Montserrat ExtraBold"/>
+                <a:ea typeface="Montserrat ExtraBold"/>
+                <a:cs typeface="Montserrat ExtraBold"/>
+                <a:sym typeface="Montserrat ExtraBold"/>
+              </a:rPr>
+              <a:t>BUSCAR</a:t>
+            </a:r>
+            <a:endParaRPr sz="800">
+              <a:solidFill>
+                <a:schemeClr val="lt1"/>
+              </a:solidFill>
+              <a:latin typeface="Montserrat ExtraBold"/>
+              <a:ea typeface="Montserrat ExtraBold"/>
+              <a:cs typeface="Montserrat ExtraBold"/>
+              <a:sym typeface="Montserrat ExtraBold"/>
+            </a:endParaRPr>
+          </a:p>
+        </p:txBody>
+      </p:sp>
+      <p:sp>
+        <p:nvSpPr>
+          <p:cNvPr id="186" name="Google Shape;186;p24"/>
+          <p:cNvSpPr/>
+          <p:nvPr/>
+        </p:nvSpPr>
+        <p:spPr>
+          <a:xfrm>
+            <a:off x="8649534" y="92825"/>
+            <a:ext cx="383700" cy="364500"/>
+          </a:xfrm>
+          <a:prstGeom prst="roundRect">
+            <a:avLst>
+              <a:gd fmla="val 23333" name="adj"/>
+            </a:avLst>
+          </a:prstGeom>
+          <a:solidFill>
+            <a:schemeClr val="lt1"/>
+          </a:solidFill>
+          <a:ln cap="flat" cmpd="sng" w="9525">
+            <a:solidFill>
+              <a:schemeClr val="lt1"/>
+            </a:solidFill>
+            <a:prstDash val="solid"/>
+            <a:round/>
+            <a:headEnd len="sm" w="sm" type="none"/>
+            <a:tailEnd len="sm" w="sm" type="none"/>
+          </a:ln>
+        </p:spPr>
+        <p:txBody>
+          <a:bodyPr anchorCtr="0" anchor="ctr" bIns="91425" lIns="91425" spcFirstLastPara="1" rIns="91425" wrap="square" tIns="91425">
+            <a:noAutofit/>
+          </a:bodyPr>
+          <a:lstStyle/>
+          <a:p>
+            <a:pPr indent="0" lvl="0" marL="0" rtl="0" algn="ctr">
+              <a:spcBef>
+                <a:spcPts val="0"/>
+              </a:spcBef>
+              <a:spcAft>
+                <a:spcPts val="0"/>
+              </a:spcAft>
+              <a:buNone/>
+            </a:pPr>
+            <a:r>
+              <a:rPr lang="es-419" sz="1000">
+                <a:solidFill>
+                  <a:srgbClr val="008629"/>
+                </a:solidFill>
+                <a:latin typeface="Montserrat"/>
+                <a:ea typeface="Montserrat"/>
+                <a:cs typeface="Montserrat"/>
+                <a:sym typeface="Montserrat"/>
+              </a:rPr>
+              <a:t>X</a:t>
+            </a:r>
+            <a:endParaRPr sz="1000">
+              <a:solidFill>
+                <a:srgbClr val="008629"/>
+              </a:solidFill>
+              <a:latin typeface="Montserrat"/>
+              <a:ea typeface="Montserrat"/>
+              <a:cs typeface="Montserrat"/>
+              <a:sym typeface="Montserrat"/>
+            </a:endParaRPr>
+          </a:p>
+        </p:txBody>
+      </p:sp>
+      <p:sp>
+        <p:nvSpPr>
+          <p:cNvPr id="187" name="Google Shape;187;p24"/>
+          <p:cNvSpPr/>
+          <p:nvPr/>
+        </p:nvSpPr>
+        <p:spPr>
+          <a:xfrm>
+            <a:off x="129492" y="92825"/>
+            <a:ext cx="6714300" cy="364500"/>
+          </a:xfrm>
+          <a:prstGeom prst="roundRect">
+            <a:avLst>
+              <a:gd fmla="val 16667" name="adj"/>
+            </a:avLst>
+          </a:prstGeom>
+          <a:solidFill>
+            <a:srgbClr val="FFFFFF"/>
+          </a:solidFill>
+          <a:ln cap="flat" cmpd="sng" w="9525">
+            <a:solidFill>
+              <a:srgbClr val="FFFFFF"/>
+            </a:solidFill>
+            <a:prstDash val="solid"/>
+            <a:round/>
+            <a:headEnd len="sm" w="sm" type="none"/>
+            <a:tailEnd len="sm" w="sm" type="none"/>
+          </a:ln>
+        </p:spPr>
+        <p:txBody>
+          <a:bodyPr anchorCtr="0" anchor="ctr" bIns="91425" lIns="91425" spcFirstLastPara="1" rIns="91425" wrap="square" tIns="91425">
+            <a:noAutofit/>
+          </a:bodyPr>
+          <a:lstStyle/>
+          <a:p>
+            <a:pPr indent="457200" lvl="0" marL="0" rtl="0" algn="l">
+              <a:spcBef>
+                <a:spcPts val="0"/>
+              </a:spcBef>
+              <a:spcAft>
+                <a:spcPts val="0"/>
+              </a:spcAft>
+              <a:buNone/>
+            </a:pPr>
+            <a:r>
+              <a:rPr lang="es-419" sz="800">
+                <a:solidFill>
+                  <a:srgbClr val="CCCCCC"/>
+                </a:solidFill>
+                <a:latin typeface="Montserrat"/>
+                <a:ea typeface="Montserrat"/>
+                <a:cs typeface="Montserrat"/>
+                <a:sym typeface="Montserrat"/>
+              </a:rPr>
+              <a:t>Buscar por nombre de producto, proveedor…</a:t>
+            </a:r>
+            <a:endParaRPr sz="800">
+              <a:solidFill>
+                <a:srgbClr val="CCCCCC"/>
+              </a:solidFill>
+              <a:latin typeface="Montserrat"/>
+              <a:ea typeface="Montserrat"/>
+              <a:cs typeface="Montserrat"/>
+              <a:sym typeface="Montserrat"/>
+            </a:endParaRPr>
+          </a:p>
+        </p:txBody>
+      </p:sp>
+      <p:sp>
+        <p:nvSpPr>
+          <p:cNvPr id="188" name="Google Shape;188;p24"/>
+          <p:cNvSpPr/>
+          <p:nvPr/>
+        </p:nvSpPr>
+        <p:spPr>
+          <a:xfrm>
+            <a:off x="2983749" y="540388"/>
+            <a:ext cx="1339500" cy="364500"/>
+          </a:xfrm>
+          <a:prstGeom prst="roundRect">
+            <a:avLst>
+              <a:gd fmla="val 16667" name="adj"/>
+            </a:avLst>
+          </a:prstGeom>
+          <a:solidFill>
+            <a:srgbClr val="FFFFFF"/>
+          </a:solidFill>
+          <a:ln cap="flat" cmpd="sng" w="9525">
+            <a:solidFill>
+              <a:srgbClr val="FFFFFF"/>
+            </a:solidFill>
+            <a:prstDash val="solid"/>
+            <a:round/>
+            <a:headEnd len="sm" w="sm" type="none"/>
+            <a:tailEnd len="sm" w="sm" type="none"/>
+          </a:ln>
+        </p:spPr>
+        <p:txBody>
+          <a:bodyPr anchorCtr="0" anchor="ctr" bIns="91425" lIns="91425" spcFirstLastPara="1" rIns="91425" wrap="square" tIns="91425">
+            <a:noAutofit/>
+          </a:bodyPr>
+          <a:lstStyle/>
+          <a:p>
+            <a:pPr indent="0" lvl="0" marL="0" rtl="0" algn="ctr">
+              <a:spcBef>
+                <a:spcPts val="0"/>
+              </a:spcBef>
+              <a:spcAft>
+                <a:spcPts val="0"/>
+              </a:spcAft>
+              <a:buNone/>
+            </a:pPr>
+            <a:r>
+              <a:rPr lang="es-419" sz="800">
+                <a:solidFill>
+                  <a:srgbClr val="CCCCCC"/>
+                </a:solidFill>
+                <a:latin typeface="Montserrat"/>
+                <a:ea typeface="Montserrat"/>
+                <a:cs typeface="Montserrat"/>
+                <a:sym typeface="Montserrat"/>
+              </a:rPr>
+              <a:t>Entradas</a:t>
+            </a:r>
+            <a:endParaRPr sz="800">
+              <a:solidFill>
+                <a:srgbClr val="CCCCCC"/>
+              </a:solidFill>
+              <a:latin typeface="Montserrat"/>
+              <a:ea typeface="Montserrat"/>
+              <a:cs typeface="Montserrat"/>
+              <a:sym typeface="Montserrat"/>
+            </a:endParaRPr>
+          </a:p>
+        </p:txBody>
+      </p:sp>
+      <p:sp>
+        <p:nvSpPr>
+          <p:cNvPr id="189" name="Google Shape;189;p24"/>
+          <p:cNvSpPr/>
+          <p:nvPr/>
+        </p:nvSpPr>
+        <p:spPr>
+          <a:xfrm>
+            <a:off x="129499" y="540375"/>
+            <a:ext cx="1339500" cy="364500"/>
+          </a:xfrm>
+          <a:prstGeom prst="roundRect">
+            <a:avLst>
+              <a:gd fmla="val 16667" name="adj"/>
+            </a:avLst>
+          </a:prstGeom>
+          <a:solidFill>
+            <a:srgbClr val="FFFFFF"/>
+          </a:solidFill>
+          <a:ln cap="flat" cmpd="sng" w="9525">
+            <a:solidFill>
+              <a:srgbClr val="FFFFFF"/>
+            </a:solidFill>
+            <a:prstDash val="solid"/>
+            <a:round/>
+            <a:headEnd len="sm" w="sm" type="none"/>
+            <a:tailEnd len="sm" w="sm" type="none"/>
+          </a:ln>
+        </p:spPr>
+        <p:txBody>
+          <a:bodyPr anchorCtr="0" anchor="ctr" bIns="91425" lIns="91425" spcFirstLastPara="1" rIns="91425" wrap="square" tIns="91425">
+            <a:noAutofit/>
+          </a:bodyPr>
+          <a:lstStyle/>
+          <a:p>
+            <a:pPr indent="0" lvl="0" marL="0" rtl="0" algn="ctr">
+              <a:spcBef>
+                <a:spcPts val="0"/>
+              </a:spcBef>
+              <a:spcAft>
+                <a:spcPts val="0"/>
+              </a:spcAft>
+              <a:buNone/>
+            </a:pPr>
+            <a:r>
+              <a:rPr lang="es-419" sz="800">
+                <a:solidFill>
+                  <a:srgbClr val="CCCCCC"/>
+                </a:solidFill>
+                <a:latin typeface="Montserrat"/>
+                <a:ea typeface="Montserrat"/>
+                <a:cs typeface="Montserrat"/>
+                <a:sym typeface="Montserrat"/>
+              </a:rPr>
+              <a:t>Pocas existencias</a:t>
+            </a:r>
+            <a:endParaRPr sz="800">
+              <a:solidFill>
+                <a:srgbClr val="CCCCCC"/>
+              </a:solidFill>
+              <a:latin typeface="Montserrat"/>
+              <a:ea typeface="Montserrat"/>
+              <a:cs typeface="Montserrat"/>
+              <a:sym typeface="Montserrat"/>
+            </a:endParaRPr>
+          </a:p>
+        </p:txBody>
+      </p:sp>
+      <p:sp>
+        <p:nvSpPr>
+          <p:cNvPr id="190" name="Google Shape;190;p24"/>
+          <p:cNvSpPr/>
+          <p:nvPr/>
+        </p:nvSpPr>
+        <p:spPr>
+          <a:xfrm>
+            <a:off x="1556624" y="540375"/>
+            <a:ext cx="1339500" cy="364500"/>
+          </a:xfrm>
+          <a:prstGeom prst="roundRect">
+            <a:avLst>
+              <a:gd fmla="val 16667" name="adj"/>
+            </a:avLst>
+          </a:prstGeom>
+          <a:solidFill>
+            <a:srgbClr val="FFFFFF"/>
+          </a:solidFill>
+          <a:ln cap="flat" cmpd="sng" w="9525">
+            <a:solidFill>
+              <a:srgbClr val="FFFFFF"/>
+            </a:solidFill>
+            <a:prstDash val="solid"/>
+            <a:round/>
+            <a:headEnd len="sm" w="sm" type="none"/>
+            <a:tailEnd len="sm" w="sm" type="none"/>
+          </a:ln>
+        </p:spPr>
+        <p:txBody>
+          <a:bodyPr anchorCtr="0" anchor="ctr" bIns="91425" lIns="91425" spcFirstLastPara="1" rIns="91425" wrap="square" tIns="91425">
+            <a:noAutofit/>
+          </a:bodyPr>
+          <a:lstStyle/>
+          <a:p>
+            <a:pPr indent="0" lvl="0" marL="0" rtl="0" algn="ctr">
+              <a:spcBef>
+                <a:spcPts val="0"/>
+              </a:spcBef>
+              <a:spcAft>
+                <a:spcPts val="0"/>
+              </a:spcAft>
+              <a:buNone/>
+            </a:pPr>
+            <a:r>
+              <a:rPr lang="es-419" sz="800">
+                <a:solidFill>
+                  <a:srgbClr val="CCCCCC"/>
+                </a:solidFill>
+                <a:latin typeface="Montserrat"/>
+                <a:ea typeface="Montserrat"/>
+                <a:cs typeface="Montserrat"/>
+                <a:sym typeface="Montserrat"/>
+              </a:rPr>
+              <a:t>Más existencias</a:t>
+            </a:r>
+            <a:endParaRPr sz="800">
+              <a:solidFill>
+                <a:srgbClr val="CCCCCC"/>
+              </a:solidFill>
+              <a:latin typeface="Montserrat"/>
+              <a:ea typeface="Montserrat"/>
+              <a:cs typeface="Montserrat"/>
+              <a:sym typeface="Montserrat"/>
+            </a:endParaRPr>
+          </a:p>
+        </p:txBody>
+      </p:sp>
+      <p:sp>
+        <p:nvSpPr>
+          <p:cNvPr id="191" name="Google Shape;191;p24"/>
+          <p:cNvSpPr txBox="1"/>
+          <p:nvPr/>
+        </p:nvSpPr>
+        <p:spPr>
+          <a:xfrm>
+            <a:off x="4410875" y="607725"/>
+            <a:ext cx="4628700" cy="229800"/>
+          </a:xfrm>
+          <a:prstGeom prst="rect">
+            <a:avLst/>
+          </a:prstGeom>
+          <a:noFill/>
+          <a:ln>
+            <a:noFill/>
+          </a:ln>
+        </p:spPr>
+        <p:txBody>
+          <a:bodyPr anchorCtr="0" anchor="ctr" bIns="91425" lIns="91425" spcFirstLastPara="1" rIns="91425" wrap="square" tIns="91425">
+            <a:noAutofit/>
+          </a:bodyPr>
+          <a:lstStyle/>
+          <a:p>
+            <a:pPr indent="0" lvl="0" marL="0" rtl="0" algn="ctr">
+              <a:spcBef>
+                <a:spcPts val="0"/>
+              </a:spcBef>
+              <a:spcAft>
+                <a:spcPts val="0"/>
+              </a:spcAft>
+              <a:buNone/>
+            </a:pPr>
+            <a:r>
+              <a:rPr lang="es-419" sz="1800">
+                <a:solidFill>
+                  <a:srgbClr val="008629"/>
+                </a:solidFill>
+                <a:latin typeface="Montserrat Black"/>
+                <a:ea typeface="Montserrat Black"/>
+                <a:cs typeface="Montserrat Black"/>
+                <a:sym typeface="Montserrat Black"/>
+              </a:rPr>
+              <a:t>INVENTARIOS</a:t>
+            </a:r>
+            <a:endParaRPr sz="1800">
+              <a:solidFill>
+                <a:srgbClr val="008629"/>
+              </a:solidFill>
+              <a:latin typeface="Montserrat Black"/>
+              <a:ea typeface="Montserrat Black"/>
+              <a:cs typeface="Montserrat Black"/>
+              <a:sym typeface="Montserrat Black"/>
+            </a:endParaRPr>
+          </a:p>
+        </p:txBody>
+      </p:sp>
+    </p:spTree>
+  </p:cSld>
+  <p:clrMapOvr>
+    <a:masterClrMapping/>
+  </p:clrMapOvr>
+</p:sld>
+</file>
+
+<file path=ppt/slides/slide13.xml><?xml version="1.0" encoding="utf-8"?>
+<p:sld xmlns:a="http://schemas.openxmlformats.org/drawingml/2006/main" xmlns:r="http://schemas.openxmlformats.org/officeDocument/2006/relationships" xmlns:mc="http://schemas.openxmlformats.org/markup-compatibility/2006" xmlns:mv="urn:schemas-microsoft-com:mac:vml" xmlns:p="http://schemas.openxmlformats.org/presentationml/2006/main" xmlns:c="http://schemas.openxmlformats.org/drawingml/2006/chart" xmlns:dgm="http://schemas.openxmlformats.org/drawingml/2006/diagram" xmlns:o="urn:schemas-microsoft-com:office:office" xmlns:v="urn:schemas-microsoft-com:vml" xmlns:pvml="urn:schemas-microsoft-com:office:powerpoint" xmlns:com="http://schemas.openxmlformats.org/drawingml/2006/compatibility" xmlns:p14="http://schemas.microsoft.com/office/powerpoint/2010/main" xmlns:p15="http://schemas.microsoft.com/office/powerpoint/2012/main" xmlns:ahyp="http://schemas.microsoft.com/office/drawing/2018/hyperlinkcolor">
+  <p:cSld>
+    <p:bg>
+      <p:bgPr>
+        <a:solidFill>
+          <a:srgbClr val="EFEFEF"/>
+        </a:solidFill>
+      </p:bgPr>
+    </p:bg>
+    <p:spTree>
+      <p:nvGrpSpPr>
+        <p:cNvPr id="195" name="Shape 195"/>
+        <p:cNvGrpSpPr/>
+        <p:nvPr/>
+      </p:nvGrpSpPr>
+      <p:grpSpPr>
+        <a:xfrm>
+          <a:off x="0" y="0"/>
+          <a:ext cx="0" cy="0"/>
+          <a:chOff x="0" y="0"/>
+          <a:chExt cx="0" cy="0"/>
+        </a:xfrm>
+      </p:grpSpPr>
+      <p:sp>
+        <p:nvSpPr>
+          <p:cNvPr id="196" name="Google Shape;196;p25"/>
+          <p:cNvSpPr/>
+          <p:nvPr/>
+        </p:nvSpPr>
+        <p:spPr>
+          <a:xfrm>
+            <a:off x="129500" y="987950"/>
+            <a:ext cx="8903700" cy="4062600"/>
+          </a:xfrm>
+          <a:prstGeom prst="roundRect">
+            <a:avLst>
+              <a:gd fmla="val 2154" name="adj"/>
+            </a:avLst>
+          </a:prstGeom>
+          <a:solidFill>
+            <a:schemeClr val="lt1"/>
+          </a:solidFill>
+          <a:ln cap="flat" cmpd="sng" w="9525">
+            <a:solidFill>
+              <a:schemeClr val="lt1"/>
+            </a:solidFill>
+            <a:prstDash val="solid"/>
+            <a:round/>
+            <a:headEnd len="sm" w="sm" type="none"/>
+            <a:tailEnd len="sm" w="sm" type="none"/>
+          </a:ln>
+        </p:spPr>
+        <p:txBody>
+          <a:bodyPr anchorCtr="0" anchor="ctr" bIns="91425" lIns="91425" spcFirstLastPara="1" rIns="91425" wrap="square" tIns="91425">
+            <a:noAutofit/>
+          </a:bodyPr>
+          <a:lstStyle/>
+          <a:p>
+            <a:pPr indent="0" lvl="0" marL="0" rtl="0" algn="ctr">
+              <a:spcBef>
+                <a:spcPts val="0"/>
+              </a:spcBef>
+              <a:spcAft>
+                <a:spcPts val="0"/>
+              </a:spcAft>
+              <a:buNone/>
+            </a:pPr>
+            <a:r>
+              <a:t/>
+            </a:r>
+            <a:endParaRPr>
+              <a:solidFill>
+                <a:srgbClr val="274E13"/>
+              </a:solidFill>
+              <a:latin typeface="Montserrat"/>
+              <a:ea typeface="Montserrat"/>
+              <a:cs typeface="Montserrat"/>
+              <a:sym typeface="Montserrat"/>
+            </a:endParaRPr>
+          </a:p>
+        </p:txBody>
+      </p:sp>
+      <p:sp>
+        <p:nvSpPr>
+          <p:cNvPr id="197" name="Google Shape;197;p25"/>
+          <p:cNvSpPr txBox="1"/>
+          <p:nvPr/>
+        </p:nvSpPr>
+        <p:spPr>
+          <a:xfrm>
+            <a:off x="53125" y="1418759"/>
+            <a:ext cx="8986500" cy="229800"/>
+          </a:xfrm>
+          <a:prstGeom prst="rect">
+            <a:avLst/>
+          </a:prstGeom>
+          <a:noFill/>
+          <a:ln>
+            <a:noFill/>
+          </a:ln>
+        </p:spPr>
+        <p:txBody>
+          <a:bodyPr anchorCtr="0" anchor="ctr" bIns="91425" lIns="91425" spcFirstLastPara="1" rIns="91425" wrap="square" tIns="91425">
+            <a:noAutofit/>
+          </a:bodyPr>
+          <a:lstStyle/>
+          <a:p>
+            <a:pPr indent="0" lvl="0" marL="0" rtl="0" algn="ctr">
+              <a:spcBef>
+                <a:spcPts val="0"/>
+              </a:spcBef>
+              <a:spcAft>
+                <a:spcPts val="0"/>
+              </a:spcAft>
+              <a:buNone/>
+            </a:pPr>
+            <a:r>
+              <a:rPr lang="es-419" sz="800">
+                <a:solidFill>
+                  <a:srgbClr val="008629"/>
+                </a:solidFill>
+                <a:latin typeface="Montserrat"/>
+                <a:ea typeface="Montserrat"/>
+                <a:cs typeface="Montserrat"/>
+                <a:sym typeface="Montserrat"/>
+              </a:rPr>
+              <a:t>ID INVENTARIO			ID CLIENTE			FECHA			NOMBRE CLIENTE			TOTAL		PDF</a:t>
+            </a:r>
+            <a:endParaRPr sz="800">
+              <a:solidFill>
+                <a:srgbClr val="008629"/>
+              </a:solidFill>
+              <a:latin typeface="Montserrat"/>
+              <a:ea typeface="Montserrat"/>
+              <a:cs typeface="Montserrat"/>
+              <a:sym typeface="Montserrat"/>
+            </a:endParaRPr>
+          </a:p>
+        </p:txBody>
+      </p:sp>
+      <p:sp>
+        <p:nvSpPr>
+          <p:cNvPr id="198" name="Google Shape;198;p25"/>
+          <p:cNvSpPr/>
+          <p:nvPr/>
+        </p:nvSpPr>
+        <p:spPr>
+          <a:xfrm>
+            <a:off x="6915167" y="92825"/>
+            <a:ext cx="1662900" cy="364500"/>
+          </a:xfrm>
+          <a:prstGeom prst="roundRect">
+            <a:avLst>
+              <a:gd fmla="val 16667" name="adj"/>
+            </a:avLst>
+          </a:prstGeom>
+          <a:solidFill>
+            <a:srgbClr val="008629"/>
+          </a:solidFill>
+          <a:ln cap="flat" cmpd="sng" w="9525">
+            <a:solidFill>
+              <a:srgbClr val="008629"/>
+            </a:solidFill>
+            <a:prstDash val="solid"/>
+            <a:round/>
+            <a:headEnd len="sm" w="sm" type="none"/>
+            <a:tailEnd len="sm" w="sm" type="none"/>
+          </a:ln>
+        </p:spPr>
+        <p:txBody>
+          <a:bodyPr anchorCtr="0" anchor="ctr" bIns="91425" lIns="91425" spcFirstLastPara="1" rIns="91425" wrap="square" tIns="91425">
+            <a:noAutofit/>
+          </a:bodyPr>
+          <a:lstStyle/>
+          <a:p>
+            <a:pPr indent="0" lvl="0" marL="0" rtl="0" algn="ctr">
+              <a:spcBef>
+                <a:spcPts val="0"/>
+              </a:spcBef>
+              <a:spcAft>
+                <a:spcPts val="0"/>
+              </a:spcAft>
+              <a:buNone/>
+            </a:pPr>
+            <a:r>
+              <a:rPr lang="es-419" sz="800">
+                <a:solidFill>
+                  <a:schemeClr val="lt1"/>
+                </a:solidFill>
+                <a:latin typeface="Montserrat ExtraBold"/>
+                <a:ea typeface="Montserrat ExtraBold"/>
+                <a:cs typeface="Montserrat ExtraBold"/>
+                <a:sym typeface="Montserrat ExtraBold"/>
+              </a:rPr>
+              <a:t>BUSCAR</a:t>
+            </a:r>
+            <a:endParaRPr sz="800">
+              <a:solidFill>
+                <a:schemeClr val="lt1"/>
+              </a:solidFill>
+              <a:latin typeface="Montserrat ExtraBold"/>
+              <a:ea typeface="Montserrat ExtraBold"/>
+              <a:cs typeface="Montserrat ExtraBold"/>
+              <a:sym typeface="Montserrat ExtraBold"/>
+            </a:endParaRPr>
+          </a:p>
+        </p:txBody>
+      </p:sp>
+      <p:sp>
+        <p:nvSpPr>
+          <p:cNvPr id="199" name="Google Shape;199;p25"/>
+          <p:cNvSpPr/>
+          <p:nvPr/>
+        </p:nvSpPr>
+        <p:spPr>
+          <a:xfrm>
+            <a:off x="8649534" y="92825"/>
+            <a:ext cx="383700" cy="364500"/>
+          </a:xfrm>
+          <a:prstGeom prst="roundRect">
+            <a:avLst>
+              <a:gd fmla="val 23333" name="adj"/>
+            </a:avLst>
+          </a:prstGeom>
+          <a:solidFill>
+            <a:schemeClr val="lt1"/>
+          </a:solidFill>
+          <a:ln cap="flat" cmpd="sng" w="9525">
+            <a:solidFill>
+              <a:schemeClr val="lt1"/>
+            </a:solidFill>
+            <a:prstDash val="solid"/>
+            <a:round/>
+            <a:headEnd len="sm" w="sm" type="none"/>
+            <a:tailEnd len="sm" w="sm" type="none"/>
+          </a:ln>
+        </p:spPr>
+        <p:txBody>
+          <a:bodyPr anchorCtr="0" anchor="ctr" bIns="91425" lIns="91425" spcFirstLastPara="1" rIns="91425" wrap="square" tIns="91425">
+            <a:noAutofit/>
+          </a:bodyPr>
+          <a:lstStyle/>
+          <a:p>
+            <a:pPr indent="0" lvl="0" marL="0" rtl="0" algn="ctr">
+              <a:spcBef>
+                <a:spcPts val="0"/>
+              </a:spcBef>
+              <a:spcAft>
+                <a:spcPts val="0"/>
+              </a:spcAft>
+              <a:buNone/>
+            </a:pPr>
+            <a:r>
+              <a:rPr lang="es-419" sz="1000">
+                <a:solidFill>
+                  <a:srgbClr val="008629"/>
+                </a:solidFill>
+                <a:latin typeface="Montserrat"/>
+                <a:ea typeface="Montserrat"/>
+                <a:cs typeface="Montserrat"/>
+                <a:sym typeface="Montserrat"/>
+              </a:rPr>
+              <a:t>X</a:t>
+            </a:r>
+            <a:endParaRPr sz="1000">
+              <a:solidFill>
+                <a:srgbClr val="008629"/>
+              </a:solidFill>
+              <a:latin typeface="Montserrat"/>
+              <a:ea typeface="Montserrat"/>
+              <a:cs typeface="Montserrat"/>
+              <a:sym typeface="Montserrat"/>
+            </a:endParaRPr>
+          </a:p>
+        </p:txBody>
+      </p:sp>
+      <p:sp>
+        <p:nvSpPr>
+          <p:cNvPr id="200" name="Google Shape;200;p25"/>
+          <p:cNvSpPr/>
+          <p:nvPr/>
+        </p:nvSpPr>
+        <p:spPr>
+          <a:xfrm>
+            <a:off x="129492" y="92825"/>
+            <a:ext cx="6714300" cy="364500"/>
+          </a:xfrm>
+          <a:prstGeom prst="roundRect">
+            <a:avLst>
+              <a:gd fmla="val 16667" name="adj"/>
+            </a:avLst>
+          </a:prstGeom>
+          <a:solidFill>
+            <a:srgbClr val="FFFFFF"/>
+          </a:solidFill>
+          <a:ln cap="flat" cmpd="sng" w="9525">
+            <a:solidFill>
+              <a:srgbClr val="FFFFFF"/>
+            </a:solidFill>
+            <a:prstDash val="solid"/>
+            <a:round/>
+            <a:headEnd len="sm" w="sm" type="none"/>
+            <a:tailEnd len="sm" w="sm" type="none"/>
+          </a:ln>
+        </p:spPr>
+        <p:txBody>
+          <a:bodyPr anchorCtr="0" anchor="ctr" bIns="91425" lIns="91425" spcFirstLastPara="1" rIns="91425" wrap="square" tIns="91425">
+            <a:noAutofit/>
+          </a:bodyPr>
+          <a:lstStyle/>
+          <a:p>
+            <a:pPr indent="457200" lvl="0" marL="0" rtl="0" algn="l">
+              <a:spcBef>
+                <a:spcPts val="0"/>
+              </a:spcBef>
+              <a:spcAft>
+                <a:spcPts val="0"/>
+              </a:spcAft>
+              <a:buNone/>
+            </a:pPr>
+            <a:r>
+              <a:rPr lang="es-419" sz="800">
+                <a:solidFill>
+                  <a:srgbClr val="CCCCCC"/>
+                </a:solidFill>
+                <a:latin typeface="Montserrat"/>
+                <a:ea typeface="Montserrat"/>
+                <a:cs typeface="Montserrat"/>
+                <a:sym typeface="Montserrat"/>
+              </a:rPr>
+              <a:t>Buscar por nombre de producto, proveedor…</a:t>
+            </a:r>
+            <a:endParaRPr sz="800">
+              <a:solidFill>
+                <a:srgbClr val="CCCCCC"/>
+              </a:solidFill>
+              <a:latin typeface="Montserrat"/>
+              <a:ea typeface="Montserrat"/>
+              <a:cs typeface="Montserrat"/>
+              <a:sym typeface="Montserrat"/>
+            </a:endParaRPr>
+          </a:p>
+        </p:txBody>
+      </p:sp>
+      <p:sp>
+        <p:nvSpPr>
+          <p:cNvPr id="201" name="Google Shape;201;p25"/>
+          <p:cNvSpPr/>
+          <p:nvPr/>
+        </p:nvSpPr>
+        <p:spPr>
+          <a:xfrm>
+            <a:off x="2983749" y="540388"/>
+            <a:ext cx="1339500" cy="364500"/>
+          </a:xfrm>
+          <a:prstGeom prst="roundRect">
+            <a:avLst>
+              <a:gd fmla="val 16667" name="adj"/>
+            </a:avLst>
+          </a:prstGeom>
+          <a:solidFill>
+            <a:srgbClr val="FFFFFF"/>
+          </a:solidFill>
+          <a:ln cap="flat" cmpd="sng" w="9525">
+            <a:solidFill>
+              <a:srgbClr val="FFFFFF"/>
+            </a:solidFill>
+            <a:prstDash val="solid"/>
+            <a:round/>
+            <a:headEnd len="sm" w="sm" type="none"/>
+            <a:tailEnd len="sm" w="sm" type="none"/>
+          </a:ln>
+        </p:spPr>
+        <p:txBody>
+          <a:bodyPr anchorCtr="0" anchor="ctr" bIns="91425" lIns="91425" spcFirstLastPara="1" rIns="91425" wrap="square" tIns="91425">
+            <a:noAutofit/>
+          </a:bodyPr>
+          <a:lstStyle/>
+          <a:p>
+            <a:pPr indent="0" lvl="0" marL="0" rtl="0" algn="ctr">
+              <a:spcBef>
+                <a:spcPts val="0"/>
+              </a:spcBef>
+              <a:spcAft>
+                <a:spcPts val="0"/>
+              </a:spcAft>
+              <a:buNone/>
+            </a:pPr>
+            <a:r>
+              <a:rPr lang="es-419" sz="800">
+                <a:solidFill>
+                  <a:srgbClr val="CCCCCC"/>
+                </a:solidFill>
+                <a:latin typeface="Montserrat"/>
+                <a:ea typeface="Montserrat"/>
+                <a:cs typeface="Montserrat"/>
+                <a:sym typeface="Montserrat"/>
+              </a:rPr>
+              <a:t>Entradas</a:t>
+            </a:r>
+            <a:endParaRPr sz="800">
+              <a:solidFill>
+                <a:srgbClr val="CCCCCC"/>
+              </a:solidFill>
+              <a:latin typeface="Montserrat"/>
+              <a:ea typeface="Montserrat"/>
+              <a:cs typeface="Montserrat"/>
+              <a:sym typeface="Montserrat"/>
+            </a:endParaRPr>
+          </a:p>
+        </p:txBody>
+      </p:sp>
+      <p:sp>
+        <p:nvSpPr>
+          <p:cNvPr id="202" name="Google Shape;202;p25"/>
+          <p:cNvSpPr/>
+          <p:nvPr/>
+        </p:nvSpPr>
+        <p:spPr>
+          <a:xfrm>
+            <a:off x="129499" y="540375"/>
+            <a:ext cx="1339500" cy="364500"/>
+          </a:xfrm>
+          <a:prstGeom prst="roundRect">
+            <a:avLst>
+              <a:gd fmla="val 16667" name="adj"/>
+            </a:avLst>
+          </a:prstGeom>
+          <a:solidFill>
+            <a:srgbClr val="FFFFFF"/>
+          </a:solidFill>
+          <a:ln cap="flat" cmpd="sng" w="9525">
+            <a:solidFill>
+              <a:srgbClr val="FFFFFF"/>
+            </a:solidFill>
+            <a:prstDash val="solid"/>
+            <a:round/>
+            <a:headEnd len="sm" w="sm" type="none"/>
+            <a:tailEnd len="sm" w="sm" type="none"/>
+          </a:ln>
+        </p:spPr>
+        <p:txBody>
+          <a:bodyPr anchorCtr="0" anchor="ctr" bIns="91425" lIns="91425" spcFirstLastPara="1" rIns="91425" wrap="square" tIns="91425">
+            <a:noAutofit/>
+          </a:bodyPr>
+          <a:lstStyle/>
+          <a:p>
+            <a:pPr indent="0" lvl="0" marL="0" rtl="0" algn="ctr">
+              <a:spcBef>
+                <a:spcPts val="0"/>
+              </a:spcBef>
+              <a:spcAft>
+                <a:spcPts val="0"/>
+              </a:spcAft>
+              <a:buNone/>
+            </a:pPr>
+            <a:r>
+              <a:rPr lang="es-419" sz="800">
+                <a:solidFill>
+                  <a:srgbClr val="CCCCCC"/>
+                </a:solidFill>
+                <a:latin typeface="Montserrat"/>
+                <a:ea typeface="Montserrat"/>
+                <a:cs typeface="Montserrat"/>
+                <a:sym typeface="Montserrat"/>
+              </a:rPr>
+              <a:t>Pocas existencias</a:t>
+            </a:r>
+            <a:endParaRPr sz="800">
+              <a:solidFill>
+                <a:srgbClr val="CCCCCC"/>
+              </a:solidFill>
+              <a:latin typeface="Montserrat"/>
+              <a:ea typeface="Montserrat"/>
+              <a:cs typeface="Montserrat"/>
+              <a:sym typeface="Montserrat"/>
+            </a:endParaRPr>
+          </a:p>
+        </p:txBody>
+      </p:sp>
+      <p:sp>
+        <p:nvSpPr>
+          <p:cNvPr id="203" name="Google Shape;203;p25"/>
+          <p:cNvSpPr/>
+          <p:nvPr/>
+        </p:nvSpPr>
+        <p:spPr>
+          <a:xfrm>
+            <a:off x="1556624" y="540375"/>
+            <a:ext cx="1339500" cy="364500"/>
+          </a:xfrm>
+          <a:prstGeom prst="roundRect">
+            <a:avLst>
+              <a:gd fmla="val 16667" name="adj"/>
+            </a:avLst>
+          </a:prstGeom>
+          <a:solidFill>
+            <a:srgbClr val="FFFFFF"/>
+          </a:solidFill>
+          <a:ln cap="flat" cmpd="sng" w="9525">
+            <a:solidFill>
+              <a:srgbClr val="FFFFFF"/>
+            </a:solidFill>
+            <a:prstDash val="solid"/>
+            <a:round/>
+            <a:headEnd len="sm" w="sm" type="none"/>
+            <a:tailEnd len="sm" w="sm" type="none"/>
+          </a:ln>
+        </p:spPr>
+        <p:txBody>
+          <a:bodyPr anchorCtr="0" anchor="ctr" bIns="91425" lIns="91425" spcFirstLastPara="1" rIns="91425" wrap="square" tIns="91425">
+            <a:noAutofit/>
+          </a:bodyPr>
+          <a:lstStyle/>
+          <a:p>
+            <a:pPr indent="0" lvl="0" marL="0" rtl="0" algn="ctr">
+              <a:spcBef>
+                <a:spcPts val="0"/>
+              </a:spcBef>
+              <a:spcAft>
+                <a:spcPts val="0"/>
+              </a:spcAft>
+              <a:buNone/>
+            </a:pPr>
+            <a:r>
+              <a:rPr lang="es-419" sz="800">
+                <a:solidFill>
+                  <a:srgbClr val="CCCCCC"/>
+                </a:solidFill>
+                <a:latin typeface="Montserrat"/>
+                <a:ea typeface="Montserrat"/>
+                <a:cs typeface="Montserrat"/>
+                <a:sym typeface="Montserrat"/>
+              </a:rPr>
+              <a:t>Más existencias</a:t>
+            </a:r>
+            <a:endParaRPr sz="800">
+              <a:solidFill>
+                <a:srgbClr val="CCCCCC"/>
+              </a:solidFill>
+              <a:latin typeface="Montserrat"/>
+              <a:ea typeface="Montserrat"/>
+              <a:cs typeface="Montserrat"/>
+              <a:sym typeface="Montserrat"/>
+            </a:endParaRPr>
+          </a:p>
+        </p:txBody>
+      </p:sp>
+      <p:sp>
+        <p:nvSpPr>
+          <p:cNvPr id="204" name="Google Shape;204;p25"/>
+          <p:cNvSpPr txBox="1"/>
+          <p:nvPr/>
+        </p:nvSpPr>
+        <p:spPr>
+          <a:xfrm>
+            <a:off x="4410875" y="607725"/>
+            <a:ext cx="4628700" cy="229800"/>
+          </a:xfrm>
+          <a:prstGeom prst="rect">
+            <a:avLst/>
+          </a:prstGeom>
+          <a:noFill/>
+          <a:ln>
+            <a:noFill/>
+          </a:ln>
+        </p:spPr>
+        <p:txBody>
+          <a:bodyPr anchorCtr="0" anchor="ctr" bIns="91425" lIns="91425" spcFirstLastPara="1" rIns="91425" wrap="square" tIns="91425">
+            <a:noAutofit/>
+          </a:bodyPr>
+          <a:lstStyle/>
+          <a:p>
+            <a:pPr indent="0" lvl="0" marL="0" rtl="0" algn="ctr">
+              <a:spcBef>
+                <a:spcPts val="0"/>
+              </a:spcBef>
+              <a:spcAft>
+                <a:spcPts val="0"/>
+              </a:spcAft>
+              <a:buNone/>
+            </a:pPr>
+            <a:r>
+              <a:rPr lang="es-419" sz="1800">
+                <a:solidFill>
+                  <a:srgbClr val="008629"/>
+                </a:solidFill>
+                <a:latin typeface="Montserrat Black"/>
+                <a:ea typeface="Montserrat Black"/>
+                <a:cs typeface="Montserrat Black"/>
+                <a:sym typeface="Montserrat Black"/>
+              </a:rPr>
+              <a:t>INVENTARIOS</a:t>
+            </a:r>
+            <a:endParaRPr sz="1800">
+              <a:solidFill>
+                <a:srgbClr val="008629"/>
+              </a:solidFill>
+              <a:latin typeface="Montserrat Black"/>
+              <a:ea typeface="Montserrat Black"/>
+              <a:cs typeface="Montserrat Black"/>
+              <a:sym typeface="Montserrat Black"/>
+            </a:endParaRPr>
+          </a:p>
+        </p:txBody>
+      </p:sp>
+    </p:spTree>
+  </p:cSld>
+  <p:clrMapOvr>
+    <a:masterClrMapping/>
+  </p:clrMapOvr>
+</p:sld>
+</file>
+
+<file path=ppt/slides/slide14.xml><?xml version="1.0" encoding="utf-8"?>
+<p:sld xmlns:a="http://schemas.openxmlformats.org/drawingml/2006/main" xmlns:r="http://schemas.openxmlformats.org/officeDocument/2006/relationships" xmlns:mc="http://schemas.openxmlformats.org/markup-compatibility/2006" xmlns:mv="urn:schemas-microsoft-com:mac:vml" xmlns:p="http://schemas.openxmlformats.org/presentationml/2006/main" xmlns:c="http://schemas.openxmlformats.org/drawingml/2006/chart" xmlns:dgm="http://schemas.openxmlformats.org/drawingml/2006/diagram" xmlns:o="urn:schemas-microsoft-com:office:office" xmlns:v="urn:schemas-microsoft-com:vml" xmlns:pvml="urn:schemas-microsoft-com:office:powerpoint" xmlns:com="http://schemas.openxmlformats.org/drawingml/2006/compatibility" xmlns:p14="http://schemas.microsoft.com/office/powerpoint/2010/main" xmlns:p15="http://schemas.microsoft.com/office/powerpoint/2012/main" xmlns:ahyp="http://schemas.microsoft.com/office/drawing/2018/hyperlinkcolor">
+  <p:cSld>
+    <p:bg>
+      <p:bgPr>
+        <a:solidFill>
+          <a:srgbClr val="008629"/>
+        </a:solidFill>
+      </p:bgPr>
+    </p:bg>
+    <p:spTree>
+      <p:nvGrpSpPr>
+        <p:cNvPr id="208" name="Shape 208"/>
+        <p:cNvGrpSpPr/>
+        <p:nvPr/>
+      </p:nvGrpSpPr>
+      <p:grpSpPr>
+        <a:xfrm>
+          <a:off x="0" y="0"/>
+          <a:ext cx="0" cy="0"/>
+          <a:chOff x="0" y="0"/>
+          <a:chExt cx="0" cy="0"/>
+        </a:xfrm>
+      </p:grpSpPr>
+      <p:sp>
+        <p:nvSpPr>
+          <p:cNvPr id="209" name="Google Shape;209;p26"/>
+          <p:cNvSpPr/>
+          <p:nvPr/>
+        </p:nvSpPr>
+        <p:spPr>
+          <a:xfrm>
+            <a:off x="1822049" y="758550"/>
+            <a:ext cx="5499900" cy="3626400"/>
+          </a:xfrm>
+          <a:prstGeom prst="roundRect">
+            <a:avLst>
+              <a:gd fmla="val 3696" name="adj"/>
+            </a:avLst>
+          </a:prstGeom>
+          <a:solidFill>
+            <a:schemeClr val="lt1"/>
+          </a:solidFill>
+          <a:ln cap="flat" cmpd="sng" w="12225">
+            <a:solidFill>
+              <a:srgbClr val="FFFFFF"/>
+            </a:solidFill>
+            <a:prstDash val="solid"/>
+            <a:round/>
+            <a:headEnd len="sm" w="sm" type="none"/>
+            <a:tailEnd len="sm" w="sm" type="none"/>
+          </a:ln>
+        </p:spPr>
+        <p:txBody>
+          <a:bodyPr anchorCtr="0" anchor="ctr" bIns="117225" lIns="117225" spcFirstLastPara="1" rIns="117225" wrap="square" tIns="117225">
+            <a:noAutofit/>
+          </a:bodyPr>
+          <a:lstStyle/>
+          <a:p>
+            <a:pPr indent="0" lvl="0" marL="0" rtl="0" algn="ctr">
+              <a:spcBef>
+                <a:spcPts val="0"/>
+              </a:spcBef>
+              <a:spcAft>
+                <a:spcPts val="0"/>
+              </a:spcAft>
+              <a:buNone/>
+            </a:pPr>
+            <a:r>
+              <a:rPr lang="es-419">
+                <a:solidFill>
+                  <a:srgbClr val="38761D"/>
+                </a:solidFill>
+                <a:latin typeface="Montserrat Black"/>
+                <a:ea typeface="Montserrat Black"/>
+                <a:cs typeface="Montserrat Black"/>
+                <a:sym typeface="Montserrat Black"/>
+              </a:rPr>
+              <a:t>CUENTA</a:t>
+            </a:r>
+            <a:endParaRPr>
+              <a:solidFill>
+                <a:srgbClr val="38761D"/>
+              </a:solidFill>
+              <a:latin typeface="Montserrat Black"/>
+              <a:ea typeface="Montserrat Black"/>
+              <a:cs typeface="Montserrat Black"/>
+              <a:sym typeface="Montserrat Black"/>
+            </a:endParaRPr>
+          </a:p>
+        </p:txBody>
+      </p:sp>
+    </p:spTree>
+  </p:cSld>
+  <p:clrMapOvr>
+    <a:masterClrMapping/>
+  </p:clrMapOvr>
+</p:sld>
+</file>
+
+<file path=ppt/slides/slide15.xml><?xml version="1.0" encoding="utf-8"?>
+<p:sld xmlns:a="http://schemas.openxmlformats.org/drawingml/2006/main" xmlns:r="http://schemas.openxmlformats.org/officeDocument/2006/relationships" xmlns:mc="http://schemas.openxmlformats.org/markup-compatibility/2006" xmlns:mv="urn:schemas-microsoft-com:mac:vml" xmlns:p="http://schemas.openxmlformats.org/presentationml/2006/main" xmlns:c="http://schemas.openxmlformats.org/drawingml/2006/chart" xmlns:dgm="http://schemas.openxmlformats.org/drawingml/2006/diagram" xmlns:o="urn:schemas-microsoft-com:office:office" xmlns:v="urn:schemas-microsoft-com:vml" xmlns:pvml="urn:schemas-microsoft-com:office:powerpoint" xmlns:com="http://schemas.openxmlformats.org/drawingml/2006/compatibility" xmlns:p14="http://schemas.microsoft.com/office/powerpoint/2010/main" xmlns:p15="http://schemas.microsoft.com/office/powerpoint/2012/main" xmlns:ahyp="http://schemas.microsoft.com/office/drawing/2018/hyperlinkcolor">
+  <p:cSld>
+    <p:spTree>
+      <p:nvGrpSpPr>
+        <p:cNvPr id="213" name="Shape 213"/>
+        <p:cNvGrpSpPr/>
+        <p:nvPr/>
+      </p:nvGrpSpPr>
+      <p:grpSpPr>
+        <a:xfrm>
+          <a:off x="0" y="0"/>
+          <a:ext cx="0" cy="0"/>
+          <a:chOff x="0" y="0"/>
+          <a:chExt cx="0" cy="0"/>
+        </a:xfrm>
+      </p:grpSpPr>
+    </p:spTree>
+  </p:cSld>
+  <p:clrMapOvr>
+    <a:masterClrMapping/>
+  </p:clrMapOvr>
+</p:sld>
+</file>
+
 <file path=ppt/slides/slide2.xml><?xml version="1.0" encoding="utf-8"?>
 <p:sld xmlns:a="http://schemas.openxmlformats.org/drawingml/2006/main" xmlns:r="http://schemas.openxmlformats.org/officeDocument/2006/relationships" xmlns:mc="http://schemas.openxmlformats.org/markup-compatibility/2006" xmlns:mv="urn:schemas-microsoft-com:mac:vml" xmlns:p="http://schemas.openxmlformats.org/presentationml/2006/main" xmlns:c="http://schemas.openxmlformats.org/drawingml/2006/chart" xmlns:dgm="http://schemas.openxmlformats.org/drawingml/2006/diagram" xmlns:o="urn:schemas-microsoft-com:office:office" xmlns:v="urn:schemas-microsoft-com:vml" xmlns:pvml="urn:schemas-microsoft-com:office:powerpoint" xmlns:com="http://schemas.openxmlformats.org/drawingml/2006/compatibility" xmlns:p14="http://schemas.microsoft.com/office/powerpoint/2010/main" xmlns:p15="http://schemas.microsoft.com/office/powerpoint/2012/main" xmlns:ahyp="http://schemas.microsoft.com/office/drawing/2018/hyperlinkcolor">
   <p:cSld>
@@ -6421,7 +9145,7 @@
         <p:spPr>
           <a:xfrm>
             <a:off x="1012650" y="1287050"/>
-            <a:ext cx="7118700" cy="2709000"/>
+            <a:ext cx="7118700" cy="3187500"/>
           </a:xfrm>
           <a:prstGeom prst="rect">
             <a:avLst/>
@@ -6461,7 +9185,7 @@
                 <a:cs typeface="Montserrat"/>
                 <a:sym typeface="Montserrat"/>
               </a:rPr>
-              <a:t>LOGIN</a:t>
+              <a:t>LOGIN edwyn</a:t>
             </a:r>
             <a:endParaRPr sz="1800">
               <a:solidFill>
@@ -6498,7 +9222,19 @@
                 <a:cs typeface="Montserrat"/>
                 <a:sym typeface="Montserrat"/>
               </a:rPr>
-              <a:t>FRAMES (elección donde quiero ir)</a:t>
+              <a:t>FRAMES (elección donde quiero ir) </a:t>
+            </a:r>
+            <a:r>
+              <a:rPr lang="es-419" sz="1800">
+                <a:solidFill>
+                  <a:srgbClr val="188038"/>
+                </a:solidFill>
+                <a:latin typeface="Montserrat"/>
+                <a:ea typeface="Montserrat"/>
+                <a:cs typeface="Montserrat"/>
+                <a:sym typeface="Montserrat"/>
+              </a:rPr>
+              <a:t>edwyn</a:t>
             </a:r>
             <a:endParaRPr sz="1800">
               <a:solidFill>
@@ -6535,7 +9271,19 @@
                 <a:cs typeface="Montserrat"/>
                 <a:sym typeface="Montserrat"/>
               </a:rPr>
-              <a:t>CAJA</a:t>
+              <a:t>CAJA </a:t>
+            </a:r>
+            <a:r>
+              <a:rPr lang="es-419" sz="1800">
+                <a:solidFill>
+                  <a:srgbClr val="188038"/>
+                </a:solidFill>
+                <a:latin typeface="Montserrat"/>
+                <a:ea typeface="Montserrat"/>
+                <a:cs typeface="Montserrat"/>
+                <a:sym typeface="Montserrat"/>
+              </a:rPr>
+              <a:t>edwyn</a:t>
             </a:r>
             <a:endParaRPr sz="1800">
               <a:solidFill>
@@ -6572,7 +9320,7 @@
                 <a:cs typeface="Montserrat"/>
                 <a:sym typeface="Montserrat"/>
               </a:rPr>
-              <a:t>FACTURACIÓN ELECTRÓNICA</a:t>
+              <a:t>FACTURACIÓN ELECTRÓNICA Alejo</a:t>
             </a:r>
             <a:endParaRPr sz="1800">
               <a:solidFill>
@@ -6609,7 +9357,19 @@
                 <a:cs typeface="Montserrat"/>
                 <a:sym typeface="Montserrat"/>
               </a:rPr>
-              <a:t>DEVOLUCIONES</a:t>
+              <a:t>DEVOLUCIONES </a:t>
+            </a:r>
+            <a:r>
+              <a:rPr lang="es-419" sz="1800">
+                <a:solidFill>
+                  <a:srgbClr val="188038"/>
+                </a:solidFill>
+                <a:latin typeface="Montserrat"/>
+                <a:ea typeface="Montserrat"/>
+                <a:cs typeface="Montserrat"/>
+                <a:sym typeface="Montserrat"/>
+              </a:rPr>
+              <a:t>Alejo</a:t>
             </a:r>
             <a:endParaRPr sz="1800">
               <a:solidFill>
@@ -6646,7 +9406,19 @@
                 <a:cs typeface="Montserrat"/>
                 <a:sym typeface="Montserrat"/>
               </a:rPr>
-              <a:t>RECIBO DE PROVEEDORES</a:t>
+              <a:t>RECIBO DE PROVEEDORES </a:t>
+            </a:r>
+            <a:r>
+              <a:rPr lang="es-419" sz="1800">
+                <a:solidFill>
+                  <a:srgbClr val="188038"/>
+                </a:solidFill>
+                <a:latin typeface="Montserrat"/>
+                <a:ea typeface="Montserrat"/>
+                <a:cs typeface="Montserrat"/>
+                <a:sym typeface="Montserrat"/>
+              </a:rPr>
+              <a:t>Alejo</a:t>
             </a:r>
             <a:endParaRPr sz="1800">
               <a:solidFill>
@@ -6683,7 +9455,7 @@
                 <a:cs typeface="Montserrat"/>
                 <a:sym typeface="Montserrat"/>
               </a:rPr>
-              <a:t>FACTURAS</a:t>
+              <a:t>FACTURAS Nico</a:t>
             </a:r>
             <a:endParaRPr sz="1800">
               <a:solidFill>
@@ -6720,7 +9492,7 @@
                 <a:cs typeface="Montserrat"/>
                 <a:sym typeface="Montserrat"/>
               </a:rPr>
-              <a:t>INVENTARIOS CONSULTA</a:t>
+              <a:t>INVENTARIOS CONSULTA Nico</a:t>
             </a:r>
             <a:endParaRPr sz="1800">
               <a:solidFill>
@@ -6757,7 +9529,56 @@
                 <a:cs typeface="Montserrat"/>
                 <a:sym typeface="Montserrat"/>
               </a:rPr>
-              <a:t>INVENTARIOS MODIFICACIÓN</a:t>
+              <a:t>INVENTARIOS MODIFICACIÓN </a:t>
+            </a:r>
+            <a:r>
+              <a:rPr lang="es-419" sz="1800">
+                <a:solidFill>
+                  <a:srgbClr val="188038"/>
+                </a:solidFill>
+                <a:latin typeface="Montserrat"/>
+                <a:ea typeface="Montserrat"/>
+                <a:cs typeface="Montserrat"/>
+                <a:sym typeface="Montserrat"/>
+              </a:rPr>
+              <a:t>Nico</a:t>
+            </a:r>
+            <a:endParaRPr sz="1800">
+              <a:solidFill>
+                <a:srgbClr val="188038"/>
+              </a:solidFill>
+              <a:latin typeface="Montserrat"/>
+              <a:ea typeface="Montserrat"/>
+              <a:cs typeface="Montserrat"/>
+              <a:sym typeface="Montserrat"/>
+            </a:endParaRPr>
+          </a:p>
+          <a:p>
+            <a:pPr indent="-342900" lvl="0" marL="457200" rtl="0" algn="l">
+              <a:spcBef>
+                <a:spcPts val="0"/>
+              </a:spcBef>
+              <a:spcAft>
+                <a:spcPts val="0"/>
+              </a:spcAft>
+              <a:buClr>
+                <a:srgbClr val="188038"/>
+              </a:buClr>
+              <a:buSzPts val="1800"/>
+              <a:buFont typeface="Montserrat"/>
+              <a:buAutoNum type="arabicPeriod"/>
+            </a:pPr>
+            <a:r>
+              <a:rPr lang="es-419" sz="1800">
+                <a:solidFill>
+                  <a:srgbClr val="188038"/>
+                </a:solidFill>
+                <a:latin typeface="Montserrat"/>
+                <a:ea typeface="Montserrat"/>
+                <a:cs typeface="Montserrat"/>
+                <a:sym typeface="Montserrat"/>
+              </a:rPr>
+              <a:t>CUENTAS edwyn</a:t>
             </a:r>
             <a:endParaRPr sz="1800">
               <a:solidFill>
@@ -7229,6 +10050,34 @@
           </a:p>
         </p:txBody>
       </p:sp>
+      <p:pic>
+        <p:nvPicPr>
+          <p:cNvPr id="72" name="Google Shape;72;p15" title="logo_palma.png"/>
+          <p:cNvPicPr preferRelativeResize="0"/>
+          <p:nvPr/>
+        </p:nvPicPr>
+        <p:blipFill>
+          <a:blip r:embed="rId3">
+            <a:alphaModFix/>
+          </a:blip>
+          <a:stretch>
+            <a:fillRect/>
+          </a:stretch>
+        </p:blipFill>
+        <p:spPr>
+          <a:xfrm>
+            <a:off x="4167351" y="987050"/>
+            <a:ext cx="942125" cy="942125"/>
+          </a:xfrm>
+          <a:prstGeom prst="rect">
+            <a:avLst/>
+          </a:prstGeom>
+          <a:noFill/>
+          <a:ln>
+            <a:noFill/>
+          </a:ln>
+        </p:spPr>
+      </p:pic>
     </p:spTree>
   </p:cSld>
   <p:clrMapOvr>
@@ -7249,7 +10098,7 @@
     </p:bg>
     <p:spTree>
       <p:nvGrpSpPr>
-        <p:cNvPr id="75" name="Shape 75"/>
+        <p:cNvPr id="76" name="Shape 76"/>
         <p:cNvGrpSpPr/>
         <p:nvPr/>
       </p:nvGrpSpPr>
@@ -7263,7 +10112,7 @@
       </p:grpSpPr>
       <p:sp>
         <p:nvSpPr>
-          <p:cNvPr id="76" name="Google Shape;76;p16"/>
+          <p:cNvPr id="77" name="Google Shape;77;p16"/>
           <p:cNvSpPr/>
           <p:nvPr/>
         </p:nvSpPr>
@@ -7331,7 +10180,7 @@
       </p:sp>
       <p:sp>
         <p:nvSpPr>
-          <p:cNvPr id="77" name="Google Shape;77;p16"/>
+          <p:cNvPr id="78" name="Google Shape;78;p16"/>
           <p:cNvSpPr/>
           <p:nvPr/>
         </p:nvSpPr>
@@ -7399,7 +10248,7 @@
       </p:sp>
       <p:sp>
         <p:nvSpPr>
-          <p:cNvPr id="78" name="Google Shape;78;p16"/>
+          <p:cNvPr id="79" name="Google Shape;79;p16"/>
           <p:cNvSpPr/>
           <p:nvPr/>
         </p:nvSpPr>
@@ -7467,7 +10316,7 @@
       </p:sp>
       <p:sp>
         <p:nvSpPr>
-          <p:cNvPr id="79" name="Google Shape;79;p16"/>
+          <p:cNvPr id="80" name="Google Shape;80;p16"/>
           <p:cNvSpPr/>
           <p:nvPr/>
         </p:nvSpPr>
@@ -7535,7 +10384,7 @@
       </p:sp>
       <p:sp>
         <p:nvSpPr>
-          <p:cNvPr id="80" name="Google Shape;80;p16"/>
+          <p:cNvPr id="81" name="Google Shape;81;p16"/>
           <p:cNvSpPr/>
           <p:nvPr/>
         </p:nvSpPr>
@@ -7621,7 +10470,7 @@
     </p:bg>
     <p:spTree>
       <p:nvGrpSpPr>
-        <p:cNvPr id="84" name="Shape 84"/>
+        <p:cNvPr id="85" name="Shape 85"/>
         <p:cNvGrpSpPr/>
         <p:nvPr/>
       </p:nvGrpSpPr>
@@ -7635,7 +10484,7 @@
       </p:grpSpPr>
       <p:sp>
         <p:nvSpPr>
-          <p:cNvPr id="85" name="Google Shape;85;p17"/>
+          <p:cNvPr id="86" name="Google Shape;86;p17"/>
           <p:cNvSpPr/>
           <p:nvPr/>
         </p:nvSpPr>
@@ -7703,7 +10552,7 @@
       </p:sp>
       <p:sp>
         <p:nvSpPr>
-          <p:cNvPr id="86" name="Google Shape;86;p17"/>
+          <p:cNvPr id="87" name="Google Shape;87;p17"/>
           <p:cNvSpPr/>
           <p:nvPr/>
         </p:nvSpPr>
@@ -7771,7 +10620,7 @@
       </p:sp>
       <p:sp>
         <p:nvSpPr>
-          <p:cNvPr id="87" name="Google Shape;87;p17"/>
+          <p:cNvPr id="88" name="Google Shape;88;p17"/>
           <p:cNvSpPr/>
           <p:nvPr/>
         </p:nvSpPr>
@@ -7839,7 +10688,7 @@
       </p:sp>
       <p:sp>
         <p:nvSpPr>
-          <p:cNvPr id="88" name="Google Shape;88;p17"/>
+          <p:cNvPr id="89" name="Google Shape;89;p17"/>
           <p:cNvSpPr/>
           <p:nvPr/>
         </p:nvSpPr>
@@ -7925,7 +10774,7 @@
     </p:bg>
     <p:spTree>
       <p:nvGrpSpPr>
-        <p:cNvPr id="92" name="Shape 92"/>
+        <p:cNvPr id="93" name="Shape 93"/>
         <p:cNvGrpSpPr/>
         <p:nvPr/>
       </p:nvGrpSpPr>
@@ -7939,7 +10788,7 @@
       </p:grpSpPr>
       <p:sp>
         <p:nvSpPr>
-          <p:cNvPr id="93" name="Google Shape;93;p18"/>
+          <p:cNvPr id="94" name="Google Shape;94;p18"/>
           <p:cNvSpPr/>
           <p:nvPr/>
         </p:nvSpPr>
@@ -7984,17 +10833,21 @@
             <a:r>
               <a:t/>
             </a:r>
-            <a:endParaRPr b="1">
+            <a:endParaRPr>
               <a:solidFill>
                 <a:srgbClr val="274E13"/>
               </a:solidFill>
+              <a:latin typeface="Montserrat"/>
+              <a:ea typeface="Montserrat"/>
+              <a:cs typeface="Montserrat"/>
+              <a:sym typeface="Montserrat"/>
             </a:endParaRPr>
           </a:p>
         </p:txBody>
       </p:sp>
       <p:sp>
         <p:nvSpPr>
-          <p:cNvPr id="94" name="Google Shape;94;p18"/>
+          <p:cNvPr id="95" name="Google Shape;95;p18"/>
           <p:cNvSpPr/>
           <p:nvPr/>
         </p:nvSpPr>
@@ -8031,24 +10884,32 @@
               <a:buNone/>
             </a:pPr>
             <a:r>
-              <a:rPr b="1" lang="es-419" sz="800">
+              <a:rPr lang="es-419" sz="800">
                 <a:solidFill>
                   <a:srgbClr val="008629"/>
                 </a:solidFill>
+                <a:latin typeface="Montserrat"/>
+                <a:ea typeface="Montserrat"/>
+                <a:cs typeface="Montserrat"/>
+                <a:sym typeface="Montserrat"/>
               </a:rPr>
               <a:t>CAJA</a:t>
             </a:r>
-            <a:endParaRPr b="1" sz="800">
+            <a:endParaRPr sz="800">
               <a:solidFill>
                 <a:srgbClr val="008629"/>
               </a:solidFill>
+              <a:latin typeface="Montserrat"/>
+              <a:ea typeface="Montserrat"/>
+              <a:cs typeface="Montserrat"/>
+              <a:sym typeface="Montserrat"/>
             </a:endParaRPr>
           </a:p>
         </p:txBody>
       </p:sp>
       <p:sp>
         <p:nvSpPr>
-          <p:cNvPr id="95" name="Google Shape;95;p18"/>
+          <p:cNvPr id="96" name="Google Shape;96;p18"/>
           <p:cNvSpPr/>
           <p:nvPr/>
         </p:nvSpPr>
@@ -8085,24 +10946,32 @@
               <a:buNone/>
             </a:pPr>
             <a:r>
-              <a:rPr b="1" lang="es-419" sz="800">
+              <a:rPr lang="es-419" sz="800">
                 <a:solidFill>
                   <a:srgbClr val="008629"/>
                 </a:solidFill>
+                <a:latin typeface="Montserrat"/>
+                <a:ea typeface="Montserrat"/>
+                <a:cs typeface="Montserrat"/>
+                <a:sym typeface="Montserrat"/>
               </a:rPr>
               <a:t>AGREGAR</a:t>
             </a:r>
-            <a:endParaRPr b="1" sz="800">
+            <a:endParaRPr sz="800">
               <a:solidFill>
                 <a:srgbClr val="008629"/>
               </a:solidFill>
+              <a:latin typeface="Montserrat"/>
+              <a:ea typeface="Montserrat"/>
+              <a:cs typeface="Montserrat"/>
+              <a:sym typeface="Montserrat"/>
             </a:endParaRPr>
           </a:p>
         </p:txBody>
       </p:sp>
       <p:sp>
         <p:nvSpPr>
-          <p:cNvPr id="96" name="Google Shape;96;p18"/>
+          <p:cNvPr id="97" name="Google Shape;97;p18"/>
           <p:cNvSpPr/>
           <p:nvPr/>
         </p:nvSpPr>
@@ -8139,24 +11008,32 @@
               <a:buNone/>
             </a:pPr>
             <a:r>
-              <a:rPr b="1" lang="es-419" sz="800">
+              <a:rPr lang="es-419" sz="800">
                 <a:solidFill>
                   <a:srgbClr val="008629"/>
                 </a:solidFill>
+                <a:latin typeface="Montserrat"/>
+                <a:ea typeface="Montserrat"/>
+                <a:cs typeface="Montserrat"/>
+                <a:sym typeface="Montserrat"/>
               </a:rPr>
               <a:t>ELIMINAR</a:t>
             </a:r>
-            <a:endParaRPr b="1" sz="800">
+            <a:endParaRPr sz="800">
               <a:solidFill>
                 <a:srgbClr val="008629"/>
               </a:solidFill>
+              <a:latin typeface="Montserrat"/>
+              <a:ea typeface="Montserrat"/>
+              <a:cs typeface="Montserrat"/>
+              <a:sym typeface="Montserrat"/>
             </a:endParaRPr>
           </a:p>
         </p:txBody>
       </p:sp>
       <p:sp>
         <p:nvSpPr>
-          <p:cNvPr id="97" name="Google Shape;97;p18"/>
+          <p:cNvPr id="98" name="Google Shape;98;p18"/>
           <p:cNvSpPr/>
           <p:nvPr/>
         </p:nvSpPr>
@@ -8193,24 +11070,32 @@
               <a:buNone/>
             </a:pPr>
             <a:r>
-              <a:rPr b="1" lang="es-419" sz="800">
+              <a:rPr lang="es-419" sz="800">
                 <a:solidFill>
                   <a:srgbClr val="008629"/>
                 </a:solidFill>
+                <a:latin typeface="Montserrat"/>
+                <a:ea typeface="Montserrat"/>
+                <a:cs typeface="Montserrat"/>
+                <a:sym typeface="Montserrat"/>
               </a:rPr>
               <a:t>MODIFICAR</a:t>
             </a:r>
-            <a:endParaRPr b="1" sz="800">
+            <a:endParaRPr sz="800">
               <a:solidFill>
                 <a:srgbClr val="008629"/>
               </a:solidFill>
+              <a:latin typeface="Montserrat"/>
+              <a:ea typeface="Montserrat"/>
+              <a:cs typeface="Montserrat"/>
+              <a:sym typeface="Montserrat"/>
             </a:endParaRPr>
           </a:p>
         </p:txBody>
       </p:sp>
       <p:sp>
         <p:nvSpPr>
-          <p:cNvPr id="98" name="Google Shape;98;p18"/>
+          <p:cNvPr id="99" name="Google Shape;99;p18"/>
           <p:cNvSpPr/>
           <p:nvPr/>
         </p:nvSpPr>
@@ -8255,13 +11140,18 @@
             <a:r>
               <a:t/>
             </a:r>
-            <a:endParaRPr b="1"/>
+            <a:endParaRPr>
+              <a:latin typeface="Montserrat"/>
+              <a:ea typeface="Montserrat"/>
+              <a:cs typeface="Montserrat"/>
+              <a:sym typeface="Montserrat"/>
+            </a:endParaRPr>
           </a:p>
         </p:txBody>
       </p:sp>
       <p:sp>
         <p:nvSpPr>
-          <p:cNvPr id="99" name="Google Shape;99;p18"/>
+          <p:cNvPr id="100" name="Google Shape;100;p18"/>
           <p:cNvSpPr/>
           <p:nvPr/>
         </p:nvSpPr>
@@ -8300,13 +11190,18 @@
             <a:r>
               <a:t/>
             </a:r>
-            <a:endParaRPr b="1"/>
+            <a:endParaRPr>
+              <a:latin typeface="Montserrat"/>
+              <a:ea typeface="Montserrat"/>
+              <a:cs typeface="Montserrat"/>
+              <a:sym typeface="Montserrat"/>
+            </a:endParaRPr>
           </a:p>
         </p:txBody>
       </p:sp>
       <p:sp>
         <p:nvSpPr>
-          <p:cNvPr id="100" name="Google Shape;100;p18"/>
+          <p:cNvPr id="101" name="Google Shape;101;p18"/>
           <p:cNvSpPr/>
           <p:nvPr/>
         </p:nvSpPr>
@@ -8345,13 +11240,18 @@
             <a:r>
               <a:t/>
             </a:r>
-            <a:endParaRPr b="1"/>
+            <a:endParaRPr>
+              <a:latin typeface="Montserrat"/>
+              <a:ea typeface="Montserrat"/>
+              <a:cs typeface="Montserrat"/>
+              <a:sym typeface="Montserrat"/>
+            </a:endParaRPr>
           </a:p>
         </p:txBody>
       </p:sp>
       <p:sp>
         <p:nvSpPr>
-          <p:cNvPr id="101" name="Google Shape;101;p18"/>
+          <p:cNvPr id="102" name="Google Shape;102;p18"/>
           <p:cNvSpPr txBox="1"/>
           <p:nvPr/>
         </p:nvSpPr>
@@ -8384,24 +11284,32 @@
               <a:buNone/>
             </a:pPr>
             <a:r>
-              <a:rPr b="1" lang="es-419" sz="1000">
+              <a:rPr lang="es-419" sz="1000">
                 <a:solidFill>
                   <a:schemeClr val="lt1"/>
                 </a:solidFill>
+                <a:latin typeface="Montserrat"/>
+                <a:ea typeface="Montserrat"/>
+                <a:cs typeface="Montserrat"/>
+                <a:sym typeface="Montserrat"/>
               </a:rPr>
               <a:t>Total a pagar:</a:t>
             </a:r>
-            <a:endParaRPr b="1" sz="1000">
+            <a:endParaRPr sz="1000">
               <a:solidFill>
                 <a:schemeClr val="lt1"/>
               </a:solidFill>
+              <a:latin typeface="Montserrat"/>
+              <a:ea typeface="Montserrat"/>
+              <a:cs typeface="Montserrat"/>
+              <a:sym typeface="Montserrat"/>
             </a:endParaRPr>
           </a:p>
         </p:txBody>
       </p:sp>
       <p:sp>
         <p:nvSpPr>
-          <p:cNvPr id="102" name="Google Shape;102;p18"/>
+          <p:cNvPr id="103" name="Google Shape;103;p18"/>
           <p:cNvSpPr txBox="1"/>
           <p:nvPr/>
         </p:nvSpPr>
@@ -8434,24 +11342,32 @@
               <a:buNone/>
             </a:pPr>
             <a:r>
-              <a:rPr b="1" lang="es-419" sz="1000">
+              <a:rPr lang="es-419" sz="1000">
                 <a:solidFill>
                   <a:srgbClr val="38761D"/>
                 </a:solidFill>
+                <a:latin typeface="Montserrat"/>
+                <a:ea typeface="Montserrat"/>
+                <a:cs typeface="Montserrat"/>
+                <a:sym typeface="Montserrat"/>
               </a:rPr>
               <a:t>Efectivo</a:t>
             </a:r>
-            <a:endParaRPr b="1" sz="1000">
+            <a:endParaRPr sz="1000">
               <a:solidFill>
                 <a:srgbClr val="38761D"/>
               </a:solidFill>
+              <a:latin typeface="Montserrat"/>
+              <a:ea typeface="Montserrat"/>
+              <a:cs typeface="Montserrat"/>
+              <a:sym typeface="Montserrat"/>
             </a:endParaRPr>
           </a:p>
         </p:txBody>
       </p:sp>
       <p:sp>
         <p:nvSpPr>
-          <p:cNvPr id="103" name="Google Shape;103;p18"/>
+          <p:cNvPr id="104" name="Google Shape;104;p18"/>
           <p:cNvSpPr txBox="1"/>
           <p:nvPr/>
         </p:nvSpPr>
@@ -8484,31 +11400,39 @@
               <a:buNone/>
             </a:pPr>
             <a:r>
-              <a:rPr b="1" lang="es-419" sz="1000">
+              <a:rPr lang="es-419" sz="1000">
                 <a:solidFill>
                   <a:schemeClr val="lt1"/>
                 </a:solidFill>
+                <a:latin typeface="Montserrat"/>
+                <a:ea typeface="Montserrat"/>
+                <a:cs typeface="Montserrat"/>
+                <a:sym typeface="Montserrat"/>
               </a:rPr>
               <a:t>Cambio</a:t>
             </a:r>
-            <a:endParaRPr b="1" sz="1000">
+            <a:endParaRPr sz="1000">
               <a:solidFill>
                 <a:schemeClr val="lt1"/>
               </a:solidFill>
+              <a:latin typeface="Montserrat"/>
+              <a:ea typeface="Montserrat"/>
+              <a:cs typeface="Montserrat"/>
+              <a:sym typeface="Montserrat"/>
             </a:endParaRPr>
           </a:p>
         </p:txBody>
       </p:sp>
       <p:sp>
         <p:nvSpPr>
-          <p:cNvPr id="104" name="Google Shape;104;p18"/>
+          <p:cNvPr id="105" name="Google Shape;105;p18"/>
           <p:cNvSpPr txBox="1"/>
           <p:nvPr/>
         </p:nvSpPr>
         <p:spPr>
           <a:xfrm>
-            <a:off x="291025" y="564318"/>
-            <a:ext cx="2114100" cy="530700"/>
+            <a:off x="161450" y="564325"/>
+            <a:ext cx="2238900" cy="530700"/>
           </a:xfrm>
           <a:prstGeom prst="rect">
             <a:avLst/>
@@ -8534,31 +11458,39 @@
               <a:buNone/>
             </a:pPr>
             <a:r>
-              <a:rPr b="1" lang="es-419" sz="3500">
+              <a:rPr lang="es-419" sz="3400">
                 <a:solidFill>
                   <a:schemeClr val="lt1"/>
                 </a:solidFill>
+                <a:latin typeface="Montserrat ExtraBold"/>
+                <a:ea typeface="Montserrat ExtraBold"/>
+                <a:cs typeface="Montserrat ExtraBold"/>
+                <a:sym typeface="Montserrat ExtraBold"/>
               </a:rPr>
               <a:t>$123.000</a:t>
             </a:r>
-            <a:endParaRPr b="1" sz="3500">
+            <a:endParaRPr sz="3400">
               <a:solidFill>
                 <a:schemeClr val="lt1"/>
               </a:solidFill>
+              <a:latin typeface="Montserrat ExtraBold"/>
+              <a:ea typeface="Montserrat ExtraBold"/>
+              <a:cs typeface="Montserrat ExtraBold"/>
+              <a:sym typeface="Montserrat ExtraBold"/>
             </a:endParaRPr>
           </a:p>
         </p:txBody>
       </p:sp>
       <p:sp>
         <p:nvSpPr>
-          <p:cNvPr id="105" name="Google Shape;105;p18"/>
+          <p:cNvPr id="106" name="Google Shape;106;p18"/>
           <p:cNvSpPr txBox="1"/>
           <p:nvPr/>
         </p:nvSpPr>
         <p:spPr>
           <a:xfrm>
-            <a:off x="306328" y="1920961"/>
-            <a:ext cx="2114100" cy="348600"/>
+            <a:off x="177657" y="1920967"/>
+            <a:ext cx="2238900" cy="348600"/>
           </a:xfrm>
           <a:prstGeom prst="rect">
             <a:avLst/>
@@ -8584,31 +11516,39 @@
               <a:buNone/>
             </a:pPr>
             <a:r>
-              <a:rPr b="1" lang="es-419" sz="3500">
+              <a:rPr lang="es-419" sz="3400">
                 <a:solidFill>
                   <a:srgbClr val="008629"/>
                 </a:solidFill>
+                <a:latin typeface="Montserrat ExtraBold"/>
+                <a:ea typeface="Montserrat ExtraBold"/>
+                <a:cs typeface="Montserrat ExtraBold"/>
+                <a:sym typeface="Montserrat ExtraBold"/>
               </a:rPr>
               <a:t>$150.000</a:t>
             </a:r>
-            <a:endParaRPr b="1" sz="3500">
+            <a:endParaRPr sz="3400">
               <a:solidFill>
                 <a:srgbClr val="008629"/>
               </a:solidFill>
+              <a:latin typeface="Montserrat ExtraBold"/>
+              <a:ea typeface="Montserrat ExtraBold"/>
+              <a:cs typeface="Montserrat ExtraBold"/>
+              <a:sym typeface="Montserrat ExtraBold"/>
             </a:endParaRPr>
           </a:p>
         </p:txBody>
       </p:sp>
       <p:sp>
         <p:nvSpPr>
-          <p:cNvPr id="106" name="Google Shape;106;p18"/>
+          <p:cNvPr id="107" name="Google Shape;107;p18"/>
           <p:cNvSpPr txBox="1"/>
           <p:nvPr/>
         </p:nvSpPr>
         <p:spPr>
           <a:xfrm>
-            <a:off x="370225" y="3276018"/>
-            <a:ext cx="2114100" cy="348600"/>
+            <a:off x="245329" y="3276025"/>
+            <a:ext cx="2238900" cy="348600"/>
           </a:xfrm>
           <a:prstGeom prst="rect">
             <a:avLst/>
@@ -8634,24 +11574,32 @@
               <a:buNone/>
             </a:pPr>
             <a:r>
-              <a:rPr b="1" lang="es-419" sz="3500">
+              <a:rPr lang="es-419" sz="3400">
                 <a:solidFill>
                   <a:schemeClr val="lt1"/>
                 </a:solidFill>
+                <a:latin typeface="Montserrat ExtraBold"/>
+                <a:ea typeface="Montserrat ExtraBold"/>
+                <a:cs typeface="Montserrat ExtraBold"/>
+                <a:sym typeface="Montserrat ExtraBold"/>
               </a:rPr>
               <a:t>$27.000</a:t>
             </a:r>
-            <a:endParaRPr b="1" sz="3500">
+            <a:endParaRPr sz="3400">
               <a:solidFill>
                 <a:schemeClr val="lt1"/>
               </a:solidFill>
+              <a:latin typeface="Montserrat ExtraBold"/>
+              <a:ea typeface="Montserrat ExtraBold"/>
+              <a:cs typeface="Montserrat ExtraBold"/>
+              <a:sym typeface="Montserrat ExtraBold"/>
             </a:endParaRPr>
           </a:p>
         </p:txBody>
       </p:sp>
       <p:sp>
         <p:nvSpPr>
-          <p:cNvPr id="107" name="Google Shape;107;p18"/>
+          <p:cNvPr id="108" name="Google Shape;108;p18"/>
           <p:cNvSpPr txBox="1"/>
           <p:nvPr/>
         </p:nvSpPr>
@@ -8684,24 +11632,32 @@
               <a:buNone/>
             </a:pPr>
             <a:r>
-              <a:rPr b="1" lang="es-419" sz="1800">
+              <a:rPr lang="es-419" sz="1800">
                 <a:solidFill>
                   <a:srgbClr val="008629"/>
                 </a:solidFill>
+                <a:latin typeface="Montserrat ExtraBold"/>
+                <a:ea typeface="Montserrat ExtraBold"/>
+                <a:cs typeface="Montserrat ExtraBold"/>
+                <a:sym typeface="Montserrat ExtraBold"/>
               </a:rPr>
               <a:t>FACTURACIÓN</a:t>
             </a:r>
-            <a:endParaRPr b="1" sz="1800">
+            <a:endParaRPr sz="1800">
               <a:solidFill>
                 <a:srgbClr val="008629"/>
               </a:solidFill>
+              <a:latin typeface="Montserrat ExtraBold"/>
+              <a:ea typeface="Montserrat ExtraBold"/>
+              <a:cs typeface="Montserrat ExtraBold"/>
+              <a:sym typeface="Montserrat ExtraBold"/>
             </a:endParaRPr>
           </a:p>
         </p:txBody>
       </p:sp>
       <p:sp>
         <p:nvSpPr>
-          <p:cNvPr id="108" name="Google Shape;108;p18"/>
+          <p:cNvPr id="109" name="Google Shape;109;p18"/>
           <p:cNvSpPr txBox="1"/>
           <p:nvPr/>
         </p:nvSpPr>
@@ -8734,24 +11690,32 @@
               <a:buNone/>
             </a:pPr>
             <a:r>
-              <a:rPr b="1" lang="es-419" sz="800">
+              <a:rPr lang="es-419" sz="800">
                 <a:solidFill>
                   <a:srgbClr val="008629"/>
                 </a:solidFill>
+                <a:latin typeface="Montserrat"/>
+                <a:ea typeface="Montserrat"/>
+                <a:cs typeface="Montserrat"/>
+                <a:sym typeface="Montserrat"/>
               </a:rPr>
               <a:t>ID			NOMBRE				CANTIDAD/ PESO			PRECIO</a:t>
             </a:r>
-            <a:endParaRPr b="1" sz="800">
+            <a:endParaRPr sz="800">
               <a:solidFill>
                 <a:srgbClr val="008629"/>
               </a:solidFill>
+              <a:latin typeface="Montserrat"/>
+              <a:ea typeface="Montserrat"/>
+              <a:cs typeface="Montserrat"/>
+              <a:sym typeface="Montserrat"/>
             </a:endParaRPr>
           </a:p>
         </p:txBody>
       </p:sp>
       <p:sp>
         <p:nvSpPr>
-          <p:cNvPr id="109" name="Google Shape;109;p18"/>
+          <p:cNvPr id="110" name="Google Shape;110;p18"/>
           <p:cNvSpPr/>
           <p:nvPr/>
         </p:nvSpPr>
@@ -8788,24 +11752,32 @@
               <a:buNone/>
             </a:pPr>
             <a:r>
-              <a:rPr b="1" lang="es-419" sz="800">
+              <a:rPr lang="es-419" sz="800">
                 <a:solidFill>
                   <a:srgbClr val="008629"/>
                 </a:solidFill>
+                <a:latin typeface="Montserrat"/>
+                <a:ea typeface="Montserrat"/>
+                <a:cs typeface="Montserrat"/>
+                <a:sym typeface="Montserrat"/>
               </a:rPr>
               <a:t>BUSCAR</a:t>
             </a:r>
-            <a:endParaRPr b="1" sz="800">
+            <a:endParaRPr sz="800">
               <a:solidFill>
                 <a:srgbClr val="008629"/>
               </a:solidFill>
+              <a:latin typeface="Montserrat"/>
+              <a:ea typeface="Montserrat"/>
+              <a:cs typeface="Montserrat"/>
+              <a:sym typeface="Montserrat"/>
             </a:endParaRPr>
           </a:p>
         </p:txBody>
       </p:sp>
       <p:sp>
         <p:nvSpPr>
-          <p:cNvPr id="110" name="Google Shape;110;p18"/>
+          <p:cNvPr id="111" name="Google Shape;111;p18"/>
           <p:cNvSpPr/>
           <p:nvPr/>
         </p:nvSpPr>
@@ -8848,24 +11820,32 @@
               <a:buNone/>
             </a:pPr>
             <a:r>
-              <a:rPr b="1" lang="es-419" sz="800">
+              <a:rPr lang="es-419" sz="800">
                 <a:solidFill>
                   <a:schemeClr val="lt1"/>
                 </a:solidFill>
+                <a:latin typeface="Montserrat"/>
+                <a:ea typeface="Montserrat"/>
+                <a:cs typeface="Montserrat"/>
+                <a:sym typeface="Montserrat"/>
               </a:rPr>
               <a:t>COBRAR</a:t>
             </a:r>
-            <a:endParaRPr b="1" sz="800">
+            <a:endParaRPr sz="800">
               <a:solidFill>
                 <a:schemeClr val="lt1"/>
               </a:solidFill>
+              <a:latin typeface="Montserrat"/>
+              <a:ea typeface="Montserrat"/>
+              <a:cs typeface="Montserrat"/>
+              <a:sym typeface="Montserrat"/>
             </a:endParaRPr>
           </a:p>
         </p:txBody>
       </p:sp>
       <p:sp>
         <p:nvSpPr>
-          <p:cNvPr id="111" name="Google Shape;111;p18"/>
+          <p:cNvPr id="112" name="Google Shape;112;p18"/>
           <p:cNvSpPr/>
           <p:nvPr/>
         </p:nvSpPr>
@@ -8902,24 +11882,32 @@
               <a:buNone/>
             </a:pPr>
             <a:r>
-              <a:rPr b="1" lang="es-419" sz="800">
+              <a:rPr lang="es-419" sz="800">
                 <a:solidFill>
                   <a:srgbClr val="008629"/>
                 </a:solidFill>
+                <a:latin typeface="Montserrat"/>
+                <a:ea typeface="Montserrat"/>
+                <a:cs typeface="Montserrat"/>
+                <a:sym typeface="Montserrat"/>
               </a:rPr>
               <a:t>X</a:t>
             </a:r>
-            <a:endParaRPr b="1" sz="800">
+            <a:endParaRPr sz="800">
               <a:solidFill>
                 <a:srgbClr val="008629"/>
               </a:solidFill>
+              <a:latin typeface="Montserrat"/>
+              <a:ea typeface="Montserrat"/>
+              <a:cs typeface="Montserrat"/>
+              <a:sym typeface="Montserrat"/>
             </a:endParaRPr>
           </a:p>
         </p:txBody>
       </p:sp>
       <p:sp>
         <p:nvSpPr>
-          <p:cNvPr id="112" name="Google Shape;112;p18"/>
+          <p:cNvPr id="113" name="Google Shape;113;p18"/>
           <p:cNvSpPr/>
           <p:nvPr/>
         </p:nvSpPr>
@@ -8956,24 +11944,32 @@
               <a:buNone/>
             </a:pPr>
             <a:r>
-              <a:rPr b="1" lang="es-419" sz="800">
+              <a:rPr lang="es-419" sz="800">
                 <a:solidFill>
                   <a:srgbClr val="008629"/>
                 </a:solidFill>
+                <a:latin typeface="Montserrat"/>
+                <a:ea typeface="Montserrat"/>
+                <a:cs typeface="Montserrat"/>
+                <a:sym typeface="Montserrat"/>
               </a:rPr>
               <a:t>DEVOLUCIONES</a:t>
             </a:r>
-            <a:endParaRPr b="1" sz="800">
+            <a:endParaRPr sz="800">
               <a:solidFill>
                 <a:srgbClr val="008629"/>
               </a:solidFill>
+              <a:latin typeface="Montserrat"/>
+              <a:ea typeface="Montserrat"/>
+              <a:cs typeface="Montserrat"/>
+              <a:sym typeface="Montserrat"/>
             </a:endParaRPr>
           </a:p>
         </p:txBody>
       </p:sp>
       <p:sp>
         <p:nvSpPr>
-          <p:cNvPr id="113" name="Google Shape;113;p18"/>
+          <p:cNvPr id="114" name="Google Shape;114;p18"/>
           <p:cNvSpPr/>
           <p:nvPr/>
         </p:nvSpPr>
@@ -9010,39 +12006,55 @@
               <a:buNone/>
             </a:pPr>
             <a:r>
-              <a:rPr b="1" lang="es-419" sz="800">
+              <a:rPr lang="es-419" sz="800">
                 <a:solidFill>
                   <a:srgbClr val="008629"/>
                 </a:solidFill>
+                <a:latin typeface="Montserrat"/>
+                <a:ea typeface="Montserrat"/>
+                <a:cs typeface="Montserrat"/>
+                <a:sym typeface="Montserrat"/>
               </a:rPr>
               <a:t>FACTURA</a:t>
             </a:r>
             <a:br>
-              <a:rPr b="1" lang="es-419" sz="800">
+              <a:rPr lang="es-419" sz="800">
                 <a:solidFill>
                   <a:srgbClr val="008629"/>
                 </a:solidFill>
+                <a:latin typeface="Montserrat"/>
+                <a:ea typeface="Montserrat"/>
+                <a:cs typeface="Montserrat"/>
+                <a:sym typeface="Montserrat"/>
               </a:rPr>
             </a:br>
             <a:r>
-              <a:rPr b="1" lang="es-419" sz="800">
+              <a:rPr lang="es-419" sz="800">
                 <a:solidFill>
                   <a:srgbClr val="008629"/>
                 </a:solidFill>
+                <a:latin typeface="Montserrat"/>
+                <a:ea typeface="Montserrat"/>
+                <a:cs typeface="Montserrat"/>
+                <a:sym typeface="Montserrat"/>
               </a:rPr>
               <a:t>ELECTRÓNICA</a:t>
             </a:r>
-            <a:endParaRPr b="1" sz="800">
+            <a:endParaRPr sz="800">
               <a:solidFill>
                 <a:srgbClr val="008629"/>
               </a:solidFill>
+              <a:latin typeface="Montserrat"/>
+              <a:ea typeface="Montserrat"/>
+              <a:cs typeface="Montserrat"/>
+              <a:sym typeface="Montserrat"/>
             </a:endParaRPr>
           </a:p>
         </p:txBody>
       </p:sp>
       <p:sp>
         <p:nvSpPr>
-          <p:cNvPr id="114" name="Google Shape;114;p18"/>
+          <p:cNvPr id="115" name="Google Shape;115;p18"/>
           <p:cNvSpPr/>
           <p:nvPr/>
         </p:nvSpPr>
@@ -9079,17 +12091,25 @@
               <a:buNone/>
             </a:pPr>
             <a:r>
-              <a:rPr b="1" lang="es-419" sz="800">
+              <a:rPr lang="es-419" sz="800">
                 <a:solidFill>
                   <a:srgbClr val="008629"/>
                 </a:solidFill>
+                <a:latin typeface="Montserrat"/>
+                <a:ea typeface="Montserrat"/>
+                <a:cs typeface="Montserrat"/>
+                <a:sym typeface="Montserrat"/>
               </a:rPr>
               <a:t>RECIBO</a:t>
             </a:r>
-            <a:endParaRPr b="1" sz="800">
+            <a:endParaRPr sz="800">
               <a:solidFill>
                 <a:srgbClr val="008629"/>
               </a:solidFill>
+              <a:latin typeface="Montserrat"/>
+              <a:ea typeface="Montserrat"/>
+              <a:cs typeface="Montserrat"/>
+              <a:sym typeface="Montserrat"/>
             </a:endParaRPr>
           </a:p>
           <a:p>
@@ -9103,17 +12123,25 @@
               <a:buNone/>
             </a:pPr>
             <a:r>
-              <a:rPr b="1" lang="es-419" sz="800">
+              <a:rPr lang="es-419" sz="800">
                 <a:solidFill>
                   <a:srgbClr val="008629"/>
                 </a:solidFill>
+                <a:latin typeface="Montserrat"/>
+                <a:ea typeface="Montserrat"/>
+                <a:cs typeface="Montserrat"/>
+                <a:sym typeface="Montserrat"/>
               </a:rPr>
               <a:t>PROVEEDORES</a:t>
             </a:r>
-            <a:endParaRPr b="1" sz="800">
+            <a:endParaRPr sz="800">
               <a:solidFill>
                 <a:srgbClr val="008629"/>
               </a:solidFill>
+              <a:latin typeface="Montserrat"/>
+              <a:ea typeface="Montserrat"/>
+              <a:cs typeface="Montserrat"/>
+              <a:sym typeface="Montserrat"/>
             </a:endParaRPr>
           </a:p>
         </p:txBody>
@@ -9138,7 +12166,7 @@
     </p:bg>
     <p:spTree>
       <p:nvGrpSpPr>
-        <p:cNvPr id="118" name="Shape 118"/>
+        <p:cNvPr id="119" name="Shape 119"/>
         <p:cNvGrpSpPr/>
         <p:nvPr/>
       </p:nvGrpSpPr>
@@ -9152,14 +12180,14 @@
       </p:grpSpPr>
       <p:sp>
         <p:nvSpPr>
-          <p:cNvPr id="119" name="Google Shape;119;p19"/>
+          <p:cNvPr id="120" name="Google Shape;120;p19"/>
           <p:cNvSpPr/>
           <p:nvPr/>
         </p:nvSpPr>
         <p:spPr>
           <a:xfrm>
             <a:off x="129500" y="987950"/>
-            <a:ext cx="8903700" cy="4062600"/>
+            <a:ext cx="4322100" cy="4062600"/>
           </a:xfrm>
           <a:prstGeom prst="roundRect">
             <a:avLst>
@@ -9197,117 +12225,21 @@
             <a:r>
               <a:t/>
             </a:r>
-            <a:endParaRPr b="1">
+            <a:endParaRPr>
               <a:solidFill>
                 <a:srgbClr val="274E13"/>
               </a:solidFill>
+              <a:latin typeface="Montserrat"/>
+              <a:ea typeface="Montserrat"/>
+              <a:cs typeface="Montserrat"/>
+              <a:sym typeface="Montserrat"/>
             </a:endParaRPr>
           </a:p>
         </p:txBody>
       </p:sp>
       <p:sp>
         <p:nvSpPr>
-          <p:cNvPr id="120" name="Google Shape;120;p19"/>
-          <p:cNvSpPr txBox="1"/>
-          <p:nvPr/>
-        </p:nvSpPr>
-        <p:spPr>
-          <a:xfrm>
-            <a:off x="2385955" y="1114420"/>
-            <a:ext cx="4316100" cy="229800"/>
-          </a:xfrm>
-          <a:prstGeom prst="rect">
-            <a:avLst/>
-          </a:prstGeom>
-          <a:noFill/>
-          <a:ln>
-            <a:noFill/>
-          </a:ln>
-        </p:spPr>
-        <p:txBody>
-          <a:bodyPr anchorCtr="0" anchor="ctr" bIns="91425" lIns="91425" spcFirstLastPara="1" rIns="91425" wrap="square" tIns="91425">
-            <a:noAutofit/>
-          </a:bodyPr>
-          <a:lstStyle/>
-          <a:p>
-            <a:pPr indent="0" lvl="0" marL="0" rtl="0" algn="ctr">
-              <a:spcBef>
-                <a:spcPts val="0"/>
-              </a:spcBef>
-              <a:spcAft>
-                <a:spcPts val="0"/>
-              </a:spcAft>
-              <a:buNone/>
-            </a:pPr>
-            <a:r>
-              <a:rPr b="1" lang="es-419" sz="1800">
-                <a:solidFill>
-                  <a:srgbClr val="008629"/>
-                </a:solidFill>
-              </a:rPr>
-              <a:t>FACTURAS</a:t>
-            </a:r>
-            <a:endParaRPr b="1" sz="1800">
-              <a:solidFill>
-                <a:srgbClr val="008629"/>
-              </a:solidFill>
-            </a:endParaRPr>
-          </a:p>
-        </p:txBody>
-      </p:sp>
-      <p:sp>
-        <p:nvSpPr>
           <p:cNvPr id="121" name="Google Shape;121;p19"/>
-          <p:cNvSpPr txBox="1"/>
-          <p:nvPr/>
-        </p:nvSpPr>
-        <p:spPr>
-          <a:xfrm>
-            <a:off x="53125" y="1418759"/>
-            <a:ext cx="8986500" cy="229800"/>
-          </a:xfrm>
-          <a:prstGeom prst="rect">
-            <a:avLst/>
-          </a:prstGeom>
-          <a:noFill/>
-          <a:ln>
-            <a:noFill/>
-          </a:ln>
-        </p:spPr>
-        <p:txBody>
-          <a:bodyPr anchorCtr="0" anchor="ctr" bIns="91425" lIns="91425" spcFirstLastPara="1" rIns="91425" wrap="square" tIns="91425">
-            <a:noAutofit/>
-          </a:bodyPr>
-          <a:lstStyle/>
-          <a:p>
-            <a:pPr indent="0" lvl="0" marL="0" rtl="0" algn="ctr">
-              <a:spcBef>
-                <a:spcPts val="0"/>
-              </a:spcBef>
-              <a:spcAft>
-                <a:spcPts val="0"/>
-              </a:spcAft>
-              <a:buNone/>
-            </a:pPr>
-            <a:r>
-              <a:rPr b="1" lang="es-419" sz="800">
-                <a:solidFill>
-                  <a:srgbClr val="008629"/>
-                </a:solidFill>
-              </a:rPr>
-              <a:t>ID FACTURA			ID CLIENTE			FECHA			NOMBRE CLIENTE			TOTAL		PDF</a:t>
-            </a:r>
-            <a:endParaRPr b="1" sz="800">
-              <a:solidFill>
-                <a:srgbClr val="008629"/>
-              </a:solidFill>
-            </a:endParaRPr>
-          </a:p>
-        </p:txBody>
-      </p:sp>
-      <p:sp>
-        <p:nvSpPr>
-          <p:cNvPr id="122" name="Google Shape;122;p19"/>
           <p:cNvSpPr/>
           <p:nvPr/>
         </p:nvSpPr>
@@ -9350,24 +12282,32 @@
               <a:buNone/>
             </a:pPr>
             <a:r>
-              <a:rPr b="1" lang="es-419" sz="800">
+              <a:rPr lang="es-419" sz="800">
                 <a:solidFill>
                   <a:schemeClr val="lt1"/>
                 </a:solidFill>
+                <a:latin typeface="Montserrat ExtraBold"/>
+                <a:ea typeface="Montserrat ExtraBold"/>
+                <a:cs typeface="Montserrat ExtraBold"/>
+                <a:sym typeface="Montserrat ExtraBold"/>
               </a:rPr>
               <a:t>BUSCAR</a:t>
             </a:r>
-            <a:endParaRPr b="1" sz="800">
+            <a:endParaRPr sz="800">
               <a:solidFill>
                 <a:schemeClr val="lt1"/>
               </a:solidFill>
+              <a:latin typeface="Montserrat ExtraBold"/>
+              <a:ea typeface="Montserrat ExtraBold"/>
+              <a:cs typeface="Montserrat ExtraBold"/>
+              <a:sym typeface="Montserrat ExtraBold"/>
             </a:endParaRPr>
           </a:p>
         </p:txBody>
       </p:sp>
       <p:sp>
         <p:nvSpPr>
-          <p:cNvPr id="123" name="Google Shape;123;p19"/>
+          <p:cNvPr id="122" name="Google Shape;122;p19"/>
           <p:cNvSpPr/>
           <p:nvPr/>
         </p:nvSpPr>
@@ -9414,10 +12354,10 @@
                 <a:solidFill>
                   <a:srgbClr val="008629"/>
                 </a:solidFill>
-                <a:latin typeface="Montserrat Black"/>
-                <a:ea typeface="Montserrat Black"/>
-                <a:cs typeface="Montserrat Black"/>
-                <a:sym typeface="Montserrat Black"/>
+                <a:latin typeface="Montserrat"/>
+                <a:ea typeface="Montserrat"/>
+                <a:cs typeface="Montserrat"/>
+                <a:sym typeface="Montserrat"/>
               </a:rPr>
               <a:t>X</a:t>
             </a:r>
@@ -9425,17 +12365,17 @@
               <a:solidFill>
                 <a:srgbClr val="008629"/>
               </a:solidFill>
-              <a:latin typeface="Montserrat Black"/>
-              <a:ea typeface="Montserrat Black"/>
-              <a:cs typeface="Montserrat Black"/>
-              <a:sym typeface="Montserrat Black"/>
+              <a:latin typeface="Montserrat"/>
+              <a:ea typeface="Montserrat"/>
+              <a:cs typeface="Montserrat"/>
+              <a:sym typeface="Montserrat"/>
             </a:endParaRPr>
           </a:p>
         </p:txBody>
       </p:sp>
       <p:sp>
         <p:nvSpPr>
-          <p:cNvPr id="124" name="Google Shape;124;p19"/>
+          <p:cNvPr id="123" name="Google Shape;123;p19"/>
           <p:cNvSpPr/>
           <p:nvPr/>
         </p:nvSpPr>
@@ -9482,36 +12422,28 @@
                 <a:solidFill>
                   <a:srgbClr val="CCCCCC"/>
                 </a:solidFill>
+                <a:latin typeface="Montserrat"/>
+                <a:ea typeface="Montserrat"/>
+                <a:cs typeface="Montserrat"/>
+                <a:sym typeface="Montserrat"/>
               </a:rPr>
-              <a:t>Buscar por </a:t>
-            </a:r>
-            <a:r>
-              <a:rPr lang="es-419" sz="800">
-                <a:solidFill>
-                  <a:srgbClr val="CCCCCC"/>
-                </a:solidFill>
-              </a:rPr>
-              <a:t>número</a:t>
-            </a:r>
-            <a:r>
-              <a:rPr lang="es-419" sz="800">
-                <a:solidFill>
-                  <a:srgbClr val="CCCCCC"/>
-                </a:solidFill>
-              </a:rPr>
-              <a:t> de factura. nombre de cliente etc…</a:t>
+              <a:t>Buscar por número de factura. nombre de cliente, proveedor…</a:t>
             </a:r>
             <a:endParaRPr sz="800">
               <a:solidFill>
                 <a:srgbClr val="CCCCCC"/>
               </a:solidFill>
+              <a:latin typeface="Montserrat"/>
+              <a:ea typeface="Montserrat"/>
+              <a:cs typeface="Montserrat"/>
+              <a:sym typeface="Montserrat"/>
             </a:endParaRPr>
           </a:p>
         </p:txBody>
       </p:sp>
       <p:sp>
         <p:nvSpPr>
-          <p:cNvPr id="125" name="Google Shape;125;p19"/>
+          <p:cNvPr id="124" name="Google Shape;124;p19"/>
           <p:cNvSpPr/>
           <p:nvPr/>
         </p:nvSpPr>
@@ -9558,6 +12490,10 @@
                 <a:solidFill>
                   <a:srgbClr val="CCCCCC"/>
                 </a:solidFill>
+                <a:latin typeface="Montserrat"/>
+                <a:ea typeface="Montserrat"/>
+                <a:cs typeface="Montserrat"/>
+                <a:sym typeface="Montserrat"/>
               </a:rPr>
               <a:t>Filtrar por fecha</a:t>
             </a:r>
@@ -9565,13 +12501,17 @@
               <a:solidFill>
                 <a:srgbClr val="CCCCCC"/>
               </a:solidFill>
+              <a:latin typeface="Montserrat"/>
+              <a:ea typeface="Montserrat"/>
+              <a:cs typeface="Montserrat"/>
+              <a:sym typeface="Montserrat"/>
             </a:endParaRPr>
           </a:p>
         </p:txBody>
       </p:sp>
       <p:sp>
         <p:nvSpPr>
-          <p:cNvPr id="126" name="Google Shape;126;p19"/>
+          <p:cNvPr id="125" name="Google Shape;125;p19"/>
           <p:cNvSpPr/>
           <p:nvPr/>
         </p:nvSpPr>
@@ -9618,6 +12558,10 @@
                 <a:solidFill>
                   <a:srgbClr val="CCCCCC"/>
                 </a:solidFill>
+                <a:latin typeface="Montserrat"/>
+                <a:ea typeface="Montserrat"/>
+                <a:cs typeface="Montserrat"/>
+                <a:sym typeface="Montserrat"/>
               </a:rPr>
               <a:t>Más recientes</a:t>
             </a:r>
@@ -9625,13 +12569,17 @@
               <a:solidFill>
                 <a:srgbClr val="CCCCCC"/>
               </a:solidFill>
+              <a:latin typeface="Montserrat"/>
+              <a:ea typeface="Montserrat"/>
+              <a:cs typeface="Montserrat"/>
+              <a:sym typeface="Montserrat"/>
             </a:endParaRPr>
           </a:p>
         </p:txBody>
       </p:sp>
       <p:sp>
         <p:nvSpPr>
-          <p:cNvPr id="127" name="Google Shape;127;p19"/>
+          <p:cNvPr id="126" name="Google Shape;126;p19"/>
           <p:cNvSpPr/>
           <p:nvPr/>
         </p:nvSpPr>
@@ -9678,6 +12626,10 @@
                 <a:solidFill>
                   <a:srgbClr val="CCCCCC"/>
                 </a:solidFill>
+                <a:latin typeface="Montserrat"/>
+                <a:ea typeface="Montserrat"/>
+                <a:cs typeface="Montserrat"/>
+                <a:sym typeface="Montserrat"/>
               </a:rPr>
               <a:t>Más Antiguas</a:t>
             </a:r>
@@ -9685,6 +12637,1255 @@
               <a:solidFill>
                 <a:srgbClr val="CCCCCC"/>
               </a:solidFill>
+              <a:latin typeface="Montserrat"/>
+              <a:ea typeface="Montserrat"/>
+              <a:cs typeface="Montserrat"/>
+              <a:sym typeface="Montserrat"/>
+            </a:endParaRPr>
+          </a:p>
+        </p:txBody>
+      </p:sp>
+      <p:sp>
+        <p:nvSpPr>
+          <p:cNvPr id="127" name="Google Shape;127;p19"/>
+          <p:cNvSpPr txBox="1"/>
+          <p:nvPr/>
+        </p:nvSpPr>
+        <p:spPr>
+          <a:xfrm>
+            <a:off x="4410875" y="607725"/>
+            <a:ext cx="4628700" cy="229800"/>
+          </a:xfrm>
+          <a:prstGeom prst="rect">
+            <a:avLst/>
+          </a:prstGeom>
+          <a:noFill/>
+          <a:ln>
+            <a:noFill/>
+          </a:ln>
+        </p:spPr>
+        <p:txBody>
+          <a:bodyPr anchorCtr="0" anchor="ctr" bIns="91425" lIns="91425" spcFirstLastPara="1" rIns="91425" wrap="square" tIns="91425">
+            <a:noAutofit/>
+          </a:bodyPr>
+          <a:lstStyle/>
+          <a:p>
+            <a:pPr indent="0" lvl="0" marL="0" rtl="0" algn="ctr">
+              <a:spcBef>
+                <a:spcPts val="0"/>
+              </a:spcBef>
+              <a:spcAft>
+                <a:spcPts val="0"/>
+              </a:spcAft>
+              <a:buNone/>
+            </a:pPr>
+            <a:r>
+              <a:rPr lang="es-419" sz="1800">
+                <a:solidFill>
+                  <a:srgbClr val="008629"/>
+                </a:solidFill>
+                <a:latin typeface="Montserrat Black"/>
+                <a:ea typeface="Montserrat Black"/>
+                <a:cs typeface="Montserrat Black"/>
+                <a:sym typeface="Montserrat Black"/>
+              </a:rPr>
+              <a:t>FACTURA </a:t>
+            </a:r>
+            <a:r>
+              <a:rPr lang="es-419" sz="1800">
+                <a:solidFill>
+                  <a:srgbClr val="008629"/>
+                </a:solidFill>
+                <a:latin typeface="Montserrat Black"/>
+                <a:ea typeface="Montserrat Black"/>
+                <a:cs typeface="Montserrat Black"/>
+                <a:sym typeface="Montserrat Black"/>
+              </a:rPr>
+              <a:t>ELECTRÓNICA</a:t>
+            </a:r>
+            <a:endParaRPr sz="1800">
+              <a:solidFill>
+                <a:srgbClr val="008629"/>
+              </a:solidFill>
+              <a:latin typeface="Montserrat Black"/>
+              <a:ea typeface="Montserrat Black"/>
+              <a:cs typeface="Montserrat Black"/>
+              <a:sym typeface="Montserrat Black"/>
+            </a:endParaRPr>
+          </a:p>
+        </p:txBody>
+      </p:sp>
+      <p:sp>
+        <p:nvSpPr>
+          <p:cNvPr id="128" name="Google Shape;128;p19"/>
+          <p:cNvSpPr/>
+          <p:nvPr/>
+        </p:nvSpPr>
+        <p:spPr>
+          <a:xfrm>
+            <a:off x="4562525" y="987925"/>
+            <a:ext cx="4426800" cy="4062600"/>
+          </a:xfrm>
+          <a:prstGeom prst="roundRect">
+            <a:avLst>
+              <a:gd fmla="val 2154" name="adj"/>
+            </a:avLst>
+          </a:prstGeom>
+          <a:solidFill>
+            <a:schemeClr val="lt1"/>
+          </a:solidFill>
+          <a:ln cap="flat" cmpd="sng" w="9525">
+            <a:solidFill>
+              <a:schemeClr val="lt1"/>
+            </a:solidFill>
+            <a:prstDash val="solid"/>
+            <a:round/>
+            <a:headEnd len="sm" w="sm" type="none"/>
+            <a:tailEnd len="sm" w="sm" type="none"/>
+          </a:ln>
+        </p:spPr>
+        <p:txBody>
+          <a:bodyPr anchorCtr="0" anchor="ctr" bIns="91425" lIns="91425" spcFirstLastPara="1" rIns="91425" wrap="square" tIns="91425">
+            <a:noAutofit/>
+          </a:bodyPr>
+          <a:lstStyle/>
+          <a:p>
+            <a:pPr indent="0" lvl="0" marL="0" rtl="0" algn="ctr">
+              <a:spcBef>
+                <a:spcPts val="0"/>
+              </a:spcBef>
+              <a:spcAft>
+                <a:spcPts val="0"/>
+              </a:spcAft>
+              <a:buNone/>
+            </a:pPr>
+            <a:r>
+              <a:t/>
+            </a:r>
+            <a:endParaRPr>
+              <a:solidFill>
+                <a:srgbClr val="274E13"/>
+              </a:solidFill>
+              <a:latin typeface="Montserrat"/>
+              <a:ea typeface="Montserrat"/>
+              <a:cs typeface="Montserrat"/>
+              <a:sym typeface="Montserrat"/>
+            </a:endParaRPr>
+          </a:p>
+        </p:txBody>
+      </p:sp>
+      <p:sp>
+        <p:nvSpPr>
+          <p:cNvPr id="129" name="Google Shape;129;p19"/>
+          <p:cNvSpPr/>
+          <p:nvPr/>
+        </p:nvSpPr>
+        <p:spPr>
+          <a:xfrm>
+            <a:off x="577100" y="1555575"/>
+            <a:ext cx="3426900" cy="401700"/>
+          </a:xfrm>
+          <a:prstGeom prst="roundRect">
+            <a:avLst>
+              <a:gd fmla="val 26475" name="adj"/>
+            </a:avLst>
+          </a:prstGeom>
+          <a:solidFill>
+            <a:srgbClr val="D9EAD3"/>
+          </a:solidFill>
+          <a:ln cap="flat" cmpd="sng" w="9525">
+            <a:solidFill>
+              <a:srgbClr val="D9EAD3"/>
+            </a:solidFill>
+            <a:prstDash val="solid"/>
+            <a:round/>
+            <a:headEnd len="sm" w="sm" type="none"/>
+            <a:tailEnd len="sm" w="sm" type="none"/>
+          </a:ln>
+        </p:spPr>
+        <p:txBody>
+          <a:bodyPr anchorCtr="0" anchor="ctr" bIns="91425" lIns="91425" spcFirstLastPara="1" rIns="91425" wrap="square" tIns="91425">
+            <a:noAutofit/>
+          </a:bodyPr>
+          <a:lstStyle/>
+          <a:p>
+            <a:pPr indent="0" lvl="0" marL="179999" rtl="0" algn="l">
+              <a:spcBef>
+                <a:spcPts val="0"/>
+              </a:spcBef>
+              <a:spcAft>
+                <a:spcPts val="0"/>
+              </a:spcAft>
+              <a:buNone/>
+            </a:pPr>
+            <a:r>
+              <a:rPr lang="es-419" sz="900">
+                <a:solidFill>
+                  <a:srgbClr val="93C47D"/>
+                </a:solidFill>
+                <a:latin typeface="Montserrat"/>
+                <a:ea typeface="Montserrat"/>
+                <a:cs typeface="Montserrat"/>
+                <a:sym typeface="Montserrat"/>
+              </a:rPr>
+              <a:t>Razón</a:t>
+            </a:r>
+            <a:r>
+              <a:rPr lang="es-419" sz="900">
+                <a:solidFill>
+                  <a:srgbClr val="93C47D"/>
+                </a:solidFill>
+                <a:latin typeface="Montserrat"/>
+                <a:ea typeface="Montserrat"/>
+                <a:cs typeface="Montserrat"/>
+                <a:sym typeface="Montserrat"/>
+              </a:rPr>
+              <a:t> social</a:t>
+            </a:r>
+            <a:endParaRPr sz="900">
+              <a:solidFill>
+                <a:srgbClr val="93C47D"/>
+              </a:solidFill>
+              <a:latin typeface="Montserrat"/>
+              <a:ea typeface="Montserrat"/>
+              <a:cs typeface="Montserrat"/>
+              <a:sym typeface="Montserrat"/>
+            </a:endParaRPr>
+          </a:p>
+        </p:txBody>
+      </p:sp>
+      <p:sp>
+        <p:nvSpPr>
+          <p:cNvPr id="130" name="Google Shape;130;p19"/>
+          <p:cNvSpPr txBox="1"/>
+          <p:nvPr/>
+        </p:nvSpPr>
+        <p:spPr>
+          <a:xfrm>
+            <a:off x="1512825" y="1180275"/>
+            <a:ext cx="1427100" cy="229800"/>
+          </a:xfrm>
+          <a:prstGeom prst="rect">
+            <a:avLst/>
+          </a:prstGeom>
+          <a:noFill/>
+          <a:ln>
+            <a:noFill/>
+          </a:ln>
+        </p:spPr>
+        <p:txBody>
+          <a:bodyPr anchorCtr="0" anchor="ctr" bIns="91425" lIns="91425" spcFirstLastPara="1" rIns="91425" wrap="square" tIns="91425">
+            <a:noAutofit/>
+          </a:bodyPr>
+          <a:lstStyle/>
+          <a:p>
+            <a:pPr indent="0" lvl="0" marL="0" rtl="0" algn="ctr">
+              <a:spcBef>
+                <a:spcPts val="0"/>
+              </a:spcBef>
+              <a:spcAft>
+                <a:spcPts val="0"/>
+              </a:spcAft>
+              <a:buNone/>
+            </a:pPr>
+            <a:r>
+              <a:rPr lang="es-419">
+                <a:solidFill>
+                  <a:srgbClr val="008629"/>
+                </a:solidFill>
+                <a:latin typeface="Montserrat Black"/>
+                <a:ea typeface="Montserrat Black"/>
+                <a:cs typeface="Montserrat Black"/>
+                <a:sym typeface="Montserrat Black"/>
+              </a:rPr>
+              <a:t>EMPRESA</a:t>
+            </a:r>
+            <a:endParaRPr>
+              <a:solidFill>
+                <a:srgbClr val="008629"/>
+              </a:solidFill>
+              <a:latin typeface="Montserrat Black"/>
+              <a:ea typeface="Montserrat Black"/>
+              <a:cs typeface="Montserrat Black"/>
+              <a:sym typeface="Montserrat Black"/>
+            </a:endParaRPr>
+          </a:p>
+        </p:txBody>
+      </p:sp>
+      <p:sp>
+        <p:nvSpPr>
+          <p:cNvPr id="131" name="Google Shape;131;p19"/>
+          <p:cNvSpPr txBox="1"/>
+          <p:nvPr/>
+        </p:nvSpPr>
+        <p:spPr>
+          <a:xfrm>
+            <a:off x="6062375" y="1180275"/>
+            <a:ext cx="1427100" cy="229800"/>
+          </a:xfrm>
+          <a:prstGeom prst="rect">
+            <a:avLst/>
+          </a:prstGeom>
+          <a:noFill/>
+          <a:ln>
+            <a:noFill/>
+          </a:ln>
+        </p:spPr>
+        <p:txBody>
+          <a:bodyPr anchorCtr="0" anchor="ctr" bIns="91425" lIns="91425" spcFirstLastPara="1" rIns="91425" wrap="square" tIns="91425">
+            <a:noAutofit/>
+          </a:bodyPr>
+          <a:lstStyle/>
+          <a:p>
+            <a:pPr indent="0" lvl="0" marL="0" rtl="0" algn="ctr">
+              <a:spcBef>
+                <a:spcPts val="0"/>
+              </a:spcBef>
+              <a:spcAft>
+                <a:spcPts val="0"/>
+              </a:spcAft>
+              <a:buNone/>
+            </a:pPr>
+            <a:r>
+              <a:rPr lang="es-419">
+                <a:solidFill>
+                  <a:srgbClr val="008629"/>
+                </a:solidFill>
+                <a:latin typeface="Montserrat Black"/>
+                <a:ea typeface="Montserrat Black"/>
+                <a:cs typeface="Montserrat Black"/>
+                <a:sym typeface="Montserrat Black"/>
+              </a:rPr>
+              <a:t>CLIENTE</a:t>
+            </a:r>
+            <a:endParaRPr>
+              <a:solidFill>
+                <a:srgbClr val="008629"/>
+              </a:solidFill>
+              <a:latin typeface="Montserrat Black"/>
+              <a:ea typeface="Montserrat Black"/>
+              <a:cs typeface="Montserrat Black"/>
+              <a:sym typeface="Montserrat Black"/>
+            </a:endParaRPr>
+          </a:p>
+        </p:txBody>
+      </p:sp>
+      <p:sp>
+        <p:nvSpPr>
+          <p:cNvPr id="132" name="Google Shape;132;p19"/>
+          <p:cNvSpPr/>
+          <p:nvPr/>
+        </p:nvSpPr>
+        <p:spPr>
+          <a:xfrm>
+            <a:off x="577100" y="2017317"/>
+            <a:ext cx="3426900" cy="401700"/>
+          </a:xfrm>
+          <a:prstGeom prst="roundRect">
+            <a:avLst>
+              <a:gd fmla="val 26475" name="adj"/>
+            </a:avLst>
+          </a:prstGeom>
+          <a:solidFill>
+            <a:srgbClr val="D9EAD3"/>
+          </a:solidFill>
+          <a:ln cap="flat" cmpd="sng" w="9525">
+            <a:solidFill>
+              <a:srgbClr val="D9EAD3"/>
+            </a:solidFill>
+            <a:prstDash val="solid"/>
+            <a:round/>
+            <a:headEnd len="sm" w="sm" type="none"/>
+            <a:tailEnd len="sm" w="sm" type="none"/>
+          </a:ln>
+        </p:spPr>
+        <p:txBody>
+          <a:bodyPr anchorCtr="0" anchor="ctr" bIns="91425" lIns="91425" spcFirstLastPara="1" rIns="91425" wrap="square" tIns="91425">
+            <a:noAutofit/>
+          </a:bodyPr>
+          <a:lstStyle/>
+          <a:p>
+            <a:pPr indent="0" lvl="0" marL="179999" rtl="0" algn="l">
+              <a:spcBef>
+                <a:spcPts val="0"/>
+              </a:spcBef>
+              <a:spcAft>
+                <a:spcPts val="0"/>
+              </a:spcAft>
+              <a:buNone/>
+            </a:pPr>
+            <a:r>
+              <a:rPr lang="es-419" sz="900">
+                <a:solidFill>
+                  <a:srgbClr val="93C47D"/>
+                </a:solidFill>
+                <a:latin typeface="Montserrat"/>
+                <a:ea typeface="Montserrat"/>
+                <a:cs typeface="Montserrat"/>
+                <a:sym typeface="Montserrat"/>
+              </a:rPr>
+              <a:t>NIT</a:t>
+            </a:r>
+            <a:endParaRPr sz="900">
+              <a:solidFill>
+                <a:srgbClr val="93C47D"/>
+              </a:solidFill>
+              <a:latin typeface="Montserrat"/>
+              <a:ea typeface="Montserrat"/>
+              <a:cs typeface="Montserrat"/>
+              <a:sym typeface="Montserrat"/>
+            </a:endParaRPr>
+          </a:p>
+        </p:txBody>
+      </p:sp>
+      <p:sp>
+        <p:nvSpPr>
+          <p:cNvPr id="133" name="Google Shape;133;p19"/>
+          <p:cNvSpPr/>
+          <p:nvPr/>
+        </p:nvSpPr>
+        <p:spPr>
+          <a:xfrm>
+            <a:off x="577100" y="2479075"/>
+            <a:ext cx="3426900" cy="401700"/>
+          </a:xfrm>
+          <a:prstGeom prst="roundRect">
+            <a:avLst>
+              <a:gd fmla="val 26475" name="adj"/>
+            </a:avLst>
+          </a:prstGeom>
+          <a:solidFill>
+            <a:srgbClr val="D9EAD3"/>
+          </a:solidFill>
+          <a:ln cap="flat" cmpd="sng" w="9525">
+            <a:solidFill>
+              <a:srgbClr val="D9EAD3"/>
+            </a:solidFill>
+            <a:prstDash val="solid"/>
+            <a:round/>
+            <a:headEnd len="sm" w="sm" type="none"/>
+            <a:tailEnd len="sm" w="sm" type="none"/>
+          </a:ln>
+        </p:spPr>
+        <p:txBody>
+          <a:bodyPr anchorCtr="0" anchor="ctr" bIns="91425" lIns="91425" spcFirstLastPara="1" rIns="91425" wrap="square" tIns="91425">
+            <a:noAutofit/>
+          </a:bodyPr>
+          <a:lstStyle/>
+          <a:p>
+            <a:pPr indent="0" lvl="0" marL="179999" rtl="0" algn="l">
+              <a:spcBef>
+                <a:spcPts val="0"/>
+              </a:spcBef>
+              <a:spcAft>
+                <a:spcPts val="0"/>
+              </a:spcAft>
+              <a:buNone/>
+            </a:pPr>
+            <a:r>
+              <a:rPr lang="es-419" sz="900">
+                <a:solidFill>
+                  <a:srgbClr val="93C47D"/>
+                </a:solidFill>
+                <a:latin typeface="Montserrat"/>
+                <a:ea typeface="Montserrat"/>
+                <a:cs typeface="Montserrat"/>
+                <a:sym typeface="Montserrat"/>
+              </a:rPr>
+              <a:t>Régimen</a:t>
+            </a:r>
+            <a:r>
+              <a:rPr lang="es-419" sz="900">
+                <a:solidFill>
+                  <a:srgbClr val="93C47D"/>
+                </a:solidFill>
+                <a:latin typeface="Montserrat"/>
+                <a:ea typeface="Montserrat"/>
+                <a:cs typeface="Montserrat"/>
+                <a:sym typeface="Montserrat"/>
+              </a:rPr>
+              <a:t> Contable</a:t>
+            </a:r>
+            <a:endParaRPr sz="900">
+              <a:solidFill>
+                <a:srgbClr val="93C47D"/>
+              </a:solidFill>
+              <a:latin typeface="Montserrat"/>
+              <a:ea typeface="Montserrat"/>
+              <a:cs typeface="Montserrat"/>
+              <a:sym typeface="Montserrat"/>
+            </a:endParaRPr>
+          </a:p>
+        </p:txBody>
+      </p:sp>
+      <p:sp>
+        <p:nvSpPr>
+          <p:cNvPr id="134" name="Google Shape;134;p19"/>
+          <p:cNvSpPr/>
+          <p:nvPr/>
+        </p:nvSpPr>
+        <p:spPr>
+          <a:xfrm>
+            <a:off x="577100" y="2940825"/>
+            <a:ext cx="3426900" cy="401700"/>
+          </a:xfrm>
+          <a:prstGeom prst="roundRect">
+            <a:avLst>
+              <a:gd fmla="val 26475" name="adj"/>
+            </a:avLst>
+          </a:prstGeom>
+          <a:solidFill>
+            <a:srgbClr val="D9EAD3"/>
+          </a:solidFill>
+          <a:ln cap="flat" cmpd="sng" w="9525">
+            <a:solidFill>
+              <a:srgbClr val="D9EAD3"/>
+            </a:solidFill>
+            <a:prstDash val="solid"/>
+            <a:round/>
+            <a:headEnd len="sm" w="sm" type="none"/>
+            <a:tailEnd len="sm" w="sm" type="none"/>
+          </a:ln>
+        </p:spPr>
+        <p:txBody>
+          <a:bodyPr anchorCtr="0" anchor="ctr" bIns="91425" lIns="91425" spcFirstLastPara="1" rIns="91425" wrap="square" tIns="91425">
+            <a:noAutofit/>
+          </a:bodyPr>
+          <a:lstStyle/>
+          <a:p>
+            <a:pPr indent="0" lvl="0" marL="179999" rtl="0" algn="l">
+              <a:spcBef>
+                <a:spcPts val="0"/>
+              </a:spcBef>
+              <a:spcAft>
+                <a:spcPts val="0"/>
+              </a:spcAft>
+              <a:buNone/>
+            </a:pPr>
+            <a:r>
+              <a:rPr lang="es-419" sz="900">
+                <a:solidFill>
+                  <a:srgbClr val="93C47D"/>
+                </a:solidFill>
+                <a:latin typeface="Montserrat"/>
+                <a:ea typeface="Montserrat"/>
+                <a:cs typeface="Montserrat"/>
+                <a:sym typeface="Montserrat"/>
+              </a:rPr>
+              <a:t>Dirección</a:t>
+            </a:r>
+            <a:endParaRPr sz="900">
+              <a:solidFill>
+                <a:srgbClr val="93C47D"/>
+              </a:solidFill>
+              <a:latin typeface="Montserrat"/>
+              <a:ea typeface="Montserrat"/>
+              <a:cs typeface="Montserrat"/>
+              <a:sym typeface="Montserrat"/>
+            </a:endParaRPr>
+          </a:p>
+        </p:txBody>
+      </p:sp>
+      <p:sp>
+        <p:nvSpPr>
+          <p:cNvPr id="135" name="Google Shape;135;p19"/>
+          <p:cNvSpPr/>
+          <p:nvPr/>
+        </p:nvSpPr>
+        <p:spPr>
+          <a:xfrm>
+            <a:off x="577100" y="3402575"/>
+            <a:ext cx="3426900" cy="401700"/>
+          </a:xfrm>
+          <a:prstGeom prst="roundRect">
+            <a:avLst>
+              <a:gd fmla="val 26475" name="adj"/>
+            </a:avLst>
+          </a:prstGeom>
+          <a:solidFill>
+            <a:srgbClr val="D9EAD3"/>
+          </a:solidFill>
+          <a:ln cap="flat" cmpd="sng" w="9525">
+            <a:solidFill>
+              <a:srgbClr val="D9EAD3"/>
+            </a:solidFill>
+            <a:prstDash val="solid"/>
+            <a:round/>
+            <a:headEnd len="sm" w="sm" type="none"/>
+            <a:tailEnd len="sm" w="sm" type="none"/>
+          </a:ln>
+        </p:spPr>
+        <p:txBody>
+          <a:bodyPr anchorCtr="0" anchor="ctr" bIns="91425" lIns="91425" spcFirstLastPara="1" rIns="91425" wrap="square" tIns="91425">
+            <a:noAutofit/>
+          </a:bodyPr>
+          <a:lstStyle/>
+          <a:p>
+            <a:pPr indent="0" lvl="0" marL="179999" rtl="0" algn="l">
+              <a:spcBef>
+                <a:spcPts val="0"/>
+              </a:spcBef>
+              <a:spcAft>
+                <a:spcPts val="0"/>
+              </a:spcAft>
+              <a:buNone/>
+            </a:pPr>
+            <a:r>
+              <a:rPr lang="es-419" sz="900">
+                <a:solidFill>
+                  <a:srgbClr val="93C47D"/>
+                </a:solidFill>
+                <a:latin typeface="Montserrat"/>
+                <a:ea typeface="Montserrat"/>
+                <a:cs typeface="Montserrat"/>
+                <a:sym typeface="Montserrat"/>
+              </a:rPr>
+              <a:t>Ciudad</a:t>
+            </a:r>
+            <a:endParaRPr sz="900">
+              <a:solidFill>
+                <a:srgbClr val="93C47D"/>
+              </a:solidFill>
+              <a:latin typeface="Montserrat"/>
+              <a:ea typeface="Montserrat"/>
+              <a:cs typeface="Montserrat"/>
+              <a:sym typeface="Montserrat"/>
+            </a:endParaRPr>
+          </a:p>
+        </p:txBody>
+      </p:sp>
+      <p:sp>
+        <p:nvSpPr>
+          <p:cNvPr id="136" name="Google Shape;136;p19"/>
+          <p:cNvSpPr/>
+          <p:nvPr/>
+        </p:nvSpPr>
+        <p:spPr>
+          <a:xfrm>
+            <a:off x="577100" y="3864325"/>
+            <a:ext cx="3426900" cy="401700"/>
+          </a:xfrm>
+          <a:prstGeom prst="roundRect">
+            <a:avLst>
+              <a:gd fmla="val 26475" name="adj"/>
+            </a:avLst>
+          </a:prstGeom>
+          <a:solidFill>
+            <a:srgbClr val="D9EAD3"/>
+          </a:solidFill>
+          <a:ln cap="flat" cmpd="sng" w="9525">
+            <a:solidFill>
+              <a:srgbClr val="D9EAD3"/>
+            </a:solidFill>
+            <a:prstDash val="solid"/>
+            <a:round/>
+            <a:headEnd len="sm" w="sm" type="none"/>
+            <a:tailEnd len="sm" w="sm" type="none"/>
+          </a:ln>
+        </p:spPr>
+        <p:txBody>
+          <a:bodyPr anchorCtr="0" anchor="ctr" bIns="91425" lIns="91425" spcFirstLastPara="1" rIns="91425" wrap="square" tIns="91425">
+            <a:noAutofit/>
+          </a:bodyPr>
+          <a:lstStyle/>
+          <a:p>
+            <a:pPr indent="0" lvl="0" marL="179999" rtl="0" algn="l">
+              <a:spcBef>
+                <a:spcPts val="0"/>
+              </a:spcBef>
+              <a:spcAft>
+                <a:spcPts val="0"/>
+              </a:spcAft>
+              <a:buNone/>
+            </a:pPr>
+            <a:r>
+              <a:rPr lang="es-419" sz="900">
+                <a:solidFill>
+                  <a:srgbClr val="93C47D"/>
+                </a:solidFill>
+                <a:latin typeface="Montserrat"/>
+                <a:ea typeface="Montserrat"/>
+                <a:cs typeface="Montserrat"/>
+                <a:sym typeface="Montserrat"/>
+              </a:rPr>
+              <a:t>Resolución de facturación</a:t>
+            </a:r>
+            <a:endParaRPr sz="900">
+              <a:solidFill>
+                <a:srgbClr val="93C47D"/>
+              </a:solidFill>
+              <a:latin typeface="Montserrat"/>
+              <a:ea typeface="Montserrat"/>
+              <a:cs typeface="Montserrat"/>
+              <a:sym typeface="Montserrat"/>
+            </a:endParaRPr>
+          </a:p>
+        </p:txBody>
+      </p:sp>
+      <p:sp>
+        <p:nvSpPr>
+          <p:cNvPr id="137" name="Google Shape;137;p19"/>
+          <p:cNvSpPr/>
+          <p:nvPr/>
+        </p:nvSpPr>
+        <p:spPr>
+          <a:xfrm>
+            <a:off x="1279268" y="4454950"/>
+            <a:ext cx="1894200" cy="401700"/>
+          </a:xfrm>
+          <a:prstGeom prst="roundRect">
+            <a:avLst>
+              <a:gd fmla="val 26475" name="adj"/>
+            </a:avLst>
+          </a:prstGeom>
+          <a:solidFill>
+            <a:srgbClr val="188038"/>
+          </a:solidFill>
+          <a:ln cap="flat" cmpd="sng" w="9525">
+            <a:solidFill>
+              <a:srgbClr val="188038"/>
+            </a:solidFill>
+            <a:prstDash val="solid"/>
+            <a:round/>
+            <a:headEnd len="sm" w="sm" type="none"/>
+            <a:tailEnd len="sm" w="sm" type="none"/>
+          </a:ln>
+        </p:spPr>
+        <p:txBody>
+          <a:bodyPr anchorCtr="0" anchor="ctr" bIns="91425" lIns="91425" spcFirstLastPara="1" rIns="91425" wrap="square" tIns="91425">
+            <a:noAutofit/>
+          </a:bodyPr>
+          <a:lstStyle/>
+          <a:p>
+            <a:pPr indent="0" lvl="0" marL="0" rtl="0" algn="ctr">
+              <a:spcBef>
+                <a:spcPts val="0"/>
+              </a:spcBef>
+              <a:spcAft>
+                <a:spcPts val="0"/>
+              </a:spcAft>
+              <a:buNone/>
+            </a:pPr>
+            <a:r>
+              <a:rPr b="1" lang="es-419" sz="1100">
+                <a:solidFill>
+                  <a:schemeClr val="lt1"/>
+                </a:solidFill>
+                <a:latin typeface="Montserrat"/>
+                <a:ea typeface="Montserrat"/>
+                <a:cs typeface="Montserrat"/>
+                <a:sym typeface="Montserrat"/>
+              </a:rPr>
+              <a:t>GENERAR </a:t>
+            </a:r>
+            <a:endParaRPr b="1" sz="1100">
+              <a:solidFill>
+                <a:schemeClr val="lt1"/>
+              </a:solidFill>
+              <a:latin typeface="Montserrat"/>
+              <a:ea typeface="Montserrat"/>
+              <a:cs typeface="Montserrat"/>
+              <a:sym typeface="Montserrat"/>
+            </a:endParaRPr>
+          </a:p>
+        </p:txBody>
+      </p:sp>
+      <p:sp>
+        <p:nvSpPr>
+          <p:cNvPr id="138" name="Google Shape;138;p19"/>
+          <p:cNvSpPr/>
+          <p:nvPr/>
+        </p:nvSpPr>
+        <p:spPr>
+          <a:xfrm>
+            <a:off x="5062475" y="1555575"/>
+            <a:ext cx="3426900" cy="401700"/>
+          </a:xfrm>
+          <a:prstGeom prst="roundRect">
+            <a:avLst>
+              <a:gd fmla="val 26475" name="adj"/>
+            </a:avLst>
+          </a:prstGeom>
+          <a:solidFill>
+            <a:srgbClr val="D9EAD3"/>
+          </a:solidFill>
+          <a:ln cap="flat" cmpd="sng" w="9525">
+            <a:solidFill>
+              <a:srgbClr val="D9EAD3"/>
+            </a:solidFill>
+            <a:prstDash val="solid"/>
+            <a:round/>
+            <a:headEnd len="sm" w="sm" type="none"/>
+            <a:tailEnd len="sm" w="sm" type="none"/>
+          </a:ln>
+        </p:spPr>
+        <p:txBody>
+          <a:bodyPr anchorCtr="0" anchor="ctr" bIns="91425" lIns="91425" spcFirstLastPara="1" rIns="91425" wrap="square" tIns="91425">
+            <a:noAutofit/>
+          </a:bodyPr>
+          <a:lstStyle/>
+          <a:p>
+            <a:pPr indent="0" lvl="0" marL="179999" rtl="0" algn="l">
+              <a:spcBef>
+                <a:spcPts val="0"/>
+              </a:spcBef>
+              <a:spcAft>
+                <a:spcPts val="0"/>
+              </a:spcAft>
+              <a:buNone/>
+            </a:pPr>
+            <a:r>
+              <a:rPr lang="es-419" sz="900">
+                <a:solidFill>
+                  <a:srgbClr val="93C47D"/>
+                </a:solidFill>
+                <a:latin typeface="Montserrat"/>
+                <a:ea typeface="Montserrat"/>
+                <a:cs typeface="Montserrat"/>
+                <a:sym typeface="Montserrat"/>
+              </a:rPr>
+              <a:t>Nombre o </a:t>
+            </a:r>
+            <a:r>
+              <a:rPr lang="es-419" sz="900">
+                <a:solidFill>
+                  <a:srgbClr val="93C47D"/>
+                </a:solidFill>
+                <a:latin typeface="Montserrat"/>
+                <a:ea typeface="Montserrat"/>
+                <a:cs typeface="Montserrat"/>
+                <a:sym typeface="Montserrat"/>
+              </a:rPr>
+              <a:t>Razón social</a:t>
+            </a:r>
+            <a:endParaRPr sz="900">
+              <a:solidFill>
+                <a:srgbClr val="93C47D"/>
+              </a:solidFill>
+              <a:latin typeface="Montserrat"/>
+              <a:ea typeface="Montserrat"/>
+              <a:cs typeface="Montserrat"/>
+              <a:sym typeface="Montserrat"/>
+            </a:endParaRPr>
+          </a:p>
+        </p:txBody>
+      </p:sp>
+      <p:sp>
+        <p:nvSpPr>
+          <p:cNvPr id="139" name="Google Shape;139;p19"/>
+          <p:cNvSpPr/>
+          <p:nvPr/>
+        </p:nvSpPr>
+        <p:spPr>
+          <a:xfrm>
+            <a:off x="5062475" y="2017317"/>
+            <a:ext cx="3426900" cy="401700"/>
+          </a:xfrm>
+          <a:prstGeom prst="roundRect">
+            <a:avLst>
+              <a:gd fmla="val 26475" name="adj"/>
+            </a:avLst>
+          </a:prstGeom>
+          <a:solidFill>
+            <a:srgbClr val="D9EAD3"/>
+          </a:solidFill>
+          <a:ln cap="flat" cmpd="sng" w="9525">
+            <a:solidFill>
+              <a:srgbClr val="D9EAD3"/>
+            </a:solidFill>
+            <a:prstDash val="solid"/>
+            <a:round/>
+            <a:headEnd len="sm" w="sm" type="none"/>
+            <a:tailEnd len="sm" w="sm" type="none"/>
+          </a:ln>
+        </p:spPr>
+        <p:txBody>
+          <a:bodyPr anchorCtr="0" anchor="ctr" bIns="91425" lIns="91425" spcFirstLastPara="1" rIns="91425" wrap="square" tIns="91425">
+            <a:noAutofit/>
+          </a:bodyPr>
+          <a:lstStyle/>
+          <a:p>
+            <a:pPr indent="0" lvl="0" marL="179999" rtl="0" algn="l">
+              <a:spcBef>
+                <a:spcPts val="0"/>
+              </a:spcBef>
+              <a:spcAft>
+                <a:spcPts val="0"/>
+              </a:spcAft>
+              <a:buNone/>
+            </a:pPr>
+            <a:r>
+              <a:rPr lang="es-419" sz="900">
+                <a:solidFill>
+                  <a:srgbClr val="93C47D"/>
+                </a:solidFill>
+                <a:latin typeface="Montserrat"/>
+                <a:ea typeface="Montserrat"/>
+                <a:cs typeface="Montserrat"/>
+                <a:sym typeface="Montserrat"/>
+              </a:rPr>
+              <a:t>Tipo de identificación</a:t>
+            </a:r>
+            <a:endParaRPr sz="900">
+              <a:solidFill>
+                <a:srgbClr val="93C47D"/>
+              </a:solidFill>
+              <a:latin typeface="Montserrat"/>
+              <a:ea typeface="Montserrat"/>
+              <a:cs typeface="Montserrat"/>
+              <a:sym typeface="Montserrat"/>
+            </a:endParaRPr>
+          </a:p>
+        </p:txBody>
+      </p:sp>
+      <p:sp>
+        <p:nvSpPr>
+          <p:cNvPr id="140" name="Google Shape;140;p19"/>
+          <p:cNvSpPr/>
+          <p:nvPr/>
+        </p:nvSpPr>
+        <p:spPr>
+          <a:xfrm>
+            <a:off x="5062475" y="2479075"/>
+            <a:ext cx="3426900" cy="401700"/>
+          </a:xfrm>
+          <a:prstGeom prst="roundRect">
+            <a:avLst>
+              <a:gd fmla="val 26475" name="adj"/>
+            </a:avLst>
+          </a:prstGeom>
+          <a:solidFill>
+            <a:srgbClr val="D9EAD3"/>
+          </a:solidFill>
+          <a:ln cap="flat" cmpd="sng" w="9525">
+            <a:solidFill>
+              <a:srgbClr val="D9EAD3"/>
+            </a:solidFill>
+            <a:prstDash val="solid"/>
+            <a:round/>
+            <a:headEnd len="sm" w="sm" type="none"/>
+            <a:tailEnd len="sm" w="sm" type="none"/>
+          </a:ln>
+        </p:spPr>
+        <p:txBody>
+          <a:bodyPr anchorCtr="0" anchor="ctr" bIns="91425" lIns="91425" spcFirstLastPara="1" rIns="91425" wrap="square" tIns="91425">
+            <a:noAutofit/>
+          </a:bodyPr>
+          <a:lstStyle/>
+          <a:p>
+            <a:pPr indent="0" lvl="0" marL="179999" rtl="0" algn="l">
+              <a:spcBef>
+                <a:spcPts val="0"/>
+              </a:spcBef>
+              <a:spcAft>
+                <a:spcPts val="0"/>
+              </a:spcAft>
+              <a:buNone/>
+            </a:pPr>
+            <a:r>
+              <a:rPr lang="es-419" sz="900">
+                <a:solidFill>
+                  <a:srgbClr val="93C47D"/>
+                </a:solidFill>
+                <a:latin typeface="Montserrat"/>
+                <a:ea typeface="Montserrat"/>
+                <a:cs typeface="Montserrat"/>
+                <a:sym typeface="Montserrat"/>
+              </a:rPr>
+              <a:t>Número de identificación</a:t>
+            </a:r>
+            <a:endParaRPr sz="900">
+              <a:solidFill>
+                <a:srgbClr val="93C47D"/>
+              </a:solidFill>
+              <a:latin typeface="Montserrat"/>
+              <a:ea typeface="Montserrat"/>
+              <a:cs typeface="Montserrat"/>
+              <a:sym typeface="Montserrat"/>
+            </a:endParaRPr>
+          </a:p>
+        </p:txBody>
+      </p:sp>
+      <p:sp>
+        <p:nvSpPr>
+          <p:cNvPr id="141" name="Google Shape;141;p19"/>
+          <p:cNvSpPr/>
+          <p:nvPr/>
+        </p:nvSpPr>
+        <p:spPr>
+          <a:xfrm>
+            <a:off x="5062475" y="2940825"/>
+            <a:ext cx="3426900" cy="401700"/>
+          </a:xfrm>
+          <a:prstGeom prst="roundRect">
+            <a:avLst>
+              <a:gd fmla="val 26475" name="adj"/>
+            </a:avLst>
+          </a:prstGeom>
+          <a:solidFill>
+            <a:srgbClr val="D9EAD3"/>
+          </a:solidFill>
+          <a:ln cap="flat" cmpd="sng" w="9525">
+            <a:solidFill>
+              <a:srgbClr val="D9EAD3"/>
+            </a:solidFill>
+            <a:prstDash val="solid"/>
+            <a:round/>
+            <a:headEnd len="sm" w="sm" type="none"/>
+            <a:tailEnd len="sm" w="sm" type="none"/>
+          </a:ln>
+        </p:spPr>
+        <p:txBody>
+          <a:bodyPr anchorCtr="0" anchor="ctr" bIns="91425" lIns="91425" spcFirstLastPara="1" rIns="91425" wrap="square" tIns="91425">
+            <a:noAutofit/>
+          </a:bodyPr>
+          <a:lstStyle/>
+          <a:p>
+            <a:pPr indent="0" lvl="0" marL="179999" rtl="0" algn="l">
+              <a:spcBef>
+                <a:spcPts val="0"/>
+              </a:spcBef>
+              <a:spcAft>
+                <a:spcPts val="0"/>
+              </a:spcAft>
+              <a:buNone/>
+            </a:pPr>
+            <a:r>
+              <a:rPr lang="es-419" sz="900">
+                <a:solidFill>
+                  <a:srgbClr val="93C47D"/>
+                </a:solidFill>
+                <a:latin typeface="Montserrat"/>
+                <a:ea typeface="Montserrat"/>
+                <a:cs typeface="Montserrat"/>
+                <a:sym typeface="Montserrat"/>
+              </a:rPr>
+              <a:t>Correo </a:t>
+            </a:r>
+            <a:r>
+              <a:rPr lang="es-419" sz="900">
+                <a:solidFill>
+                  <a:srgbClr val="93C47D"/>
+                </a:solidFill>
+                <a:latin typeface="Montserrat"/>
+                <a:ea typeface="Montserrat"/>
+                <a:cs typeface="Montserrat"/>
+                <a:sym typeface="Montserrat"/>
+              </a:rPr>
+              <a:t>electrónico</a:t>
+            </a:r>
+            <a:endParaRPr sz="900">
+              <a:solidFill>
+                <a:srgbClr val="93C47D"/>
+              </a:solidFill>
+              <a:latin typeface="Montserrat"/>
+              <a:ea typeface="Montserrat"/>
+              <a:cs typeface="Montserrat"/>
+              <a:sym typeface="Montserrat"/>
+            </a:endParaRPr>
+          </a:p>
+        </p:txBody>
+      </p:sp>
+      <p:sp>
+        <p:nvSpPr>
+          <p:cNvPr id="142" name="Google Shape;142;p19"/>
+          <p:cNvSpPr/>
+          <p:nvPr/>
+        </p:nvSpPr>
+        <p:spPr>
+          <a:xfrm>
+            <a:off x="5062475" y="3402575"/>
+            <a:ext cx="3426900" cy="401700"/>
+          </a:xfrm>
+          <a:prstGeom prst="roundRect">
+            <a:avLst>
+              <a:gd fmla="val 26475" name="adj"/>
+            </a:avLst>
+          </a:prstGeom>
+          <a:solidFill>
+            <a:srgbClr val="D9EAD3"/>
+          </a:solidFill>
+          <a:ln cap="flat" cmpd="sng" w="9525">
+            <a:solidFill>
+              <a:srgbClr val="D9EAD3"/>
+            </a:solidFill>
+            <a:prstDash val="solid"/>
+            <a:round/>
+            <a:headEnd len="sm" w="sm" type="none"/>
+            <a:tailEnd len="sm" w="sm" type="none"/>
+          </a:ln>
+        </p:spPr>
+        <p:txBody>
+          <a:bodyPr anchorCtr="0" anchor="ctr" bIns="91425" lIns="91425" spcFirstLastPara="1" rIns="91425" wrap="square" tIns="91425">
+            <a:noAutofit/>
+          </a:bodyPr>
+          <a:lstStyle/>
+          <a:p>
+            <a:pPr indent="0" lvl="0" marL="179999" rtl="0" algn="l">
+              <a:spcBef>
+                <a:spcPts val="0"/>
+              </a:spcBef>
+              <a:spcAft>
+                <a:spcPts val="0"/>
+              </a:spcAft>
+              <a:buNone/>
+            </a:pPr>
+            <a:r>
+              <a:rPr lang="es-419" sz="900">
+                <a:solidFill>
+                  <a:srgbClr val="93C47D"/>
+                </a:solidFill>
+                <a:latin typeface="Montserrat"/>
+                <a:ea typeface="Montserrat"/>
+                <a:cs typeface="Montserrat"/>
+                <a:sym typeface="Montserrat"/>
+              </a:rPr>
+              <a:t>Ciudad</a:t>
+            </a:r>
+            <a:endParaRPr sz="900">
+              <a:solidFill>
+                <a:srgbClr val="93C47D"/>
+              </a:solidFill>
+              <a:latin typeface="Montserrat"/>
+              <a:ea typeface="Montserrat"/>
+              <a:cs typeface="Montserrat"/>
+              <a:sym typeface="Montserrat"/>
+            </a:endParaRPr>
+          </a:p>
+        </p:txBody>
+      </p:sp>
+      <p:sp>
+        <p:nvSpPr>
+          <p:cNvPr id="143" name="Google Shape;143;p19"/>
+          <p:cNvSpPr/>
+          <p:nvPr/>
+        </p:nvSpPr>
+        <p:spPr>
+          <a:xfrm>
+            <a:off x="5062475" y="3864325"/>
+            <a:ext cx="3426900" cy="401700"/>
+          </a:xfrm>
+          <a:prstGeom prst="roundRect">
+            <a:avLst>
+              <a:gd fmla="val 26475" name="adj"/>
+            </a:avLst>
+          </a:prstGeom>
+          <a:solidFill>
+            <a:srgbClr val="D9EAD3"/>
+          </a:solidFill>
+          <a:ln cap="flat" cmpd="sng" w="9525">
+            <a:solidFill>
+              <a:srgbClr val="D9EAD3"/>
+            </a:solidFill>
+            <a:prstDash val="solid"/>
+            <a:round/>
+            <a:headEnd len="sm" w="sm" type="none"/>
+            <a:tailEnd len="sm" w="sm" type="none"/>
+          </a:ln>
+        </p:spPr>
+        <p:txBody>
+          <a:bodyPr anchorCtr="0" anchor="ctr" bIns="91425" lIns="91425" spcFirstLastPara="1" rIns="91425" wrap="square" tIns="91425">
+            <a:noAutofit/>
+          </a:bodyPr>
+          <a:lstStyle/>
+          <a:p>
+            <a:pPr indent="0" lvl="0" marL="179999" rtl="0" algn="l">
+              <a:spcBef>
+                <a:spcPts val="0"/>
+              </a:spcBef>
+              <a:spcAft>
+                <a:spcPts val="0"/>
+              </a:spcAft>
+              <a:buNone/>
+            </a:pPr>
+            <a:r>
+              <a:rPr lang="es-419" sz="900">
+                <a:solidFill>
+                  <a:srgbClr val="93C47D"/>
+                </a:solidFill>
+                <a:latin typeface="Montserrat"/>
+                <a:ea typeface="Montserrat"/>
+                <a:cs typeface="Montserrat"/>
+                <a:sym typeface="Montserrat"/>
+              </a:rPr>
+              <a:t>Resòmsabilidad fiscal</a:t>
+            </a:r>
+            <a:endParaRPr sz="900">
+              <a:solidFill>
+                <a:srgbClr val="93C47D"/>
+              </a:solidFill>
+              <a:latin typeface="Montserrat"/>
+              <a:ea typeface="Montserrat"/>
+              <a:cs typeface="Montserrat"/>
+              <a:sym typeface="Montserrat"/>
+            </a:endParaRPr>
+          </a:p>
+        </p:txBody>
+      </p:sp>
+      <p:sp>
+        <p:nvSpPr>
+          <p:cNvPr id="144" name="Google Shape;144;p19"/>
+          <p:cNvSpPr/>
+          <p:nvPr/>
+        </p:nvSpPr>
+        <p:spPr>
+          <a:xfrm>
+            <a:off x="5828818" y="4454950"/>
+            <a:ext cx="1894200" cy="401700"/>
+          </a:xfrm>
+          <a:prstGeom prst="roundRect">
+            <a:avLst>
+              <a:gd fmla="val 26475" name="adj"/>
+            </a:avLst>
+          </a:prstGeom>
+          <a:solidFill>
+            <a:srgbClr val="188038"/>
+          </a:solidFill>
+          <a:ln cap="flat" cmpd="sng" w="9525">
+            <a:solidFill>
+              <a:srgbClr val="188038"/>
+            </a:solidFill>
+            <a:prstDash val="solid"/>
+            <a:round/>
+            <a:headEnd len="sm" w="sm" type="none"/>
+            <a:tailEnd len="sm" w="sm" type="none"/>
+          </a:ln>
+        </p:spPr>
+        <p:txBody>
+          <a:bodyPr anchorCtr="0" anchor="ctr" bIns="91425" lIns="91425" spcFirstLastPara="1" rIns="91425" wrap="square" tIns="91425">
+            <a:noAutofit/>
+          </a:bodyPr>
+          <a:lstStyle/>
+          <a:p>
+            <a:pPr indent="0" lvl="0" marL="0" rtl="0" algn="ctr">
+              <a:spcBef>
+                <a:spcPts val="0"/>
+              </a:spcBef>
+              <a:spcAft>
+                <a:spcPts val="0"/>
+              </a:spcAft>
+              <a:buNone/>
+            </a:pPr>
+            <a:r>
+              <a:rPr b="1" lang="es-419" sz="1100">
+                <a:solidFill>
+                  <a:schemeClr val="lt1"/>
+                </a:solidFill>
+                <a:latin typeface="Montserrat"/>
+                <a:ea typeface="Montserrat"/>
+                <a:cs typeface="Montserrat"/>
+                <a:sym typeface="Montserrat"/>
+              </a:rPr>
+              <a:t>GENERAR </a:t>
+            </a:r>
+            <a:endParaRPr b="1" sz="1100">
+              <a:solidFill>
+                <a:schemeClr val="lt1"/>
+              </a:solidFill>
+              <a:latin typeface="Montserrat"/>
+              <a:ea typeface="Montserrat"/>
+              <a:cs typeface="Montserrat"/>
+              <a:sym typeface="Montserrat"/>
             </a:endParaRPr>
           </a:p>
         </p:txBody>
@@ -9700,9 +13901,624 @@
 <file path=ppt/slides/slide8.xml><?xml version="1.0" encoding="utf-8"?>
 <p:sld xmlns:a="http://schemas.openxmlformats.org/drawingml/2006/main" xmlns:r="http://schemas.openxmlformats.org/officeDocument/2006/relationships" xmlns:mc="http://schemas.openxmlformats.org/markup-compatibility/2006" xmlns:mv="urn:schemas-microsoft-com:mac:vml" xmlns:p="http://schemas.openxmlformats.org/presentationml/2006/main" xmlns:c="http://schemas.openxmlformats.org/drawingml/2006/chart" xmlns:dgm="http://schemas.openxmlformats.org/drawingml/2006/diagram" xmlns:o="urn:schemas-microsoft-com:office:office" xmlns:v="urn:schemas-microsoft-com:vml" xmlns:pvml="urn:schemas-microsoft-com:office:powerpoint" xmlns:com="http://schemas.openxmlformats.org/drawingml/2006/compatibility" xmlns:p14="http://schemas.microsoft.com/office/powerpoint/2010/main" xmlns:p15="http://schemas.microsoft.com/office/powerpoint/2012/main" xmlns:ahyp="http://schemas.microsoft.com/office/drawing/2018/hyperlinkcolor">
   <p:cSld>
+    <p:bg>
+      <p:bgPr>
+        <a:solidFill>
+          <a:srgbClr val="EFEFEF"/>
+        </a:solidFill>
+      </p:bgPr>
+    </p:bg>
     <p:spTree>
       <p:nvGrpSpPr>
-        <p:cNvPr id="131" name="Shape 131"/>
+        <p:cNvPr id="148" name="Shape 148"/>
+        <p:cNvGrpSpPr/>
+        <p:nvPr/>
+      </p:nvGrpSpPr>
+      <p:grpSpPr>
+        <a:xfrm>
+          <a:off x="0" y="0"/>
+          <a:ext cx="0" cy="0"/>
+          <a:chOff x="0" y="0"/>
+          <a:chExt cx="0" cy="0"/>
+        </a:xfrm>
+      </p:grpSpPr>
+      <p:sp>
+        <p:nvSpPr>
+          <p:cNvPr id="149" name="Google Shape;149;p20"/>
+          <p:cNvSpPr/>
+          <p:nvPr/>
+        </p:nvSpPr>
+        <p:spPr>
+          <a:xfrm>
+            <a:off x="129500" y="987950"/>
+            <a:ext cx="8903700" cy="4062600"/>
+          </a:xfrm>
+          <a:prstGeom prst="roundRect">
+            <a:avLst>
+              <a:gd fmla="val 2154" name="adj"/>
+            </a:avLst>
+          </a:prstGeom>
+          <a:solidFill>
+            <a:schemeClr val="lt1"/>
+          </a:solidFill>
+          <a:ln cap="flat" cmpd="sng" w="9525">
+            <a:solidFill>
+              <a:schemeClr val="lt1"/>
+            </a:solidFill>
+            <a:prstDash val="solid"/>
+            <a:round/>
+            <a:headEnd len="sm" w="sm" type="none"/>
+            <a:tailEnd len="sm" w="sm" type="none"/>
+          </a:ln>
+        </p:spPr>
+        <p:txBody>
+          <a:bodyPr anchorCtr="0" anchor="ctr" bIns="91425" lIns="91425" spcFirstLastPara="1" rIns="91425" wrap="square" tIns="91425">
+            <a:noAutofit/>
+          </a:bodyPr>
+          <a:lstStyle/>
+          <a:p>
+            <a:pPr indent="0" lvl="0" marL="0" rtl="0" algn="ctr">
+              <a:spcBef>
+                <a:spcPts val="0"/>
+              </a:spcBef>
+              <a:spcAft>
+                <a:spcPts val="0"/>
+              </a:spcAft>
+              <a:buNone/>
+            </a:pPr>
+            <a:r>
+              <a:t/>
+            </a:r>
+            <a:endParaRPr>
+              <a:solidFill>
+                <a:srgbClr val="274E13"/>
+              </a:solidFill>
+              <a:latin typeface="Montserrat"/>
+              <a:ea typeface="Montserrat"/>
+              <a:cs typeface="Montserrat"/>
+              <a:sym typeface="Montserrat"/>
+            </a:endParaRPr>
+          </a:p>
+        </p:txBody>
+      </p:sp>
+      <p:sp>
+        <p:nvSpPr>
+          <p:cNvPr id="150" name="Google Shape;150;p20"/>
+          <p:cNvSpPr/>
+          <p:nvPr/>
+        </p:nvSpPr>
+        <p:spPr>
+          <a:xfrm>
+            <a:off x="6915167" y="92825"/>
+            <a:ext cx="1662900" cy="364500"/>
+          </a:xfrm>
+          <a:prstGeom prst="roundRect">
+            <a:avLst>
+              <a:gd fmla="val 16667" name="adj"/>
+            </a:avLst>
+          </a:prstGeom>
+          <a:solidFill>
+            <a:srgbClr val="008629"/>
+          </a:solidFill>
+          <a:ln cap="flat" cmpd="sng" w="9525">
+            <a:solidFill>
+              <a:srgbClr val="008629"/>
+            </a:solidFill>
+            <a:prstDash val="solid"/>
+            <a:round/>
+            <a:headEnd len="sm" w="sm" type="none"/>
+            <a:tailEnd len="sm" w="sm" type="none"/>
+          </a:ln>
+        </p:spPr>
+        <p:txBody>
+          <a:bodyPr anchorCtr="0" anchor="ctr" bIns="91425" lIns="91425" spcFirstLastPara="1" rIns="91425" wrap="square" tIns="91425">
+            <a:noAutofit/>
+          </a:bodyPr>
+          <a:lstStyle/>
+          <a:p>
+            <a:pPr indent="0" lvl="0" marL="0" rtl="0" algn="ctr">
+              <a:spcBef>
+                <a:spcPts val="0"/>
+              </a:spcBef>
+              <a:spcAft>
+                <a:spcPts val="0"/>
+              </a:spcAft>
+              <a:buNone/>
+            </a:pPr>
+            <a:r>
+              <a:rPr lang="es-419" sz="800">
+                <a:solidFill>
+                  <a:schemeClr val="lt1"/>
+                </a:solidFill>
+                <a:latin typeface="Montserrat ExtraBold"/>
+                <a:ea typeface="Montserrat ExtraBold"/>
+                <a:cs typeface="Montserrat ExtraBold"/>
+                <a:sym typeface="Montserrat ExtraBold"/>
+              </a:rPr>
+              <a:t>BUSCAR</a:t>
+            </a:r>
+            <a:endParaRPr sz="800">
+              <a:solidFill>
+                <a:schemeClr val="lt1"/>
+              </a:solidFill>
+              <a:latin typeface="Montserrat ExtraBold"/>
+              <a:ea typeface="Montserrat ExtraBold"/>
+              <a:cs typeface="Montserrat ExtraBold"/>
+              <a:sym typeface="Montserrat ExtraBold"/>
+            </a:endParaRPr>
+          </a:p>
+        </p:txBody>
+      </p:sp>
+      <p:sp>
+        <p:nvSpPr>
+          <p:cNvPr id="151" name="Google Shape;151;p20"/>
+          <p:cNvSpPr/>
+          <p:nvPr/>
+        </p:nvSpPr>
+        <p:spPr>
+          <a:xfrm>
+            <a:off x="8649534" y="92825"/>
+            <a:ext cx="383700" cy="364500"/>
+          </a:xfrm>
+          <a:prstGeom prst="roundRect">
+            <a:avLst>
+              <a:gd fmla="val 23333" name="adj"/>
+            </a:avLst>
+          </a:prstGeom>
+          <a:solidFill>
+            <a:schemeClr val="lt1"/>
+          </a:solidFill>
+          <a:ln cap="flat" cmpd="sng" w="9525">
+            <a:solidFill>
+              <a:schemeClr val="lt1"/>
+            </a:solidFill>
+            <a:prstDash val="solid"/>
+            <a:round/>
+            <a:headEnd len="sm" w="sm" type="none"/>
+            <a:tailEnd len="sm" w="sm" type="none"/>
+          </a:ln>
+        </p:spPr>
+        <p:txBody>
+          <a:bodyPr anchorCtr="0" anchor="ctr" bIns="91425" lIns="91425" spcFirstLastPara="1" rIns="91425" wrap="square" tIns="91425">
+            <a:noAutofit/>
+          </a:bodyPr>
+          <a:lstStyle/>
+          <a:p>
+            <a:pPr indent="0" lvl="0" marL="0" rtl="0" algn="ctr">
+              <a:spcBef>
+                <a:spcPts val="0"/>
+              </a:spcBef>
+              <a:spcAft>
+                <a:spcPts val="0"/>
+              </a:spcAft>
+              <a:buNone/>
+            </a:pPr>
+            <a:r>
+              <a:rPr lang="es-419" sz="1000">
+                <a:solidFill>
+                  <a:srgbClr val="008629"/>
+                </a:solidFill>
+                <a:latin typeface="Montserrat"/>
+                <a:ea typeface="Montserrat"/>
+                <a:cs typeface="Montserrat"/>
+                <a:sym typeface="Montserrat"/>
+              </a:rPr>
+              <a:t>X</a:t>
+            </a:r>
+            <a:endParaRPr sz="1000">
+              <a:solidFill>
+                <a:srgbClr val="008629"/>
+              </a:solidFill>
+              <a:latin typeface="Montserrat"/>
+              <a:ea typeface="Montserrat"/>
+              <a:cs typeface="Montserrat"/>
+              <a:sym typeface="Montserrat"/>
+            </a:endParaRPr>
+          </a:p>
+        </p:txBody>
+      </p:sp>
+      <p:sp>
+        <p:nvSpPr>
+          <p:cNvPr id="152" name="Google Shape;152;p20"/>
+          <p:cNvSpPr/>
+          <p:nvPr/>
+        </p:nvSpPr>
+        <p:spPr>
+          <a:xfrm>
+            <a:off x="129492" y="92825"/>
+            <a:ext cx="6714300" cy="364500"/>
+          </a:xfrm>
+          <a:prstGeom prst="roundRect">
+            <a:avLst>
+              <a:gd fmla="val 16667" name="adj"/>
+            </a:avLst>
+          </a:prstGeom>
+          <a:solidFill>
+            <a:srgbClr val="FFFFFF"/>
+          </a:solidFill>
+          <a:ln cap="flat" cmpd="sng" w="9525">
+            <a:solidFill>
+              <a:srgbClr val="FFFFFF"/>
+            </a:solidFill>
+            <a:prstDash val="solid"/>
+            <a:round/>
+            <a:headEnd len="sm" w="sm" type="none"/>
+            <a:tailEnd len="sm" w="sm" type="none"/>
+          </a:ln>
+        </p:spPr>
+        <p:txBody>
+          <a:bodyPr anchorCtr="0" anchor="ctr" bIns="91425" lIns="91425" spcFirstLastPara="1" rIns="91425" wrap="square" tIns="91425">
+            <a:noAutofit/>
+          </a:bodyPr>
+          <a:lstStyle/>
+          <a:p>
+            <a:pPr indent="457200" lvl="0" marL="0" rtl="0" algn="l">
+              <a:spcBef>
+                <a:spcPts val="0"/>
+              </a:spcBef>
+              <a:spcAft>
+                <a:spcPts val="0"/>
+              </a:spcAft>
+              <a:buNone/>
+            </a:pPr>
+            <a:r>
+              <a:rPr lang="es-419" sz="800">
+                <a:solidFill>
+                  <a:srgbClr val="CCCCCC"/>
+                </a:solidFill>
+                <a:latin typeface="Montserrat"/>
+                <a:ea typeface="Montserrat"/>
+                <a:cs typeface="Montserrat"/>
+                <a:sym typeface="Montserrat"/>
+              </a:rPr>
+              <a:t>Buscar por número de factura. nombre de cliente, proveedor…</a:t>
+            </a:r>
+            <a:endParaRPr sz="800">
+              <a:solidFill>
+                <a:srgbClr val="CCCCCC"/>
+              </a:solidFill>
+              <a:latin typeface="Montserrat"/>
+              <a:ea typeface="Montserrat"/>
+              <a:cs typeface="Montserrat"/>
+              <a:sym typeface="Montserrat"/>
+            </a:endParaRPr>
+          </a:p>
+        </p:txBody>
+      </p:sp>
+      <p:sp>
+        <p:nvSpPr>
+          <p:cNvPr id="153" name="Google Shape;153;p20"/>
+          <p:cNvSpPr/>
+          <p:nvPr/>
+        </p:nvSpPr>
+        <p:spPr>
+          <a:xfrm>
+            <a:off x="2983749" y="540388"/>
+            <a:ext cx="1339500" cy="364500"/>
+          </a:xfrm>
+          <a:prstGeom prst="roundRect">
+            <a:avLst>
+              <a:gd fmla="val 16667" name="adj"/>
+            </a:avLst>
+          </a:prstGeom>
+          <a:solidFill>
+            <a:srgbClr val="FFFFFF"/>
+          </a:solidFill>
+          <a:ln cap="flat" cmpd="sng" w="9525">
+            <a:solidFill>
+              <a:srgbClr val="FFFFFF"/>
+            </a:solidFill>
+            <a:prstDash val="solid"/>
+            <a:round/>
+            <a:headEnd len="sm" w="sm" type="none"/>
+            <a:tailEnd len="sm" w="sm" type="none"/>
+          </a:ln>
+        </p:spPr>
+        <p:txBody>
+          <a:bodyPr anchorCtr="0" anchor="ctr" bIns="91425" lIns="91425" spcFirstLastPara="1" rIns="91425" wrap="square" tIns="91425">
+            <a:noAutofit/>
+          </a:bodyPr>
+          <a:lstStyle/>
+          <a:p>
+            <a:pPr indent="0" lvl="0" marL="0" rtl="0" algn="ctr">
+              <a:spcBef>
+                <a:spcPts val="0"/>
+              </a:spcBef>
+              <a:spcAft>
+                <a:spcPts val="0"/>
+              </a:spcAft>
+              <a:buNone/>
+            </a:pPr>
+            <a:r>
+              <a:rPr lang="es-419" sz="800">
+                <a:solidFill>
+                  <a:srgbClr val="CCCCCC"/>
+                </a:solidFill>
+                <a:latin typeface="Montserrat"/>
+                <a:ea typeface="Montserrat"/>
+                <a:cs typeface="Montserrat"/>
+                <a:sym typeface="Montserrat"/>
+              </a:rPr>
+              <a:t>Filtrar por fecha</a:t>
+            </a:r>
+            <a:endParaRPr sz="800">
+              <a:solidFill>
+                <a:srgbClr val="CCCCCC"/>
+              </a:solidFill>
+              <a:latin typeface="Montserrat"/>
+              <a:ea typeface="Montserrat"/>
+              <a:cs typeface="Montserrat"/>
+              <a:sym typeface="Montserrat"/>
+            </a:endParaRPr>
+          </a:p>
+        </p:txBody>
+      </p:sp>
+      <p:sp>
+        <p:nvSpPr>
+          <p:cNvPr id="154" name="Google Shape;154;p20"/>
+          <p:cNvSpPr/>
+          <p:nvPr/>
+        </p:nvSpPr>
+        <p:spPr>
+          <a:xfrm>
+            <a:off x="129499" y="540375"/>
+            <a:ext cx="1339500" cy="364500"/>
+          </a:xfrm>
+          <a:prstGeom prst="roundRect">
+            <a:avLst>
+              <a:gd fmla="val 16667" name="adj"/>
+            </a:avLst>
+          </a:prstGeom>
+          <a:solidFill>
+            <a:srgbClr val="FFFFFF"/>
+          </a:solidFill>
+          <a:ln cap="flat" cmpd="sng" w="9525">
+            <a:solidFill>
+              <a:srgbClr val="FFFFFF"/>
+            </a:solidFill>
+            <a:prstDash val="solid"/>
+            <a:round/>
+            <a:headEnd len="sm" w="sm" type="none"/>
+            <a:tailEnd len="sm" w="sm" type="none"/>
+          </a:ln>
+        </p:spPr>
+        <p:txBody>
+          <a:bodyPr anchorCtr="0" anchor="ctr" bIns="91425" lIns="91425" spcFirstLastPara="1" rIns="91425" wrap="square" tIns="91425">
+            <a:noAutofit/>
+          </a:bodyPr>
+          <a:lstStyle/>
+          <a:p>
+            <a:pPr indent="0" lvl="0" marL="0" rtl="0" algn="ctr">
+              <a:spcBef>
+                <a:spcPts val="0"/>
+              </a:spcBef>
+              <a:spcAft>
+                <a:spcPts val="0"/>
+              </a:spcAft>
+              <a:buNone/>
+            </a:pPr>
+            <a:r>
+              <a:rPr lang="es-419" sz="800">
+                <a:solidFill>
+                  <a:srgbClr val="CCCCCC"/>
+                </a:solidFill>
+                <a:latin typeface="Montserrat"/>
+                <a:ea typeface="Montserrat"/>
+                <a:cs typeface="Montserrat"/>
+                <a:sym typeface="Montserrat"/>
+              </a:rPr>
+              <a:t>Más recientes</a:t>
+            </a:r>
+            <a:endParaRPr sz="800">
+              <a:solidFill>
+                <a:srgbClr val="CCCCCC"/>
+              </a:solidFill>
+              <a:latin typeface="Montserrat"/>
+              <a:ea typeface="Montserrat"/>
+              <a:cs typeface="Montserrat"/>
+              <a:sym typeface="Montserrat"/>
+            </a:endParaRPr>
+          </a:p>
+        </p:txBody>
+      </p:sp>
+      <p:sp>
+        <p:nvSpPr>
+          <p:cNvPr id="155" name="Google Shape;155;p20"/>
+          <p:cNvSpPr/>
+          <p:nvPr/>
+        </p:nvSpPr>
+        <p:spPr>
+          <a:xfrm>
+            <a:off x="1556624" y="540375"/>
+            <a:ext cx="1339500" cy="364500"/>
+          </a:xfrm>
+          <a:prstGeom prst="roundRect">
+            <a:avLst>
+              <a:gd fmla="val 16667" name="adj"/>
+            </a:avLst>
+          </a:prstGeom>
+          <a:solidFill>
+            <a:srgbClr val="FFFFFF"/>
+          </a:solidFill>
+          <a:ln cap="flat" cmpd="sng" w="9525">
+            <a:solidFill>
+              <a:srgbClr val="FFFFFF"/>
+            </a:solidFill>
+            <a:prstDash val="solid"/>
+            <a:round/>
+            <a:headEnd len="sm" w="sm" type="none"/>
+            <a:tailEnd len="sm" w="sm" type="none"/>
+          </a:ln>
+        </p:spPr>
+        <p:txBody>
+          <a:bodyPr anchorCtr="0" anchor="ctr" bIns="91425" lIns="91425" spcFirstLastPara="1" rIns="91425" wrap="square" tIns="91425">
+            <a:noAutofit/>
+          </a:bodyPr>
+          <a:lstStyle/>
+          <a:p>
+            <a:pPr indent="0" lvl="0" marL="0" rtl="0" algn="ctr">
+              <a:spcBef>
+                <a:spcPts val="0"/>
+              </a:spcBef>
+              <a:spcAft>
+                <a:spcPts val="0"/>
+              </a:spcAft>
+              <a:buNone/>
+            </a:pPr>
+            <a:r>
+              <a:rPr lang="es-419" sz="800">
+                <a:solidFill>
+                  <a:srgbClr val="CCCCCC"/>
+                </a:solidFill>
+                <a:latin typeface="Montserrat"/>
+                <a:ea typeface="Montserrat"/>
+                <a:cs typeface="Montserrat"/>
+                <a:sym typeface="Montserrat"/>
+              </a:rPr>
+              <a:t>Más Antiguas</a:t>
+            </a:r>
+            <a:endParaRPr sz="800">
+              <a:solidFill>
+                <a:srgbClr val="CCCCCC"/>
+              </a:solidFill>
+              <a:latin typeface="Montserrat"/>
+              <a:ea typeface="Montserrat"/>
+              <a:cs typeface="Montserrat"/>
+              <a:sym typeface="Montserrat"/>
+            </a:endParaRPr>
+          </a:p>
+        </p:txBody>
+      </p:sp>
+      <p:sp>
+        <p:nvSpPr>
+          <p:cNvPr id="156" name="Google Shape;156;p20"/>
+          <p:cNvSpPr txBox="1"/>
+          <p:nvPr/>
+        </p:nvSpPr>
+        <p:spPr>
+          <a:xfrm>
+            <a:off x="4410875" y="607725"/>
+            <a:ext cx="4628700" cy="229800"/>
+          </a:xfrm>
+          <a:prstGeom prst="rect">
+            <a:avLst/>
+          </a:prstGeom>
+          <a:noFill/>
+          <a:ln>
+            <a:noFill/>
+          </a:ln>
+        </p:spPr>
+        <p:txBody>
+          <a:bodyPr anchorCtr="0" anchor="ctr" bIns="91425" lIns="91425" spcFirstLastPara="1" rIns="91425" wrap="square" tIns="91425">
+            <a:noAutofit/>
+          </a:bodyPr>
+          <a:lstStyle/>
+          <a:p>
+            <a:pPr indent="0" lvl="0" marL="0" rtl="0" algn="ctr">
+              <a:spcBef>
+                <a:spcPts val="0"/>
+              </a:spcBef>
+              <a:spcAft>
+                <a:spcPts val="0"/>
+              </a:spcAft>
+              <a:buNone/>
+            </a:pPr>
+            <a:r>
+              <a:rPr lang="es-419" sz="1800">
+                <a:solidFill>
+                  <a:srgbClr val="008629"/>
+                </a:solidFill>
+                <a:latin typeface="Montserrat Black"/>
+                <a:ea typeface="Montserrat Black"/>
+                <a:cs typeface="Montserrat Black"/>
+                <a:sym typeface="Montserrat Black"/>
+              </a:rPr>
+              <a:t>FACTURA ELECTRÓNICA</a:t>
+            </a:r>
+            <a:endParaRPr sz="1800">
+              <a:solidFill>
+                <a:srgbClr val="008629"/>
+              </a:solidFill>
+              <a:latin typeface="Montserrat Black"/>
+              <a:ea typeface="Montserrat Black"/>
+              <a:cs typeface="Montserrat Black"/>
+              <a:sym typeface="Montserrat Black"/>
+            </a:endParaRPr>
+          </a:p>
+        </p:txBody>
+      </p:sp>
+      <p:sp>
+        <p:nvSpPr>
+          <p:cNvPr id="157" name="Google Shape;157;p20"/>
+          <p:cNvSpPr txBox="1"/>
+          <p:nvPr/>
+        </p:nvSpPr>
+        <p:spPr>
+          <a:xfrm>
+            <a:off x="88100" y="1042734"/>
+            <a:ext cx="8986500" cy="229800"/>
+          </a:xfrm>
+          <a:prstGeom prst="rect">
+            <a:avLst/>
+          </a:prstGeom>
+          <a:noFill/>
+          <a:ln>
+            <a:noFill/>
+          </a:ln>
+        </p:spPr>
+        <p:txBody>
+          <a:bodyPr anchorCtr="0" anchor="ctr" bIns="91425" lIns="91425" spcFirstLastPara="1" rIns="91425" wrap="square" tIns="91425">
+            <a:noAutofit/>
+          </a:bodyPr>
+          <a:lstStyle/>
+          <a:p>
+            <a:pPr indent="0" lvl="0" marL="0" rtl="0" algn="ctr">
+              <a:spcBef>
+                <a:spcPts val="0"/>
+              </a:spcBef>
+              <a:spcAft>
+                <a:spcPts val="0"/>
+              </a:spcAft>
+              <a:buNone/>
+            </a:pPr>
+            <a:r>
+              <a:rPr lang="es-419" sz="800">
+                <a:solidFill>
+                  <a:srgbClr val="008629"/>
+                </a:solidFill>
+                <a:latin typeface="Montserrat"/>
+                <a:ea typeface="Montserrat"/>
+                <a:cs typeface="Montserrat"/>
+                <a:sym typeface="Montserrat"/>
+              </a:rPr>
+              <a:t>ID FACTURA			ID CLIENTE			FECHA			NOMBRE CLIENTE			TOTAL		PDF</a:t>
+            </a:r>
+            <a:endParaRPr sz="800">
+              <a:solidFill>
+                <a:srgbClr val="008629"/>
+              </a:solidFill>
+              <a:latin typeface="Montserrat"/>
+              <a:ea typeface="Montserrat"/>
+              <a:cs typeface="Montserrat"/>
+              <a:sym typeface="Montserrat"/>
+            </a:endParaRPr>
+          </a:p>
+        </p:txBody>
+      </p:sp>
+    </p:spTree>
+  </p:cSld>
+  <p:clrMapOvr>
+    <a:masterClrMapping/>
+  </p:clrMapOvr>
+</p:sld>
+</file>
+
+<file path=ppt/slides/slide9.xml><?xml version="1.0" encoding="utf-8"?>
+<p:sld xmlns:a="http://schemas.openxmlformats.org/drawingml/2006/main" xmlns:r="http://schemas.openxmlformats.org/officeDocument/2006/relationships" xmlns:mc="http://schemas.openxmlformats.org/markup-compatibility/2006" xmlns:mv="urn:schemas-microsoft-com:mac:vml" xmlns:p="http://schemas.openxmlformats.org/presentationml/2006/main" xmlns:c="http://schemas.openxmlformats.org/drawingml/2006/chart" xmlns:dgm="http://schemas.openxmlformats.org/drawingml/2006/diagram" xmlns:o="urn:schemas-microsoft-com:office:office" xmlns:v="urn:schemas-microsoft-com:vml" xmlns:pvml="urn:schemas-microsoft-com:office:powerpoint" xmlns:com="http://schemas.openxmlformats.org/drawingml/2006/compatibility" xmlns:p14="http://schemas.microsoft.com/office/powerpoint/2010/main" xmlns:p15="http://schemas.microsoft.com/office/powerpoint/2012/main" xmlns:ahyp="http://schemas.microsoft.com/office/drawing/2018/hyperlinkcolor">
+  <p:cSld>
+    <p:spTree>
+      <p:nvGrpSpPr>
+        <p:cNvPr id="161" name="Shape 161"/>
         <p:cNvGrpSpPr/>
         <p:nvPr/>
       </p:nvGrpSpPr>
@@ -9723,6 +14539,285 @@
 </file>
 
 <file path=ppt/theme/theme1.xml><?xml version="1.0" encoding="utf-8"?>
+<a:theme xmlns:a="http://schemas.openxmlformats.org/drawingml/2006/main" xmlns:r="http://schemas.openxmlformats.org/officeDocument/2006/relationships" name="Simple Light">
+  <a:themeElements>
+    <a:clrScheme name="Simple Light">
+      <a:dk1>
+        <a:srgbClr val="000000"/>
+      </a:dk1>
+      <a:lt1>
+        <a:srgbClr val="FFFFFF"/>
+      </a:lt1>
+      <a:dk2>
+        <a:srgbClr val="595959"/>
+      </a:dk2>
+      <a:lt2>
+        <a:srgbClr val="EEEEEE"/>
+      </a:lt2>
+      <a:accent1>
+        <a:srgbClr val="4285F4"/>
+      </a:accent1>
+      <a:accent2>
+        <a:srgbClr val="212121"/>
+      </a:accent2>
+      <a:accent3>
+        <a:srgbClr val="78909C"/>
+      </a:accent3>
+      <a:accent4>
+        <a:srgbClr val="FFAB40"/>
+      </a:accent4>
+      <a:accent5>
+        <a:srgbClr val="0097A7"/>
+      </a:accent5>
+      <a:accent6>
+        <a:srgbClr val="EEFF41"/>
+      </a:accent6>
+      <a:hlink>
+        <a:srgbClr val="0097A7"/>
+      </a:hlink>
+      <a:folHlink>
+        <a:srgbClr val="0097A7"/>
+      </a:folHlink>
+    </a:clrScheme>
+    <a:fontScheme name="Office">
+      <a:majorFont>
+        <a:latin typeface="Arial"/>
+        <a:ea typeface=""/>
+        <a:cs typeface=""/>
+        <a:font script="Jpan" typeface="ＭＳ Ｐゴシック"/>
+        <a:font script="Hang" typeface="맑은 고딕"/>
+        <a:font script="Hans" typeface="宋体"/>
+        <a:font script="Hant" typeface="新細明體"/>
+        <a:font script="Arab" typeface="Times New Roman"/>
+        <a:font script="Hebr" typeface="Times New Roman"/>
+        <a:font script="Thai" typeface="Angsana New"/>
+        <a:font script="Ethi" typeface="Nyala"/>
+        <a:font script="Beng" typeface="Vrinda"/>
+        <a:font script="Gujr" typeface="Shruti"/>
+        <a:font script="Khmr" typeface="MoolBoran"/>
+        <a:font script="Knda" typeface="Tunga"/>
+        <a:font script="Guru" typeface="Raavi"/>
+        <a:font script="Cans" typeface="Euphemia"/>
+        <a:font script="Cher" typeface="Plantagenet Cherokee"/>
+        <a:font script="Yiii" typeface="Microsoft Yi Baiti"/>
+        <a:font script="Tibt" typeface="Microsoft Himalaya"/>
+        <a:font script="Thaa" typeface="MV Boli"/>
+        <a:font script="Deva" typeface="Mangal"/>
+        <a:font script="Telu" typeface="Gautami"/>
+        <a:font script="Taml" typeface="Latha"/>
+        <a:font script="Syrc" typeface="Estrangelo Edessa"/>
+        <a:font script="Orya" typeface="Kalinga"/>
+        <a:font script="Mlym" typeface="Kartika"/>
+        <a:font script="Laoo" typeface="DokChampa"/>
+        <a:font script="Sinh" typeface="Iskoola Pota"/>
+        <a:font script="Mong" typeface="Mongolian Baiti"/>
+        <a:font script="Viet" typeface="Times New Roman"/>
+        <a:font script="Uigh" typeface="Microsoft Uighur"/>
+        <a:font script="Geor" typeface="Sylfaen"/>
+      </a:majorFont>
+      <a:minorFont>
+        <a:latin typeface="Arial"/>
+        <a:ea typeface=""/>
+        <a:cs typeface=""/>
+        <a:font script="Jpan" typeface="ＭＳ Ｐゴシック"/>
+        <a:font script="Hang" typeface="맑은 고딕"/>
+        <a:font script="Hans" typeface="宋体"/>
+        <a:font script="Hant" typeface="新細明體"/>
+        <a:font script="Arab" typeface="Arial"/>
+        <a:font script="Hebr" typeface="Arial"/>
+        <a:font script="Thai" typeface="Cordia New"/>
+        <a:font script="Ethi" typeface="Nyala"/>
+        <a:font script="Beng" typeface="Vrinda"/>
+        <a:font script="Gujr" typeface="Shruti"/>
+        <a:font script="Khmr" typeface="DaunPenh"/>
+        <a:font script="Knda" typeface="Tunga"/>
+        <a:font script="Guru" typeface="Raavi"/>
+        <a:font script="Cans" typeface="Euphemia"/>
+        <a:font script="Cher" typeface="Plantagenet Cherokee"/>
+        <a:font script="Yiii" typeface="Microsoft Yi Baiti"/>
+        <a:font script="Tibt" typeface="Microsoft Himalaya"/>
+        <a:font script="Thaa" typeface="MV Boli"/>
+        <a:font script="Deva" typeface="Mangal"/>
+        <a:font script="Telu" typeface="Gautami"/>
+        <a:font script="Taml" typeface="Latha"/>
+        <a:font script="Syrc" typeface="Estrangelo Edessa"/>
+        <a:font script="Orya" typeface="Kalinga"/>
+        <a:font script="Mlym" typeface="Kartika"/>
+        <a:font script="Laoo" typeface="DokChampa"/>
+        <a:font script="Sinh" typeface="Iskoola Pota"/>
+        <a:font script="Mong" typeface="Mongolian Baiti"/>
+        <a:font script="Viet" typeface="Arial"/>
+        <a:font script="Uigh" typeface="Microsoft Uighur"/>
+        <a:font script="Geor" typeface="Sylfaen"/>
+      </a:minorFont>
+    </a:fontScheme>
+    <a:fmtScheme name="Office">
+      <a:fillStyleLst>
+        <a:solidFill>
+          <a:schemeClr val="phClr"/>
+        </a:solidFill>
+        <a:gradFill rotWithShape="1">
+          <a:gsLst>
+            <a:gs pos="0">
+              <a:schemeClr val="phClr">
+                <a:tint val="50000"/>
+                <a:satMod val="300000"/>
+              </a:schemeClr>
+            </a:gs>
+            <a:gs pos="35000">
+              <a:schemeClr val="phClr">
+                <a:tint val="37000"/>
+                <a:satMod val="300000"/>
+              </a:schemeClr>
+            </a:gs>
+            <a:gs pos="100000">
+              <a:schemeClr val="phClr">
+                <a:tint val="15000"/>
+                <a:satMod val="350000"/>
+              </a:schemeClr>
+            </a:gs>
+          </a:gsLst>
+          <a:lin ang="16200000" scaled="1"/>
+        </a:gradFill>
+        <a:gradFill rotWithShape="1">
+          <a:gsLst>
+            <a:gs pos="0">
+              <a:schemeClr val="phClr">
+                <a:tint val="100000"/>
+                <a:shade val="100000"/>
+                <a:satMod val="130000"/>
+              </a:schemeClr>
+            </a:gs>
+            <a:gs pos="100000">
+              <a:schemeClr val="phClr">
+                <a:tint val="50000"/>
+                <a:shade val="100000"/>
+                <a:satMod val="350000"/>
+              </a:schemeClr>
+            </a:gs>
+          </a:gsLst>
+          <a:lin ang="16200000" scaled="0"/>
+        </a:gradFill>
+      </a:fillStyleLst>
+      <a:lnStyleLst>
+        <a:ln w="9525" cap="flat" cmpd="sng" algn="ctr">
+          <a:solidFill>
+            <a:schemeClr val="phClr">
+              <a:shade val="95000"/>
+              <a:satMod val="105000"/>
+            </a:schemeClr>
+          </a:solidFill>
+          <a:prstDash val="solid"/>
+        </a:ln>
+        <a:ln w="25400" cap="flat" cmpd="sng" algn="ctr">
+          <a:solidFill>
+            <a:schemeClr val="phClr"/>
+          </a:solidFill>
+          <a:prstDash val="solid"/>
+        </a:ln>
+        <a:ln w="38100" cap="flat" cmpd="sng" algn="ctr">
+          <a:solidFill>
+            <a:schemeClr val="phClr"/>
+          </a:solidFill>
+          <a:prstDash val="solid"/>
+        </a:ln>
+      </a:lnStyleLst>
+      <a:effectStyleLst>
+        <a:effectStyle>
+          <a:effectLst>
+            <a:outerShdw blurRad="40000" dist="20000" dir="5400000" rotWithShape="0">
+              <a:srgbClr val="000000">
+                <a:alpha val="38000"/>
+              </a:srgbClr>
+            </a:outerShdw>
+          </a:effectLst>
+        </a:effectStyle>
+        <a:effectStyle>
+          <a:effectLst>
+            <a:outerShdw blurRad="40000" dist="23000" dir="5400000" rotWithShape="0">
+              <a:srgbClr val="000000">
+                <a:alpha val="35000"/>
+              </a:srgbClr>
+            </a:outerShdw>
+          </a:effectLst>
+        </a:effectStyle>
+        <a:effectStyle>
+          <a:effectLst>
+            <a:outerShdw blurRad="40000" dist="23000" dir="5400000" rotWithShape="0">
+              <a:srgbClr val="000000">
+                <a:alpha val="35000"/>
+              </a:srgbClr>
+            </a:outerShdw>
+          </a:effectLst>
+          <a:scene3d>
+            <a:camera prst="orthographicFront">
+              <a:rot lat="0" lon="0" rev="0"/>
+            </a:camera>
+            <a:lightRig rig="threePt" dir="t">
+              <a:rot lat="0" lon="0" rev="1200000"/>
+            </a:lightRig>
+          </a:scene3d>
+          <a:sp3d>
+            <a:bevelT w="63500" h="25400"/>
+          </a:sp3d>
+        </a:effectStyle>
+      </a:effectStyleLst>
+      <a:bgFillStyleLst>
+        <a:solidFill>
+          <a:schemeClr val="phClr"/>
+        </a:solidFill>
+        <a:gradFill rotWithShape="1">
+          <a:gsLst>
+            <a:gs pos="0">
+              <a:schemeClr val="phClr">
+                <a:tint val="40000"/>
+                <a:satMod val="350000"/>
+              </a:schemeClr>
+            </a:gs>
+            <a:gs pos="40000">
+              <a:schemeClr val="phClr">
+                <a:tint val="45000"/>
+                <a:shade val="99000"/>
+                <a:satMod val="350000"/>
+              </a:schemeClr>
+            </a:gs>
+            <a:gs pos="100000">
+              <a:schemeClr val="phClr">
+                <a:shade val="20000"/>
+                <a:satMod val="255000"/>
+              </a:schemeClr>
+            </a:gs>
+          </a:gsLst>
+          <a:path path="circle">
+            <a:fillToRect l="50000" t="-80000" r="50000" b="180000"/>
+          </a:path>
+        </a:gradFill>
+        <a:gradFill rotWithShape="1">
+          <a:gsLst>
+            <a:gs pos="0">
+              <a:schemeClr val="phClr">
+                <a:tint val="80000"/>
+                <a:satMod val="300000"/>
+              </a:schemeClr>
+            </a:gs>
+            <a:gs pos="100000">
+              <a:schemeClr val="phClr">
+                <a:shade val="30000"/>
+                <a:satMod val="200000"/>
+              </a:schemeClr>
+            </a:gs>
+          </a:gsLst>
+          <a:path path="circle">
+            <a:fillToRect l="50000" t="50000" r="50000" b="50000"/>
+          </a:path>
+        </a:gradFill>
+      </a:bgFillStyleLst>
+    </a:fmtScheme>
+  </a:themeElements>
+</a:theme>
+</file>
+
+<file path=ppt/theme/theme2.xml><?xml version="1.0" encoding="utf-8"?>
 <a:theme xmlns:a="http://schemas.openxmlformats.org/drawingml/2006/main" xmlns:r="http://schemas.openxmlformats.org/officeDocument/2006/relationships">
   <a:themeElements>
     <a:clrScheme name="Default">
@@ -9999,283 +15094,4 @@
     </a:fmtScheme>
   </a:themeElements>
 </a:theme>
-</file>
-
-<file path=ppt/theme/theme2.xml><?xml version="1.0" encoding="utf-8"?>
-<a:theme xmlns:a="http://schemas.openxmlformats.org/drawingml/2006/main" xmlns:r="http://schemas.openxmlformats.org/officeDocument/2006/relationships" name="Simple Light">
-  <a:themeElements>
-    <a:clrScheme name="Simple Light">
-      <a:dk1>
-        <a:srgbClr val="000000"/>
-      </a:dk1>
-      <a:lt1>
-        <a:srgbClr val="FFFFFF"/>
-      </a:lt1>
-      <a:dk2>
-        <a:srgbClr val="595959"/>
-      </a:dk2>
-      <a:lt2>
-        <a:srgbClr val="EEEEEE"/>
-      </a:lt2>
-      <a:accent1>
-        <a:srgbClr val="4285F4"/>
-      </a:accent1>
-      <a:accent2>
-        <a:srgbClr val="212121"/>
-      </a:accent2>
-      <a:accent3>
-        <a:srgbClr val="78909C"/>
-      </a:accent3>
-      <a:accent4>
-        <a:srgbClr val="FFAB40"/>
-      </a:accent4>
-      <a:accent5>
-        <a:srgbClr val="0097A7"/>
-      </a:accent5>
-      <a:accent6>
-        <a:srgbClr val="EEFF41"/>
-      </a:accent6>
-      <a:hlink>
-        <a:srgbClr val="0097A7"/>
-      </a:hlink>
-      <a:folHlink>
-        <a:srgbClr val="0097A7"/>
-      </a:folHlink>
-    </a:clrScheme>
-    <a:fontScheme name="Office">
-      <a:majorFont>
-        <a:latin typeface="Arial"/>
-        <a:ea typeface=""/>
-        <a:cs typeface=""/>
-        <a:font script="Jpan" typeface="ＭＳ Ｐゴシック"/>
-        <a:font script="Hang" typeface="맑은 고딕"/>
-        <a:font script="Hans" typeface="宋体"/>
-        <a:font script="Hant" typeface="新細明體"/>
-        <a:font script="Arab" typeface="Times New Roman"/>
-        <a:font script="Hebr" typeface="Times New Roman"/>
-        <a:font script="Thai" typeface="Angsana New"/>
-        <a:font script="Ethi" typeface="Nyala"/>
-        <a:font script="Beng" typeface="Vrinda"/>
-        <a:font script="Gujr" typeface="Shruti"/>
-        <a:font script="Khmr" typeface="MoolBoran"/>
-        <a:font script="Knda" typeface="Tunga"/>
-        <a:font script="Guru" typeface="Raavi"/>
-        <a:font script="Cans" typeface="Euphemia"/>
-        <a:font script="Cher" typeface="Plantagenet Cherokee"/>
-        <a:font script="Yiii" typeface="Microsoft Yi Baiti"/>
-        <a:font script="Tibt" typeface="Microsoft Himalaya"/>
-        <a:font script="Thaa" typeface="MV Boli"/>
-        <a:font script="Deva" typeface="Mangal"/>
-        <a:font script="Telu" typeface="Gautami"/>
-        <a:font script="Taml" typeface="Latha"/>
-        <a:font script="Syrc" typeface="Estrangelo Edessa"/>
-        <a:font script="Orya" typeface="Kalinga"/>
-        <a:font script="Mlym" typeface="Kartika"/>
-        <a:font script="Laoo" typeface="DokChampa"/>
-        <a:font script="Sinh" typeface="Iskoola Pota"/>
-        <a:font script="Mong" typeface="Mongolian Baiti"/>
-        <a:font script="Viet" typeface="Times New Roman"/>
-        <a:font script="Uigh" typeface="Microsoft Uighur"/>
-        <a:font script="Geor" typeface="Sylfaen"/>
-      </a:majorFont>
-      <a:minorFont>
-        <a:latin typeface="Arial"/>
-        <a:ea typeface=""/>
-        <a:cs typeface=""/>
-        <a:font script="Jpan" typeface="ＭＳ Ｐゴシック"/>
-        <a:font script="Hang" typeface="맑은 고딕"/>
-        <a:font script="Hans" typeface="宋体"/>
-        <a:font script="Hant" typeface="新細明體"/>
-        <a:font script="Arab" typeface="Arial"/>
-        <a:font script="Hebr" typeface="Arial"/>
-        <a:font script="Thai" typeface="Cordia New"/>
-        <a:font script="Ethi" typeface="Nyala"/>
-        <a:font script="Beng" typeface="Vrinda"/>
-        <a:font script="Gujr" typeface="Shruti"/>
-        <a:font script="Khmr" typeface="DaunPenh"/>
-        <a:font script="Knda" typeface="Tunga"/>
-        <a:font script="Guru" typeface="Raavi"/>
-        <a:font script="Cans" typeface="Euphemia"/>
-        <a:font script="Cher" typeface="Plantagenet Cherokee"/>
-        <a:font script="Yiii" typeface="Microsoft Yi Baiti"/>
-        <a:font script="Tibt" typeface="Microsoft Himalaya"/>
-        <a:font script="Thaa" typeface="MV Boli"/>
-        <a:font script="Deva" typeface="Mangal"/>
-        <a:font script="Telu" typeface="Gautami"/>
-        <a:font script="Taml" typeface="Latha"/>
-        <a:font script="Syrc" typeface="Estrangelo Edessa"/>
-        <a:font script="Orya" typeface="Kalinga"/>
-        <a:font script="Mlym" typeface="Kartika"/>
-        <a:font script="Laoo" typeface="DokChampa"/>
-        <a:font script="Sinh" typeface="Iskoola Pota"/>
-        <a:font script="Mong" typeface="Mongolian Baiti"/>
-        <a:font script="Viet" typeface="Arial"/>
-        <a:font script="Uigh" typeface="Microsoft Uighur"/>
-        <a:font script="Geor" typeface="Sylfaen"/>
-      </a:minorFont>
-    </a:fontScheme>
-    <a:fmtScheme name="Office">
-      <a:fillStyleLst>
-        <a:solidFill>
-          <a:schemeClr val="phClr"/>
-        </a:solidFill>
-        <a:gradFill rotWithShape="1">
-          <a:gsLst>
-            <a:gs pos="0">
-              <a:schemeClr val="phClr">
-                <a:tint val="50000"/>
-                <a:satMod val="300000"/>
-              </a:schemeClr>
-            </a:gs>
-            <a:gs pos="35000">
-              <a:schemeClr val="phClr">
-                <a:tint val="37000"/>
-                <a:satMod val="300000"/>
-              </a:schemeClr>
-            </a:gs>
-            <a:gs pos="100000">
-              <a:schemeClr val="phClr">
-                <a:tint val="15000"/>
-                <a:satMod val="350000"/>
-              </a:schemeClr>
-            </a:gs>
-          </a:gsLst>
-          <a:lin ang="16200000" scaled="1"/>
-        </a:gradFill>
-        <a:gradFill rotWithShape="1">
-          <a:gsLst>
-            <a:gs pos="0">
-              <a:schemeClr val="phClr">
-                <a:tint val="100000"/>
-                <a:shade val="100000"/>
-                <a:satMod val="130000"/>
-              </a:schemeClr>
-            </a:gs>
-            <a:gs pos="100000">
-              <a:schemeClr val="phClr">
-                <a:tint val="50000"/>
-                <a:shade val="100000"/>
-                <a:satMod val="350000"/>
-              </a:schemeClr>
-            </a:gs>
-          </a:gsLst>
-          <a:lin ang="16200000" scaled="0"/>
-        </a:gradFill>
-      </a:fillStyleLst>
-      <a:lnStyleLst>
-        <a:ln w="9525" cap="flat" cmpd="sng" algn="ctr">
-          <a:solidFill>
-            <a:schemeClr val="phClr">
-              <a:shade val="95000"/>
-              <a:satMod val="105000"/>
-            </a:schemeClr>
-          </a:solidFill>
-          <a:prstDash val="solid"/>
-        </a:ln>
-        <a:ln w="25400" cap="flat" cmpd="sng" algn="ctr">
-          <a:solidFill>
-            <a:schemeClr val="phClr"/>
-          </a:solidFill>
-          <a:prstDash val="solid"/>
-        </a:ln>
-        <a:ln w="38100" cap="flat" cmpd="sng" algn="ctr">
-          <a:solidFill>
-            <a:schemeClr val="phClr"/>
-          </a:solidFill>
-          <a:prstDash val="solid"/>
-        </a:ln>
-      </a:lnStyleLst>
-      <a:effectStyleLst>
-        <a:effectStyle>
-          <a:effectLst>
-            <a:outerShdw blurRad="40000" dist="20000" dir="5400000" rotWithShape="0">
-              <a:srgbClr val="000000">
-                <a:alpha val="38000"/>
-              </a:srgbClr>
-            </a:outerShdw>
-          </a:effectLst>
-        </a:effectStyle>
-        <a:effectStyle>
-          <a:effectLst>
-            <a:outerShdw blurRad="40000" dist="23000" dir="5400000" rotWithShape="0">
-              <a:srgbClr val="000000">
-                <a:alpha val="35000"/>
-              </a:srgbClr>
-            </a:outerShdw>
-          </a:effectLst>
-        </a:effectStyle>
-        <a:effectStyle>
-          <a:effectLst>
-            <a:outerShdw blurRad="40000" dist="23000" dir="5400000" rotWithShape="0">
-              <a:srgbClr val="000000">
-                <a:alpha val="35000"/>
-              </a:srgbClr>
-            </a:outerShdw>
-          </a:effectLst>
-          <a:scene3d>
-            <a:camera prst="orthographicFront">
-              <a:rot lat="0" lon="0" rev="0"/>
-            </a:camera>
-            <a:lightRig rig="threePt" dir="t">
-              <a:rot lat="0" lon="0" rev="1200000"/>
-            </a:lightRig>
-          </a:scene3d>
-          <a:sp3d>
-            <a:bevelT w="63500" h="25400"/>
-          </a:sp3d>
-        </a:effectStyle>
-      </a:effectStyleLst>
-      <a:bgFillStyleLst>
-        <a:solidFill>
-          <a:schemeClr val="phClr"/>
-        </a:solidFill>
-        <a:gradFill rotWithShape="1">
-          <a:gsLst>
-            <a:gs pos="0">
-              <a:schemeClr val="phClr">
-                <a:tint val="40000"/>
-                <a:satMod val="350000"/>
-              </a:schemeClr>
-            </a:gs>
-            <a:gs pos="40000">
-              <a:schemeClr val="phClr">
-                <a:tint val="45000"/>
-                <a:shade val="99000"/>
-                <a:satMod val="350000"/>
-              </a:schemeClr>
-            </a:gs>
-            <a:gs pos="100000">
-              <a:schemeClr val="phClr">
-                <a:shade val="20000"/>
-                <a:satMod val="255000"/>
-              </a:schemeClr>
-            </a:gs>
-          </a:gsLst>
-          <a:path path="circle">
-            <a:fillToRect l="50000" t="-80000" r="50000" b="180000"/>
-          </a:path>
-        </a:gradFill>
-        <a:gradFill rotWithShape="1">
-          <a:gsLst>
-            <a:gs pos="0">
-              <a:schemeClr val="phClr">
-                <a:tint val="80000"/>
-                <a:satMod val="300000"/>
-              </a:schemeClr>
-            </a:gs>
-            <a:gs pos="100000">
-              <a:schemeClr val="phClr">
-                <a:shade val="30000"/>
-                <a:satMod val="200000"/>
-              </a:schemeClr>
-            </a:gs>
-          </a:gsLst>
-          <a:path path="circle">
-            <a:fillToRect l="50000" t="50000" r="50000" b="50000"/>
-          </a:path>
-        </a:gradFill>
-      </a:bgFillStyleLst>
-    </a:fmtScheme>
-  </a:themeElements>
-</a:theme>
 </file>